--- a/assets/flex_tutorial.pptx
+++ b/assets/flex_tutorial.pptx
@@ -4,6 +4,9 @@
   <p:sldMasterIdLst>
     <p:sldMasterId id="2147483648" r:id="rId1"/>
   </p:sldMasterIdLst>
+  <p:notesMasterIdLst>
+    <p:notesMasterId r:id="rId9"/>
+  </p:notesMasterIdLst>
   <p:sldIdLst>
     <p:sldId id="256" r:id="rId2"/>
     <p:sldId id="257" r:id="rId3"/>
@@ -13,9 +16,6 @@
     <p:sldId id="261" r:id="rId7"/>
     <p:sldId id="262" r:id="rId8"/>
   </p:sldIdLst>
-  <p:notesMasterIdLst>
-    <p:notesMasterId r:id="rId9"/>
-  </p:notesMasterIdLst>
   <p:sldSz cx="12192000" cy="6858000"/>
   <p:notesSz cx="6858000" cy="12192000"/>
   <p:defaultTextStyle>
@@ -110,6 +110,11 @@
       </a:defRPr>
     </a:lvl9pPr>
   </p:defaultTextStyle>
+  <p:extLst>
+    <p:ext uri="{EFAFB233-063F-42B5-8137-9DF3F51BA10A}">
+      <p15:sldGuideLst xmlns:p15="http://schemas.microsoft.com/office/powerpoint/2012/main"/>
+    </p:ext>
+  </p:extLst>
 </p:presentation>
 </file>
 
@@ -135,234 +140,10 @@
           <a:chExt cx="0" cy="0"/>
         </a:xfrm>
       </p:grpSpPr>
-      <p:sp>
-        <p:nvSpPr>
-          <p:cNvPr id="2" name="Header Placeholder 1"/>
-          <p:cNvSpPr>
-            <a:spLocks noGrp="1"/>
-          </p:cNvSpPr>
-          <p:nvPr>
-            <p:ph type="hdr" sz="quarter"/>
-          </p:nvPr>
-        </p:nvSpPr>
-        <p:spPr>
-          <a:xfrm>
-            <a:off x="0" y="0"/>
-            <a:ext cx="2971800" cy="458788"/>
-          </a:xfrm>
-          <a:prstGeom prst="rect">
-            <a:avLst/>
-          </a:prstGeom>
-        </p:spPr>
-        <p:txBody>
-          <a:bodyPr vert="horz" lIns="91440" tIns="45720" rIns="91440" bIns="45720" rtlCol="0"/>
-          <a:lstStyle>
-            <a:lvl1pPr algn="l">
-              <a:defRPr sz="1200"/>
-            </a:lvl1pPr>
-          </a:lstStyle>
-          <a:p>
-            <a:endParaRPr lang="en-US"/>
-          </a:p>
-        </p:txBody>
-      </p:sp>
-      <p:sp>
-        <p:nvSpPr>
-          <p:cNvPr id="3" name="Date Placeholder 2"/>
-          <p:cNvSpPr>
-            <a:spLocks noGrp="1"/>
-          </p:cNvSpPr>
-          <p:nvPr>
-            <p:ph type="dt" idx="1"/>
-          </p:nvPr>
-        </p:nvSpPr>
-        <p:spPr>
-          <a:xfrm>
-            <a:off x="3884613" y="0"/>
-            <a:ext cx="2971800" cy="458788"/>
-          </a:xfrm>
-          <a:prstGeom prst="rect">
-            <a:avLst/>
-          </a:prstGeom>
-        </p:spPr>
-        <p:txBody>
-          <a:bodyPr vert="horz" lIns="91440" tIns="45720" rIns="91440" bIns="45720" rtlCol="0"/>
-          <a:lstStyle>
-            <a:lvl1pPr algn="r">
-              <a:defRPr sz="1200"/>
-            </a:lvl1pPr>
-          </a:lstStyle>
-          <a:p>
-            <a:fld id="{5282F153-3F37-0F45-9E97-73ACFA13230C}" type="datetimeFigureOut">
-              <a:rPr lang="en-US"/>
-              <a:t>7/23/19</a:t>
-            </a:fld>
-            <a:endParaRPr lang="en-US"/>
-          </a:p>
-        </p:txBody>
-      </p:sp>
-      <p:sp>
-        <p:nvSpPr>
-          <p:cNvPr id="4" name="Slide Image Placeholder 3"/>
-          <p:cNvSpPr>
-            <a:spLocks noGrp="1" noRot="1" noChangeAspect="1"/>
-          </p:cNvSpPr>
-          <p:nvPr>
-            <p:ph type="sldImg" idx="2"/>
-          </p:nvPr>
-        </p:nvSpPr>
-        <p:spPr>
-          <a:xfrm>
-            <a:off x="685800" y="1143000"/>
-            <a:ext cx="5486400" cy="3086100"/>
-          </a:xfrm>
-          <a:prstGeom prst="rect">
-            <a:avLst/>
-          </a:prstGeom>
-          <a:noFill/>
-          <a:ln w="12700">
-            <a:solidFill>
-              <a:prstClr val="black"/>
-            </a:solidFill>
-          </a:ln>
-        </p:spPr>
-        <p:txBody>
-          <a:bodyPr vert="horz" lIns="91440" tIns="45720" rIns="91440" bIns="45720" rtlCol="0" anchor="ctr"/>
-          <a:lstStyle/>
-          <a:p>
-            <a:endParaRPr lang="en-US"/>
-          </a:p>
-        </p:txBody>
-      </p:sp>
-      <p:sp>
-        <p:nvSpPr>
-          <p:cNvPr id="5" name="Notes Placeholder 4"/>
-          <p:cNvSpPr>
-            <a:spLocks noGrp="1"/>
-          </p:cNvSpPr>
-          <p:nvPr>
-            <p:ph type="body" sz="quarter" idx="3"/>
-          </p:nvPr>
-        </p:nvSpPr>
-        <p:spPr>
-          <a:xfrm>
-            <a:off x="685800" y="4400550"/>
-            <a:ext cx="5486400" cy="3600450"/>
-          </a:xfrm>
-          <a:prstGeom prst="rect">
-            <a:avLst/>
-          </a:prstGeom>
-        </p:spPr>
-        <p:txBody>
-          <a:bodyPr vert="horz" lIns="91440" tIns="45720" rIns="91440" bIns="45720" rtlCol="0"/>
-          <a:lstStyle/>
-          <a:p>
-            <a:pPr lvl="0"/>
-            <a:r>
-              <a:rPr lang="en-US"/>
-              <a:t>Click to edit Master text styles</a:t>
-            </a:r>
-          </a:p>
-          <a:p>
-            <a:pPr lvl="1"/>
-            <a:r>
-              <a:rPr lang="en-US"/>
-              <a:t>Second level</a:t>
-            </a:r>
-          </a:p>
-          <a:p>
-            <a:pPr lvl="2"/>
-            <a:r>
-              <a:rPr lang="en-US"/>
-              <a:t>Third level</a:t>
-            </a:r>
-          </a:p>
-          <a:p>
-            <a:pPr lvl="3"/>
-            <a:r>
-              <a:rPr lang="en-US"/>
-              <a:t>Fourth level</a:t>
-            </a:r>
-          </a:p>
-          <a:p>
-            <a:pPr lvl="4"/>
-            <a:r>
-              <a:rPr lang="en-US"/>
-              <a:t>Fifth level</a:t>
-            </a:r>
-          </a:p>
-        </p:txBody>
-      </p:sp>
-      <p:sp>
-        <p:nvSpPr>
-          <p:cNvPr id="6" name="Footer Placeholder 5"/>
-          <p:cNvSpPr>
-            <a:spLocks noGrp="1"/>
-          </p:cNvSpPr>
-          <p:nvPr>
-            <p:ph type="ftr" sz="quarter" idx="4"/>
-          </p:nvPr>
-        </p:nvSpPr>
-        <p:spPr>
-          <a:xfrm>
-            <a:off x="0" y="8685213"/>
-            <a:ext cx="2971800" cy="458787"/>
-          </a:xfrm>
-          <a:prstGeom prst="rect">
-            <a:avLst/>
-          </a:prstGeom>
-        </p:spPr>
-        <p:txBody>
-          <a:bodyPr vert="horz" lIns="91440" tIns="45720" rIns="91440" bIns="45720" rtlCol="0" anchor="b"/>
-          <a:lstStyle>
-            <a:lvl1pPr algn="l">
-              <a:defRPr sz="1200"/>
-            </a:lvl1pPr>
-          </a:lstStyle>
-          <a:p>
-            <a:endParaRPr lang="en-US"/>
-          </a:p>
-        </p:txBody>
-      </p:sp>
-      <p:sp>
-        <p:nvSpPr>
-          <p:cNvPr id="7" name="Slide Number Placeholder 6"/>
-          <p:cNvSpPr>
-            <a:spLocks noGrp="1"/>
-          </p:cNvSpPr>
-          <p:nvPr>
-            <p:ph type="sldNum" sz="quarter" idx="5"/>
-          </p:nvPr>
-        </p:nvSpPr>
-        <p:spPr>
-          <a:xfrm>
-            <a:off x="3884613" y="8685213"/>
-            <a:ext cx="2971800" cy="458787"/>
-          </a:xfrm>
-          <a:prstGeom prst="rect">
-            <a:avLst/>
-          </a:prstGeom>
-        </p:spPr>
-        <p:txBody>
-          <a:bodyPr vert="horz" lIns="91440" tIns="45720" rIns="91440" bIns="45720" rtlCol="0" anchor="b"/>
-          <a:lstStyle>
-            <a:lvl1pPr algn="r">
-              <a:defRPr sz="1200"/>
-            </a:lvl1pPr>
-          </a:lstStyle>
-          <a:p>
-            <a:fld id="{CE5E9CC1-C706-0F49-92D6-E571CC5EEA8F}" type="slidenum">
-              <a:rPr lang="en-US"/>
-              <a:t>‹#›</a:t>
-            </a:fld>
-            <a:endParaRPr lang="en-US"/>
-          </a:p>
-        </p:txBody>
-      </p:sp>
     </p:spTree>
     <p:extLst>
       <p:ext uri="{BB962C8B-B14F-4D97-AF65-F5344CB8AC3E}">
-        <p14:creationId xmlns:p14="http://schemas.microsoft.com/office/powerpoint/2010/main" val="1024086991"/>
+        <p14:creationId xmlns:p14="http://schemas.microsoft.com/office/powerpoint/2010/main" val="2180636261"/>
       </p:ext>
     </p:extLst>
   </p:cSld>
@@ -506,10 +287,6 @@
           <a:bodyPr/>
           <a:lstStyle/>
           <a:p>
-            <a:r>
-              <a:rPr lang="en-US" dirty="0"/>
-              <a:t/>
-            </a:r>
             <a:endParaRPr lang="en-US" dirty="0"/>
           </a:p>
         </p:txBody>
@@ -594,10 +371,6 @@
           <a:bodyPr/>
           <a:lstStyle/>
           <a:p>
-            <a:r>
-              <a:rPr lang="en-US" dirty="0"/>
-              <a:t/>
-            </a:r>
             <a:endParaRPr lang="en-US" dirty="0"/>
           </a:p>
         </p:txBody>
@@ -682,10 +455,6 @@
           <a:bodyPr/>
           <a:lstStyle/>
           <a:p>
-            <a:r>
-              <a:rPr lang="en-US" dirty="0"/>
-              <a:t/>
-            </a:r>
             <a:endParaRPr lang="en-US" dirty="0"/>
           </a:p>
         </p:txBody>
@@ -770,10 +539,6 @@
           <a:bodyPr/>
           <a:lstStyle/>
           <a:p>
-            <a:r>
-              <a:rPr lang="en-US" dirty="0"/>
-              <a:t/>
-            </a:r>
             <a:endParaRPr lang="en-US" dirty="0"/>
           </a:p>
         </p:txBody>
@@ -858,10 +623,6 @@
           <a:bodyPr/>
           <a:lstStyle/>
           <a:p>
-            <a:r>
-              <a:rPr lang="en-US" dirty="0"/>
-              <a:t/>
-            </a:r>
             <a:endParaRPr lang="en-US" dirty="0"/>
           </a:p>
         </p:txBody>
@@ -946,10 +707,6 @@
           <a:bodyPr/>
           <a:lstStyle/>
           <a:p>
-            <a:r>
-              <a:rPr lang="en-US" dirty="0"/>
-              <a:t/>
-            </a:r>
             <a:endParaRPr lang="en-US" dirty="0"/>
           </a:p>
         </p:txBody>
@@ -1034,10 +791,6 @@
           <a:bodyPr/>
           <a:lstStyle/>
           <a:p>
-            <a:r>
-              <a:rPr lang="en-US" dirty="0"/>
-              <a:t/>
-            </a:r>
             <a:endParaRPr lang="en-US" dirty="0"/>
           </a:p>
         </p:txBody>
@@ -1111,6 +864,11 @@
 <file path=ppt/slideMasters/slideMaster1.xml><?xml version="1.0" encoding="utf-8"?>
 <p:sldMaster xmlns:a="http://schemas.openxmlformats.org/drawingml/2006/main" xmlns:r="http://schemas.openxmlformats.org/officeDocument/2006/relationships" xmlns:p="http://schemas.openxmlformats.org/presentationml/2006/main">
   <p:cSld>
+    <p:bg>
+      <p:bgRef idx="1001">
+        <a:schemeClr val="bg1"/>
+      </p:bgRef>
+    </p:bg>
     <p:spTree>
       <p:nvGrpSpPr>
         <p:cNvPr id="1" name=""/>
@@ -1393,6 +1151,7 @@
         <a:solidFill>
           <a:srgbClr val="2F567E"/>
         </a:solidFill>
+        <a:effectLst/>
       </p:bgPr>
     </p:bg>
     <p:spTree>
@@ -1428,17 +1187,24 @@
           </a:solidFill>
           <a:ln/>
         </p:spPr>
+        <p:txBody>
+          <a:bodyPr/>
+          <a:lstStyle/>
+          <a:p>
+            <a:endParaRPr lang="en-US"/>
+          </a:p>
+        </p:txBody>
       </p:sp>
       <p:pic>
         <p:nvPicPr>
-          <p:cNvPr id="3" name="Image 0" descr="preencoded.png">    </p:cNvPr>
+          <p:cNvPr id="3" name="Image 0" descr="preencoded.png"/>
           <p:cNvPicPr>
             <a:picLocks noChangeAspect="1"/>
           </p:cNvPicPr>
           <p:nvPr/>
         </p:nvPicPr>
         <p:blipFill>
-          <a:blip r:embed="rId1">
+          <a:blip r:embed="rId3">
             <a:alphaModFix amt="20000"/>
           </a:blip>
           <a:stretch>
@@ -1476,11 +1242,11 @@
           <a:bodyPr wrap="square" lIns="0" tIns="0" rIns="0" bIns="0" rtlCol="0" anchor="ctr"/>
           <a:lstStyle/>
           <a:p>
-            <a:pPr indent="0" marL="0">
-              <a:buNone/>
-            </a:pPr>
-            <a:r>
-              <a:rPr lang="en-US" sz="1250" b="1" spc="500" kern="0" dirty="0">
+            <a:pPr marL="0" indent="0">
+              <a:buNone/>
+            </a:pPr>
+            <a:r>
+              <a:rPr lang="en-US" sz="1250" b="1" kern="0" spc="500" dirty="0">
                 <a:solidFill>
                   <a:srgbClr val="E3A033"/>
                 </a:solidFill>
@@ -1515,7 +1281,7 @@
           <a:bodyPr wrap="square" lIns="0" tIns="0" rIns="0" bIns="0" rtlCol="0" anchor="ctr"/>
           <a:lstStyle/>
           <a:p>
-            <a:pPr indent="0" marL="0">
+            <a:pPr marL="0" indent="0">
               <a:buNone/>
             </a:pPr>
             <a:r>
@@ -1554,7 +1320,7 @@
           <a:bodyPr wrap="square" lIns="0" tIns="0" rIns="0" bIns="0" rtlCol="0" anchor="t"/>
           <a:lstStyle/>
           <a:p>
-            <a:pPr indent="0" marL="0">
+            <a:pPr marL="0" indent="0">
               <a:lnSpc>
                 <a:spcPct val="115000"/>
               </a:lnSpc>
@@ -1594,332 +1360,17 @@
           </a:solidFill>
           <a:ln/>
         </p:spPr>
+        <p:txBody>
+          <a:bodyPr/>
+          <a:lstStyle/>
+          <a:p>
+            <a:endParaRPr lang="en-US"/>
+          </a:p>
+        </p:txBody>
       </p:sp>
       <p:pic>
         <p:nvPicPr>
-          <p:cNvPr id="8" name="Image 1" descr="preencoded.png">    </p:cNvPr>
-          <p:cNvPicPr>
-            <a:picLocks noChangeAspect="1"/>
-          </p:cNvPicPr>
-          <p:nvPr/>
-        </p:nvPicPr>
-        <p:blipFill>
-          <a:blip r:embed="rId2"/>
-          <a:stretch>
-            <a:fillRect/>
-          </a:stretch>
-        </p:blipFill>
-        <p:spPr>
-          <a:xfrm>
-            <a:off x="1042416" y="5111496"/>
-            <a:ext cx="310896" cy="310896"/>
-          </a:xfrm>
-          <a:prstGeom prst="rect">
-            <a:avLst/>
-          </a:prstGeom>
-        </p:spPr>
-      </p:pic>
-      <p:sp>
-        <p:nvSpPr>
-          <p:cNvPr id="9" name="Text 5"/>
-          <p:cNvSpPr/>
-          <p:nvPr/>
-        </p:nvSpPr>
-        <p:spPr>
-          <a:xfrm>
-            <a:off x="1591056" y="4937760"/>
-            <a:ext cx="1828800" cy="274320"/>
-          </a:xfrm>
-          <a:prstGeom prst="rect">
-            <a:avLst/>
-          </a:prstGeom>
-          <a:noFill/>
-          <a:ln/>
-        </p:spPr>
-        <p:txBody>
-          <a:bodyPr wrap="square" lIns="0" tIns="0" rIns="0" bIns="0" rtlCol="0" anchor="ctr"/>
-          <a:lstStyle/>
-          <a:p>
-            <a:pPr indent="0" marL="0">
-              <a:buNone/>
-            </a:pPr>
-            <a:r>
-              <a:rPr lang="en-US" sz="1400" b="1" dirty="0">
-                <a:solidFill>
-                  <a:srgbClr val="FFFFFF"/>
-                </a:solidFill>
-                <a:latin typeface="IBM Plex Mono" pitchFamily="34" charset="0"/>
-                <a:ea typeface="IBM Plex Mono" pitchFamily="34" charset="-122"/>
-                <a:cs typeface="IBM Plex Mono" pitchFamily="34" charset="-120"/>
-              </a:rPr>
-              <a:t>Build</a:t>
-            </a:r>
-            <a:endParaRPr lang="en-US" sz="1400" dirty="0"/>
-          </a:p>
-        </p:txBody>
-      </p:sp>
-      <p:sp>
-        <p:nvSpPr>
-          <p:cNvPr id="10" name="Text 6"/>
-          <p:cNvSpPr/>
-          <p:nvPr/>
-        </p:nvSpPr>
-        <p:spPr>
-          <a:xfrm>
-            <a:off x="1591056" y="5230368"/>
-            <a:ext cx="1828800" cy="256032"/>
-          </a:xfrm>
-          <a:prstGeom prst="rect">
-            <a:avLst/>
-          </a:prstGeom>
-          <a:noFill/>
-          <a:ln/>
-        </p:spPr>
-        <p:txBody>
-          <a:bodyPr wrap="square" lIns="0" tIns="0" rIns="0" bIns="0" rtlCol="0" anchor="ctr"/>
-          <a:lstStyle/>
-          <a:p>
-            <a:pPr indent="0" marL="0">
-              <a:buNone/>
-            </a:pPr>
-            <a:r>
-              <a:rPr lang="en-US" sz="1200" dirty="0">
-                <a:solidFill>
-                  <a:srgbClr val="9FB3CC"/>
-                </a:solidFill>
-                <a:latin typeface="Hanken Grotesk" pitchFamily="34" charset="0"/>
-                <a:ea typeface="Hanken Grotesk" pitchFamily="34" charset="-122"/>
-                <a:cs typeface="Hanken Grotesk" pitchFamily="34" charset="-120"/>
-              </a:rPr>
-              <a:t>monthly</a:t>
-            </a:r>
-            <a:endParaRPr lang="en-US" sz="1200" dirty="0"/>
-          </a:p>
-        </p:txBody>
-      </p:sp>
-      <p:sp>
-        <p:nvSpPr>
-          <p:cNvPr id="11" name="Text 7"/>
-          <p:cNvSpPr/>
-          <p:nvPr/>
-        </p:nvSpPr>
-        <p:spPr>
-          <a:xfrm>
-            <a:off x="2743200" y="4937760"/>
-            <a:ext cx="365760" cy="548640"/>
-          </a:xfrm>
-          <a:prstGeom prst="rect">
-            <a:avLst/>
-          </a:prstGeom>
-          <a:noFill/>
-          <a:ln/>
-        </p:spPr>
-        <p:txBody>
-          <a:bodyPr wrap="square" lIns="0" tIns="0" rIns="0" bIns="0" rtlCol="0" anchor="ctr"/>
-          <a:lstStyle/>
-          <a:p>
-            <a:pPr algn="ctr" indent="0" marL="0">
-              <a:buNone/>
-            </a:pPr>
-            <a:r>
-              <a:rPr lang="en-US" sz="1800" dirty="0">
-                <a:solidFill>
-                  <a:srgbClr val="6F89A8"/>
-                </a:solidFill>
-                <a:latin typeface="IBM Plex Mono" pitchFamily="34" charset="0"/>
-                <a:ea typeface="IBM Plex Mono" pitchFamily="34" charset="-122"/>
-                <a:cs typeface="IBM Plex Mono" pitchFamily="34" charset="-120"/>
-              </a:rPr>
-              <a:t>→</a:t>
-            </a:r>
-            <a:endParaRPr lang="en-US" sz="1800" dirty="0"/>
-          </a:p>
-        </p:txBody>
-      </p:sp>
-      <p:sp>
-        <p:nvSpPr>
-          <p:cNvPr id="12" name="Shape 8"/>
-          <p:cNvSpPr/>
-          <p:nvPr/>
-        </p:nvSpPr>
-        <p:spPr>
-          <a:xfrm>
-            <a:off x="3246120" y="4983480"/>
-            <a:ext cx="566928" cy="566928"/>
-          </a:xfrm>
-          <a:prstGeom prst="ellipse">
-            <a:avLst/>
-          </a:prstGeom>
-          <a:solidFill>
-            <a:srgbClr val="E3A033"/>
-          </a:solidFill>
-          <a:ln/>
-        </p:spPr>
-      </p:sp>
-      <p:pic>
-        <p:nvPicPr>
-          <p:cNvPr id="13" name="Image 2" descr="preencoded.png">    </p:cNvPr>
-          <p:cNvPicPr>
-            <a:picLocks noChangeAspect="1"/>
-          </p:cNvPicPr>
-          <p:nvPr/>
-        </p:nvPicPr>
-        <p:blipFill>
-          <a:blip r:embed="rId3"/>
-          <a:stretch>
-            <a:fillRect/>
-          </a:stretch>
-        </p:blipFill>
-        <p:spPr>
-          <a:xfrm>
-            <a:off x="3374136" y="5111496"/>
-            <a:ext cx="310896" cy="310896"/>
-          </a:xfrm>
-          <a:prstGeom prst="rect">
-            <a:avLst/>
-          </a:prstGeom>
-        </p:spPr>
-      </p:pic>
-      <p:sp>
-        <p:nvSpPr>
-          <p:cNvPr id="14" name="Text 9"/>
-          <p:cNvSpPr/>
-          <p:nvPr/>
-        </p:nvSpPr>
-        <p:spPr>
-          <a:xfrm>
-            <a:off x="3922776" y="4937760"/>
-            <a:ext cx="1828800" cy="274320"/>
-          </a:xfrm>
-          <a:prstGeom prst="rect">
-            <a:avLst/>
-          </a:prstGeom>
-          <a:noFill/>
-          <a:ln/>
-        </p:spPr>
-        <p:txBody>
-          <a:bodyPr wrap="square" lIns="0" tIns="0" rIns="0" bIns="0" rtlCol="0" anchor="ctr"/>
-          <a:lstStyle/>
-          <a:p>
-            <a:pPr indent="0" marL="0">
-              <a:buNone/>
-            </a:pPr>
-            <a:r>
-              <a:rPr lang="en-US" sz="1400" b="1" dirty="0">
-                <a:solidFill>
-                  <a:srgbClr val="FFFFFF"/>
-                </a:solidFill>
-                <a:latin typeface="IBM Plex Mono" pitchFamily="34" charset="0"/>
-                <a:ea typeface="IBM Plex Mono" pitchFamily="34" charset="-122"/>
-                <a:cs typeface="IBM Plex Mono" pitchFamily="34" charset="-120"/>
-              </a:rPr>
-              <a:t>Burn</a:t>
-            </a:r>
-            <a:endParaRPr lang="en-US" sz="1400" dirty="0"/>
-          </a:p>
-        </p:txBody>
-      </p:sp>
-      <p:sp>
-        <p:nvSpPr>
-          <p:cNvPr id="15" name="Text 10"/>
-          <p:cNvSpPr/>
-          <p:nvPr/>
-        </p:nvSpPr>
-        <p:spPr>
-          <a:xfrm>
-            <a:off x="3922776" y="5230368"/>
-            <a:ext cx="1828800" cy="256032"/>
-          </a:xfrm>
-          <a:prstGeom prst="rect">
-            <a:avLst/>
-          </a:prstGeom>
-          <a:noFill/>
-          <a:ln/>
-        </p:spPr>
-        <p:txBody>
-          <a:bodyPr wrap="square" lIns="0" tIns="0" rIns="0" bIns="0" rtlCol="0" anchor="ctr"/>
-          <a:lstStyle/>
-          <a:p>
-            <a:pPr indent="0" marL="0">
-              <a:buNone/>
-            </a:pPr>
-            <a:r>
-              <a:rPr lang="en-US" sz="1200" dirty="0">
-                <a:solidFill>
-                  <a:srgbClr val="9FB3CC"/>
-                </a:solidFill>
-                <a:latin typeface="Hanken Grotesk" pitchFamily="34" charset="0"/>
-                <a:ea typeface="Hanken Grotesk" pitchFamily="34" charset="-122"/>
-                <a:cs typeface="Hanken Grotesk" pitchFamily="34" charset="-120"/>
-              </a:rPr>
-              <a:t>daily</a:t>
-            </a:r>
-            <a:endParaRPr lang="en-US" sz="1200" dirty="0"/>
-          </a:p>
-        </p:txBody>
-      </p:sp>
-      <p:sp>
-        <p:nvSpPr>
-          <p:cNvPr id="16" name="Text 11"/>
-          <p:cNvSpPr/>
-          <p:nvPr/>
-        </p:nvSpPr>
-        <p:spPr>
-          <a:xfrm>
-            <a:off x="5074920" y="4937760"/>
-            <a:ext cx="365760" cy="548640"/>
-          </a:xfrm>
-          <a:prstGeom prst="rect">
-            <a:avLst/>
-          </a:prstGeom>
-          <a:noFill/>
-          <a:ln/>
-        </p:spPr>
-        <p:txBody>
-          <a:bodyPr wrap="square" lIns="0" tIns="0" rIns="0" bIns="0" rtlCol="0" anchor="ctr"/>
-          <a:lstStyle/>
-          <a:p>
-            <a:pPr algn="ctr" indent="0" marL="0">
-              <a:buNone/>
-            </a:pPr>
-            <a:r>
-              <a:rPr lang="en-US" sz="1800" dirty="0">
-                <a:solidFill>
-                  <a:srgbClr val="6F89A8"/>
-                </a:solidFill>
-                <a:latin typeface="IBM Plex Mono" pitchFamily="34" charset="0"/>
-                <a:ea typeface="IBM Plex Mono" pitchFamily="34" charset="-122"/>
-                <a:cs typeface="IBM Plex Mono" pitchFamily="34" charset="-120"/>
-              </a:rPr>
-              <a:t>→</a:t>
-            </a:r>
-            <a:endParaRPr lang="en-US" sz="1800" dirty="0"/>
-          </a:p>
-        </p:txBody>
-      </p:sp>
-      <p:sp>
-        <p:nvSpPr>
-          <p:cNvPr id="17" name="Shape 12"/>
-          <p:cNvSpPr/>
-          <p:nvPr/>
-        </p:nvSpPr>
-        <p:spPr>
-          <a:xfrm>
-            <a:off x="5577840" y="4983480"/>
-            <a:ext cx="566928" cy="566928"/>
-          </a:xfrm>
-          <a:prstGeom prst="ellipse">
-            <a:avLst/>
-          </a:prstGeom>
-          <a:solidFill>
-            <a:srgbClr val="E3A033"/>
-          </a:solidFill>
-          <a:ln/>
-        </p:spPr>
-      </p:sp>
-      <p:pic>
-        <p:nvPicPr>
-          <p:cNvPr id="18" name="Image 3" descr="preencoded.png">    </p:cNvPr>
+          <p:cNvPr id="8" name="Image 1" descr="preencoded.png"/>
           <p:cNvPicPr>
             <a:picLocks noChangeAspect="1"/>
           </p:cNvPicPr>
@@ -1933,7 +1384,7 @@
         </p:blipFill>
         <p:spPr>
           <a:xfrm>
-            <a:off x="5705856" y="5111496"/>
+            <a:off x="1042416" y="5111496"/>
             <a:ext cx="310896" cy="310896"/>
           </a:xfrm>
           <a:prstGeom prst="rect">
@@ -1943,13 +1394,13 @@
       </p:pic>
       <p:sp>
         <p:nvSpPr>
-          <p:cNvPr id="19" name="Text 13"/>
-          <p:cNvSpPr/>
-          <p:nvPr/>
-        </p:nvSpPr>
-        <p:spPr>
-          <a:xfrm>
-            <a:off x="6254496" y="4937760"/>
+          <p:cNvPr id="9" name="Text 5"/>
+          <p:cNvSpPr/>
+          <p:nvPr/>
+        </p:nvSpPr>
+        <p:spPr>
+          <a:xfrm>
+            <a:off x="1591056" y="4937760"/>
             <a:ext cx="1828800" cy="274320"/>
           </a:xfrm>
           <a:prstGeom prst="rect">
@@ -1962,7 +1413,7 @@
           <a:bodyPr wrap="square" lIns="0" tIns="0" rIns="0" bIns="0" rtlCol="0" anchor="ctr"/>
           <a:lstStyle/>
           <a:p>
-            <a:pPr indent="0" marL="0">
+            <a:pPr marL="0" indent="0">
               <a:buNone/>
             </a:pPr>
             <a:r>
@@ -1974,6 +1425,342 @@
                 <a:ea typeface="IBM Plex Mono" pitchFamily="34" charset="-122"/>
                 <a:cs typeface="IBM Plex Mono" pitchFamily="34" charset="-120"/>
               </a:rPr>
+              <a:t>Build</a:t>
+            </a:r>
+            <a:endParaRPr lang="en-US" sz="1400" dirty="0"/>
+          </a:p>
+        </p:txBody>
+      </p:sp>
+      <p:sp>
+        <p:nvSpPr>
+          <p:cNvPr id="10" name="Text 6"/>
+          <p:cNvSpPr/>
+          <p:nvPr/>
+        </p:nvSpPr>
+        <p:spPr>
+          <a:xfrm>
+            <a:off x="1591056" y="5230368"/>
+            <a:ext cx="1828800" cy="256032"/>
+          </a:xfrm>
+          <a:prstGeom prst="rect">
+            <a:avLst/>
+          </a:prstGeom>
+          <a:noFill/>
+          <a:ln/>
+        </p:spPr>
+        <p:txBody>
+          <a:bodyPr wrap="square" lIns="0" tIns="0" rIns="0" bIns="0" rtlCol="0" anchor="ctr"/>
+          <a:lstStyle/>
+          <a:p>
+            <a:pPr marL="0" indent="0">
+              <a:buNone/>
+            </a:pPr>
+            <a:r>
+              <a:rPr lang="en-US" sz="1200" dirty="0">
+                <a:solidFill>
+                  <a:srgbClr val="9FB3CC"/>
+                </a:solidFill>
+                <a:latin typeface="Hanken Grotesk" pitchFamily="34" charset="0"/>
+                <a:ea typeface="Hanken Grotesk" pitchFamily="34" charset="-122"/>
+                <a:cs typeface="Hanken Grotesk" pitchFamily="34" charset="-120"/>
+              </a:rPr>
+              <a:t>monthly</a:t>
+            </a:r>
+            <a:endParaRPr lang="en-US" sz="1200" dirty="0"/>
+          </a:p>
+        </p:txBody>
+      </p:sp>
+      <p:sp>
+        <p:nvSpPr>
+          <p:cNvPr id="11" name="Text 7"/>
+          <p:cNvSpPr/>
+          <p:nvPr/>
+        </p:nvSpPr>
+        <p:spPr>
+          <a:xfrm>
+            <a:off x="2743200" y="4937760"/>
+            <a:ext cx="365760" cy="548640"/>
+          </a:xfrm>
+          <a:prstGeom prst="rect">
+            <a:avLst/>
+          </a:prstGeom>
+          <a:noFill/>
+          <a:ln/>
+        </p:spPr>
+        <p:txBody>
+          <a:bodyPr wrap="square" lIns="0" tIns="0" rIns="0" bIns="0" rtlCol="0" anchor="ctr"/>
+          <a:lstStyle/>
+          <a:p>
+            <a:pPr marL="0" indent="0" algn="ctr">
+              <a:buNone/>
+            </a:pPr>
+            <a:r>
+              <a:rPr lang="en-US" sz="1800" dirty="0">
+                <a:solidFill>
+                  <a:srgbClr val="6F89A8"/>
+                </a:solidFill>
+                <a:latin typeface="IBM Plex Mono" pitchFamily="34" charset="0"/>
+                <a:ea typeface="IBM Plex Mono" pitchFamily="34" charset="-122"/>
+                <a:cs typeface="IBM Plex Mono" pitchFamily="34" charset="-120"/>
+              </a:rPr>
+              <a:t>→</a:t>
+            </a:r>
+            <a:endParaRPr lang="en-US" sz="1800" dirty="0"/>
+          </a:p>
+        </p:txBody>
+      </p:sp>
+      <p:sp>
+        <p:nvSpPr>
+          <p:cNvPr id="12" name="Shape 8"/>
+          <p:cNvSpPr/>
+          <p:nvPr/>
+        </p:nvSpPr>
+        <p:spPr>
+          <a:xfrm>
+            <a:off x="3246120" y="4983480"/>
+            <a:ext cx="566928" cy="566928"/>
+          </a:xfrm>
+          <a:prstGeom prst="ellipse">
+            <a:avLst/>
+          </a:prstGeom>
+          <a:solidFill>
+            <a:srgbClr val="E3A033"/>
+          </a:solidFill>
+          <a:ln/>
+        </p:spPr>
+        <p:txBody>
+          <a:bodyPr/>
+          <a:lstStyle/>
+          <a:p>
+            <a:endParaRPr lang="en-US"/>
+          </a:p>
+        </p:txBody>
+      </p:sp>
+      <p:pic>
+        <p:nvPicPr>
+          <p:cNvPr id="13" name="Image 2" descr="preencoded.png"/>
+          <p:cNvPicPr>
+            <a:picLocks noChangeAspect="1"/>
+          </p:cNvPicPr>
+          <p:nvPr/>
+        </p:nvPicPr>
+        <p:blipFill>
+          <a:blip r:embed="rId5"/>
+          <a:stretch>
+            <a:fillRect/>
+          </a:stretch>
+        </p:blipFill>
+        <p:spPr>
+          <a:xfrm>
+            <a:off x="3374136" y="5111496"/>
+            <a:ext cx="310896" cy="310896"/>
+          </a:xfrm>
+          <a:prstGeom prst="rect">
+            <a:avLst/>
+          </a:prstGeom>
+        </p:spPr>
+      </p:pic>
+      <p:sp>
+        <p:nvSpPr>
+          <p:cNvPr id="14" name="Text 9"/>
+          <p:cNvSpPr/>
+          <p:nvPr/>
+        </p:nvSpPr>
+        <p:spPr>
+          <a:xfrm>
+            <a:off x="3922776" y="4937760"/>
+            <a:ext cx="1828800" cy="274320"/>
+          </a:xfrm>
+          <a:prstGeom prst="rect">
+            <a:avLst/>
+          </a:prstGeom>
+          <a:noFill/>
+          <a:ln/>
+        </p:spPr>
+        <p:txBody>
+          <a:bodyPr wrap="square" lIns="0" tIns="0" rIns="0" bIns="0" rtlCol="0" anchor="ctr"/>
+          <a:lstStyle/>
+          <a:p>
+            <a:pPr marL="0" indent="0">
+              <a:buNone/>
+            </a:pPr>
+            <a:r>
+              <a:rPr lang="en-US" sz="1400" b="1" dirty="0">
+                <a:solidFill>
+                  <a:srgbClr val="FFFFFF"/>
+                </a:solidFill>
+                <a:latin typeface="IBM Plex Mono" pitchFamily="34" charset="0"/>
+                <a:ea typeface="IBM Plex Mono" pitchFamily="34" charset="-122"/>
+                <a:cs typeface="IBM Plex Mono" pitchFamily="34" charset="-120"/>
+              </a:rPr>
+              <a:t>Burn</a:t>
+            </a:r>
+            <a:endParaRPr lang="en-US" sz="1400" dirty="0"/>
+          </a:p>
+        </p:txBody>
+      </p:sp>
+      <p:sp>
+        <p:nvSpPr>
+          <p:cNvPr id="15" name="Text 10"/>
+          <p:cNvSpPr/>
+          <p:nvPr/>
+        </p:nvSpPr>
+        <p:spPr>
+          <a:xfrm>
+            <a:off x="3922776" y="5230368"/>
+            <a:ext cx="1828800" cy="256032"/>
+          </a:xfrm>
+          <a:prstGeom prst="rect">
+            <a:avLst/>
+          </a:prstGeom>
+          <a:noFill/>
+          <a:ln/>
+        </p:spPr>
+        <p:txBody>
+          <a:bodyPr wrap="square" lIns="0" tIns="0" rIns="0" bIns="0" rtlCol="0" anchor="ctr"/>
+          <a:lstStyle/>
+          <a:p>
+            <a:pPr marL="0" indent="0">
+              <a:buNone/>
+            </a:pPr>
+            <a:r>
+              <a:rPr lang="en-US" sz="1200" dirty="0">
+                <a:solidFill>
+                  <a:srgbClr val="9FB3CC"/>
+                </a:solidFill>
+                <a:latin typeface="Hanken Grotesk" pitchFamily="34" charset="0"/>
+                <a:ea typeface="Hanken Grotesk" pitchFamily="34" charset="-122"/>
+                <a:cs typeface="Hanken Grotesk" pitchFamily="34" charset="-120"/>
+              </a:rPr>
+              <a:t>daily</a:t>
+            </a:r>
+            <a:endParaRPr lang="en-US" sz="1200" dirty="0"/>
+          </a:p>
+        </p:txBody>
+      </p:sp>
+      <p:sp>
+        <p:nvSpPr>
+          <p:cNvPr id="16" name="Text 11"/>
+          <p:cNvSpPr/>
+          <p:nvPr/>
+        </p:nvSpPr>
+        <p:spPr>
+          <a:xfrm>
+            <a:off x="5074920" y="4937760"/>
+            <a:ext cx="365760" cy="548640"/>
+          </a:xfrm>
+          <a:prstGeom prst="rect">
+            <a:avLst/>
+          </a:prstGeom>
+          <a:noFill/>
+          <a:ln/>
+        </p:spPr>
+        <p:txBody>
+          <a:bodyPr wrap="square" lIns="0" tIns="0" rIns="0" bIns="0" rtlCol="0" anchor="ctr"/>
+          <a:lstStyle/>
+          <a:p>
+            <a:pPr marL="0" indent="0" algn="ctr">
+              <a:buNone/>
+            </a:pPr>
+            <a:r>
+              <a:rPr lang="en-US" sz="1800" dirty="0">
+                <a:solidFill>
+                  <a:srgbClr val="6F89A8"/>
+                </a:solidFill>
+                <a:latin typeface="IBM Plex Mono" pitchFamily="34" charset="0"/>
+                <a:ea typeface="IBM Plex Mono" pitchFamily="34" charset="-122"/>
+                <a:cs typeface="IBM Plex Mono" pitchFamily="34" charset="-120"/>
+              </a:rPr>
+              <a:t>→</a:t>
+            </a:r>
+            <a:endParaRPr lang="en-US" sz="1800" dirty="0"/>
+          </a:p>
+        </p:txBody>
+      </p:sp>
+      <p:sp>
+        <p:nvSpPr>
+          <p:cNvPr id="17" name="Shape 12"/>
+          <p:cNvSpPr/>
+          <p:nvPr/>
+        </p:nvSpPr>
+        <p:spPr>
+          <a:xfrm>
+            <a:off x="5577840" y="4983480"/>
+            <a:ext cx="566928" cy="566928"/>
+          </a:xfrm>
+          <a:prstGeom prst="ellipse">
+            <a:avLst/>
+          </a:prstGeom>
+          <a:solidFill>
+            <a:srgbClr val="E3A033"/>
+          </a:solidFill>
+          <a:ln/>
+        </p:spPr>
+        <p:txBody>
+          <a:bodyPr/>
+          <a:lstStyle/>
+          <a:p>
+            <a:endParaRPr lang="en-US"/>
+          </a:p>
+        </p:txBody>
+      </p:sp>
+      <p:pic>
+        <p:nvPicPr>
+          <p:cNvPr id="18" name="Image 3" descr="preencoded.png"/>
+          <p:cNvPicPr>
+            <a:picLocks noChangeAspect="1"/>
+          </p:cNvPicPr>
+          <p:nvPr/>
+        </p:nvPicPr>
+        <p:blipFill>
+          <a:blip r:embed="rId6"/>
+          <a:stretch>
+            <a:fillRect/>
+          </a:stretch>
+        </p:blipFill>
+        <p:spPr>
+          <a:xfrm>
+            <a:off x="5705856" y="5111496"/>
+            <a:ext cx="310896" cy="310896"/>
+          </a:xfrm>
+          <a:prstGeom prst="rect">
+            <a:avLst/>
+          </a:prstGeom>
+        </p:spPr>
+      </p:pic>
+      <p:sp>
+        <p:nvSpPr>
+          <p:cNvPr id="19" name="Text 13"/>
+          <p:cNvSpPr/>
+          <p:nvPr/>
+        </p:nvSpPr>
+        <p:spPr>
+          <a:xfrm>
+            <a:off x="6254496" y="4937760"/>
+            <a:ext cx="1828800" cy="274320"/>
+          </a:xfrm>
+          <a:prstGeom prst="rect">
+            <a:avLst/>
+          </a:prstGeom>
+          <a:noFill/>
+          <a:ln/>
+        </p:spPr>
+        <p:txBody>
+          <a:bodyPr wrap="square" lIns="0" tIns="0" rIns="0" bIns="0" rtlCol="0" anchor="ctr"/>
+          <a:lstStyle/>
+          <a:p>
+            <a:pPr marL="0" indent="0">
+              <a:buNone/>
+            </a:pPr>
+            <a:r>
+              <a:rPr lang="en-US" sz="1400" b="1" dirty="0">
+                <a:solidFill>
+                  <a:srgbClr val="FFFFFF"/>
+                </a:solidFill>
+                <a:latin typeface="IBM Plex Mono" pitchFamily="34" charset="0"/>
+                <a:ea typeface="IBM Plex Mono" pitchFamily="34" charset="-122"/>
+                <a:cs typeface="IBM Plex Mono" pitchFamily="34" charset="-120"/>
+              </a:rPr>
               <a:t>Reconcile</a:t>
             </a:r>
             <a:endParaRPr lang="en-US" sz="1400" dirty="0"/>
@@ -2001,7 +1788,7 @@
           <a:bodyPr wrap="square" lIns="0" tIns="0" rIns="0" bIns="0" rtlCol="0" anchor="ctr"/>
           <a:lstStyle/>
           <a:p>
-            <a:pPr indent="0" marL="0">
+            <a:pPr marL="0" indent="0">
               <a:buNone/>
             </a:pPr>
             <a:r>
@@ -2035,6 +1822,7 @@
         <a:solidFill>
           <a:srgbClr val="F0F2F4"/>
         </a:solidFill>
+        <a:effectLst/>
       </p:bgPr>
     </p:bg>
     <p:spTree>
@@ -2070,6 +1858,13 @@
           </a:solidFill>
           <a:ln/>
         </p:spPr>
+        <p:txBody>
+          <a:bodyPr/>
+          <a:lstStyle/>
+          <a:p>
+            <a:endParaRPr lang="en-US"/>
+          </a:p>
+        </p:txBody>
       </p:sp>
       <p:sp>
         <p:nvSpPr>
@@ -2092,11 +1887,11 @@
           <a:bodyPr wrap="square" lIns="0" tIns="0" rIns="0" bIns="0" rtlCol="0" anchor="ctr"/>
           <a:lstStyle/>
           <a:p>
-            <a:pPr indent="0" marL="0">
-              <a:buNone/>
-            </a:pPr>
-            <a:r>
-              <a:rPr lang="en-US" sz="1100" b="1" spc="400" kern="0" dirty="0">
+            <a:pPr marL="0" indent="0">
+              <a:buNone/>
+            </a:pPr>
+            <a:r>
+              <a:rPr lang="en-US" sz="1100" b="1" kern="0" spc="400" dirty="0">
                 <a:solidFill>
                   <a:srgbClr val="E3A033"/>
                 </a:solidFill>
@@ -2131,7 +1926,7 @@
           <a:bodyPr wrap="square" lIns="0" tIns="0" rIns="0" bIns="0" rtlCol="0" anchor="ctr"/>
           <a:lstStyle/>
           <a:p>
-            <a:pPr indent="0" marL="0">
+            <a:pPr marL="0" indent="0">
               <a:buNone/>
             </a:pPr>
             <a:r>
@@ -2170,7 +1965,7 @@
           <a:bodyPr wrap="square" lIns="0" tIns="0" rIns="0" bIns="0" rtlCol="0" anchor="ctr"/>
           <a:lstStyle/>
           <a:p>
-            <a:pPr indent="0" marL="0">
+            <a:pPr marL="0" indent="0">
               <a:buNone/>
             </a:pPr>
             <a:r>
@@ -2212,13 +2007,20 @@
             <a:prstDash val="solid"/>
           </a:ln>
           <a:effectLst>
-            <a:outerShdw sx="100000" sy="100000" kx="0" ky="0" algn="bl" rotWithShape="0" blurRad="50800" dist="19050" dir="8100000">
+            <a:outerShdw blurRad="50800" dist="19050" dir="8100000" algn="bl" rotWithShape="0">
               <a:srgbClr val="2A3742">
                 <a:alpha val="8000"/>
               </a:srgbClr>
             </a:outerShdw>
           </a:effectLst>
         </p:spPr>
+        <p:txBody>
+          <a:bodyPr/>
+          <a:lstStyle/>
+          <a:p>
+            <a:endParaRPr lang="en-US"/>
+          </a:p>
+        </p:txBody>
       </p:sp>
       <p:sp>
         <p:nvSpPr>
@@ -2239,6 +2041,13 @@
           </a:solidFill>
           <a:ln/>
         </p:spPr>
+        <p:txBody>
+          <a:bodyPr/>
+          <a:lstStyle/>
+          <a:p>
+            <a:endParaRPr lang="en-US"/>
+          </a:p>
+        </p:txBody>
       </p:sp>
       <p:sp>
         <p:nvSpPr>
@@ -2261,7 +2070,7 @@
           <a:bodyPr wrap="square" lIns="0" tIns="0" rIns="0" bIns="0" rtlCol="0" anchor="ctr"/>
           <a:lstStyle/>
           <a:p>
-            <a:pPr indent="0" marL="0">
+            <a:pPr marL="0" indent="0">
               <a:lnSpc>
                 <a:spcPct val="105000"/>
               </a:lnSpc>
@@ -2278,12 +2087,6 @@
               </a:rPr>
               <a:t>In one breath:  </a:t>
             </a:r>
-            <a:pPr indent="0" marL="0">
-              <a:lnSpc>
-                <a:spcPct val="105000"/>
-              </a:lnSpc>
-              <a:buNone/>
-            </a:pPr>
             <a:r>
               <a:rPr lang="en-US" sz="1600" dirty="0">
                 <a:solidFill>
@@ -2295,12 +2098,6 @@
               </a:rPr>
               <a:t>A clinic finances a bundled telemedicine package and gets a quarterly pool of scan reads. Real scans draw the pool down. </a:t>
             </a:r>
-            <a:pPr indent="0" marL="0">
-              <a:lnSpc>
-                <a:spcPct val="105000"/>
-              </a:lnSpc>
-              <a:buNone/>
-            </a:pPr>
             <a:r>
               <a:rPr lang="en-US" sz="1600" b="1" dirty="0">
                 <a:solidFill>
@@ -2340,13 +2137,20 @@
             <a:prstDash val="solid"/>
           </a:ln>
           <a:effectLst>
-            <a:outerShdw sx="100000" sy="100000" kx="0" ky="0" algn="bl" rotWithShape="0" blurRad="50800" dist="19050" dir="8100000">
+            <a:outerShdw blurRad="50800" dist="19050" dir="8100000" algn="bl" rotWithShape="0">
               <a:srgbClr val="2A3742">
                 <a:alpha val="8000"/>
               </a:srgbClr>
             </a:outerShdw>
           </a:effectLst>
         </p:spPr>
+        <p:txBody>
+          <a:bodyPr/>
+          <a:lstStyle/>
+          <a:p>
+            <a:endParaRPr lang="en-US"/>
+          </a:p>
+        </p:txBody>
       </p:sp>
       <p:sp>
         <p:nvSpPr>
@@ -2367,6 +2171,13 @@
           </a:solidFill>
           <a:ln/>
         </p:spPr>
+        <p:txBody>
+          <a:bodyPr/>
+          <a:lstStyle/>
+          <a:p>
+            <a:endParaRPr lang="en-US"/>
+          </a:p>
+        </p:txBody>
       </p:sp>
       <p:sp>
         <p:nvSpPr>
@@ -2387,17 +2198,24 @@
           </a:solidFill>
           <a:ln/>
         </p:spPr>
+        <p:txBody>
+          <a:bodyPr/>
+          <a:lstStyle/>
+          <a:p>
+            <a:endParaRPr lang="en-US"/>
+          </a:p>
+        </p:txBody>
       </p:sp>
       <p:pic>
         <p:nvPicPr>
-          <p:cNvPr id="12" name="Image 0" descr="preencoded.png">    </p:cNvPr>
+          <p:cNvPr id="12" name="Image 0" descr="preencoded.png"/>
           <p:cNvPicPr>
             <a:picLocks noChangeAspect="1"/>
           </p:cNvPicPr>
           <p:nvPr/>
         </p:nvPicPr>
         <p:blipFill>
-          <a:blip r:embed="rId1"/>
+          <a:blip r:embed="rId3"/>
           <a:stretch>
             <a:fillRect/>
           </a:stretch>
@@ -2433,11 +2251,11 @@
           <a:bodyPr wrap="square" lIns="0" tIns="0" rIns="0" bIns="0" rtlCol="0" anchor="ctr"/>
           <a:lstStyle/>
           <a:p>
-            <a:pPr indent="0" marL="0">
-              <a:buNone/>
-            </a:pPr>
-            <a:r>
-              <a:rPr lang="en-US" sz="1200" b="1" spc="150" kern="0" dirty="0">
+            <a:pPr marL="0" indent="0">
+              <a:buNone/>
+            </a:pPr>
+            <a:r>
+              <a:rPr lang="en-US" sz="1200" b="1" kern="0" spc="150" dirty="0">
                 <a:solidFill>
                   <a:srgbClr val="3A6A9A"/>
                 </a:solidFill>
@@ -2472,7 +2290,7 @@
           <a:bodyPr wrap="square" lIns="0" tIns="0" rIns="0" bIns="0" rtlCol="0" anchor="ctr"/>
           <a:lstStyle/>
           <a:p>
-            <a:pPr indent="0" marL="0">
+            <a:pPr marL="0" indent="0">
               <a:buNone/>
             </a:pPr>
             <a:r>
@@ -2511,7 +2329,7 @@
           <a:bodyPr wrap="square" lIns="0" tIns="0" rIns="0" bIns="0" rtlCol="0" anchor="t"/>
           <a:lstStyle/>
           <a:p>
-            <a:pPr indent="0" marL="0">
+            <a:pPr marL="0" indent="0">
               <a:lnSpc>
                 <a:spcPct val="112000"/>
               </a:lnSpc>
@@ -2551,6 +2369,13 @@
           </a:solidFill>
           <a:ln/>
         </p:spPr>
+        <p:txBody>
+          <a:bodyPr/>
+          <a:lstStyle/>
+          <a:p>
+            <a:endParaRPr lang="en-US"/>
+          </a:p>
+        </p:txBody>
       </p:sp>
       <p:sp>
         <p:nvSpPr>
@@ -2573,7 +2398,7 @@
           <a:bodyPr wrap="square" lIns="0" tIns="0" rIns="0" bIns="0" rtlCol="0" anchor="ctr"/>
           <a:lstStyle/>
           <a:p>
-            <a:pPr algn="ctr" indent="0" marL="0">
+            <a:pPr marL="0" indent="0" algn="ctr">
               <a:buNone/>
             </a:pPr>
             <a:r>
@@ -2615,13 +2440,20 @@
             <a:prstDash val="solid"/>
           </a:ln>
           <a:effectLst>
-            <a:outerShdw sx="100000" sy="100000" kx="0" ky="0" algn="bl" rotWithShape="0" blurRad="50800" dist="19050" dir="8100000">
+            <a:outerShdw blurRad="50800" dist="19050" dir="8100000" algn="bl" rotWithShape="0">
               <a:srgbClr val="2A3742">
                 <a:alpha val="8000"/>
               </a:srgbClr>
             </a:outerShdw>
           </a:effectLst>
         </p:spPr>
+        <p:txBody>
+          <a:bodyPr/>
+          <a:lstStyle/>
+          <a:p>
+            <a:endParaRPr lang="en-US"/>
+          </a:p>
+        </p:txBody>
       </p:sp>
       <p:sp>
         <p:nvSpPr>
@@ -2642,6 +2474,13 @@
           </a:solidFill>
           <a:ln/>
         </p:spPr>
+        <p:txBody>
+          <a:bodyPr/>
+          <a:lstStyle/>
+          <a:p>
+            <a:endParaRPr lang="en-US"/>
+          </a:p>
+        </p:txBody>
       </p:sp>
       <p:sp>
         <p:nvSpPr>
@@ -2662,17 +2501,24 @@
           </a:solidFill>
           <a:ln/>
         </p:spPr>
+        <p:txBody>
+          <a:bodyPr/>
+          <a:lstStyle/>
+          <a:p>
+            <a:endParaRPr lang="en-US"/>
+          </a:p>
+        </p:txBody>
       </p:sp>
       <p:pic>
         <p:nvPicPr>
-          <p:cNvPr id="21" name="Image 1" descr="preencoded.png">    </p:cNvPr>
+          <p:cNvPr id="21" name="Image 1" descr="preencoded.png"/>
           <p:cNvPicPr>
             <a:picLocks noChangeAspect="1"/>
           </p:cNvPicPr>
           <p:nvPr/>
         </p:nvPicPr>
         <p:blipFill>
-          <a:blip r:embed="rId2"/>
+          <a:blip r:embed="rId4"/>
           <a:stretch>
             <a:fillRect/>
           </a:stretch>
@@ -2708,11 +2554,11 @@
           <a:bodyPr wrap="square" lIns="0" tIns="0" rIns="0" bIns="0" rtlCol="0" anchor="ctr"/>
           <a:lstStyle/>
           <a:p>
-            <a:pPr indent="0" marL="0">
-              <a:buNone/>
-            </a:pPr>
-            <a:r>
-              <a:rPr lang="en-US" sz="1200" b="1" spc="150" kern="0" dirty="0">
+            <a:pPr marL="0" indent="0">
+              <a:buNone/>
+            </a:pPr>
+            <a:r>
+              <a:rPr lang="en-US" sz="1200" b="1" kern="0" spc="150" dirty="0">
                 <a:solidFill>
                   <a:srgbClr val="E3A033"/>
                 </a:solidFill>
@@ -2747,7 +2593,7 @@
           <a:bodyPr wrap="square" lIns="0" tIns="0" rIns="0" bIns="0" rtlCol="0" anchor="ctr"/>
           <a:lstStyle/>
           <a:p>
-            <a:pPr indent="0" marL="0">
+            <a:pPr marL="0" indent="0">
               <a:buNone/>
             </a:pPr>
             <a:r>
@@ -2786,7 +2632,7 @@
           <a:bodyPr wrap="square" lIns="0" tIns="0" rIns="0" bIns="0" rtlCol="0" anchor="t"/>
           <a:lstStyle/>
           <a:p>
-            <a:pPr indent="0" marL="0">
+            <a:pPr marL="0" indent="0">
               <a:lnSpc>
                 <a:spcPct val="112000"/>
               </a:lnSpc>
@@ -2826,6 +2672,13 @@
           </a:solidFill>
           <a:ln/>
         </p:spPr>
+        <p:txBody>
+          <a:bodyPr/>
+          <a:lstStyle/>
+          <a:p>
+            <a:endParaRPr lang="en-US"/>
+          </a:p>
+        </p:txBody>
       </p:sp>
       <p:sp>
         <p:nvSpPr>
@@ -2848,7 +2701,7 @@
           <a:bodyPr wrap="square" lIns="0" tIns="0" rIns="0" bIns="0" rtlCol="0" anchor="ctr"/>
           <a:lstStyle/>
           <a:p>
-            <a:pPr algn="ctr" indent="0" marL="0">
+            <a:pPr marL="0" indent="0" algn="ctr">
               <a:buNone/>
             </a:pPr>
             <a:r>
@@ -2890,13 +2743,20 @@
             <a:prstDash val="solid"/>
           </a:ln>
           <a:effectLst>
-            <a:outerShdw sx="100000" sy="100000" kx="0" ky="0" algn="bl" rotWithShape="0" blurRad="50800" dist="19050" dir="8100000">
+            <a:outerShdw blurRad="50800" dist="19050" dir="8100000" algn="bl" rotWithShape="0">
               <a:srgbClr val="2A3742">
                 <a:alpha val="8000"/>
               </a:srgbClr>
             </a:outerShdw>
           </a:effectLst>
         </p:spPr>
+        <p:txBody>
+          <a:bodyPr/>
+          <a:lstStyle/>
+          <a:p>
+            <a:endParaRPr lang="en-US"/>
+          </a:p>
+        </p:txBody>
       </p:sp>
       <p:sp>
         <p:nvSpPr>
@@ -2917,6 +2777,13 @@
           </a:solidFill>
           <a:ln/>
         </p:spPr>
+        <p:txBody>
+          <a:bodyPr/>
+          <a:lstStyle/>
+          <a:p>
+            <a:endParaRPr lang="en-US"/>
+          </a:p>
+        </p:txBody>
       </p:sp>
       <p:sp>
         <p:nvSpPr>
@@ -2937,17 +2804,24 @@
           </a:solidFill>
           <a:ln/>
         </p:spPr>
+        <p:txBody>
+          <a:bodyPr/>
+          <a:lstStyle/>
+          <a:p>
+            <a:endParaRPr lang="en-US"/>
+          </a:p>
+        </p:txBody>
       </p:sp>
       <p:pic>
         <p:nvPicPr>
-          <p:cNvPr id="30" name="Image 2" descr="preencoded.png">    </p:cNvPr>
+          <p:cNvPr id="30" name="Image 2" descr="preencoded.png"/>
           <p:cNvPicPr>
             <a:picLocks noChangeAspect="1"/>
           </p:cNvPicPr>
           <p:nvPr/>
         </p:nvPicPr>
         <p:blipFill>
-          <a:blip r:embed="rId3"/>
+          <a:blip r:embed="rId5"/>
           <a:stretch>
             <a:fillRect/>
           </a:stretch>
@@ -2983,11 +2857,11 @@
           <a:bodyPr wrap="square" lIns="0" tIns="0" rIns="0" bIns="0" rtlCol="0" anchor="ctr"/>
           <a:lstStyle/>
           <a:p>
-            <a:pPr indent="0" marL="0">
-              <a:buNone/>
-            </a:pPr>
-            <a:r>
-              <a:rPr lang="en-US" sz="1200" b="1" spc="150" kern="0" dirty="0">
+            <a:pPr marL="0" indent="0">
+              <a:buNone/>
+            </a:pPr>
+            <a:r>
+              <a:rPr lang="en-US" sz="1200" b="1" kern="0" spc="150" dirty="0">
                 <a:solidFill>
                   <a:srgbClr val="469B68"/>
                 </a:solidFill>
@@ -3022,7 +2896,7 @@
           <a:bodyPr wrap="square" lIns="0" tIns="0" rIns="0" bIns="0" rtlCol="0" anchor="ctr"/>
           <a:lstStyle/>
           <a:p>
-            <a:pPr indent="0" marL="0">
+            <a:pPr marL="0" indent="0">
               <a:buNone/>
             </a:pPr>
             <a:r>
@@ -3061,7 +2935,7 @@
           <a:bodyPr wrap="square" lIns="0" tIns="0" rIns="0" bIns="0" rtlCol="0" anchor="t"/>
           <a:lstStyle/>
           <a:p>
-            <a:pPr indent="0" marL="0">
+            <a:pPr marL="0" indent="0">
               <a:lnSpc>
                 <a:spcPct val="112000"/>
               </a:lnSpc>
@@ -3101,6 +2975,13 @@
           </a:solidFill>
           <a:ln/>
         </p:spPr>
+        <p:txBody>
+          <a:bodyPr/>
+          <a:lstStyle/>
+          <a:p>
+            <a:endParaRPr lang="en-US"/>
+          </a:p>
+        </p:txBody>
       </p:sp>
       <p:sp>
         <p:nvSpPr>
@@ -3123,7 +3004,7 @@
           <a:bodyPr wrap="square" lIns="0" tIns="0" rIns="0" bIns="0" rtlCol="0" anchor="ctr"/>
           <a:lstStyle/>
           <a:p>
-            <a:pPr algn="ctr" indent="0" marL="0">
+            <a:pPr marL="0" indent="0" algn="ctr">
               <a:buNone/>
             </a:pPr>
             <a:r>
@@ -3162,11 +3043,11 @@
           <a:bodyPr wrap="square" lIns="0" tIns="0" rIns="0" bIns="0" rtlCol="0" anchor="ctr"/>
           <a:lstStyle/>
           <a:p>
-            <a:pPr indent="0" marL="0">
-              <a:buNone/>
-            </a:pPr>
-            <a:r>
-              <a:rPr lang="en-US" sz="800" spc="200" kern="0" dirty="0">
+            <a:pPr marL="0" indent="0">
+              <a:buNone/>
+            </a:pPr>
+            <a:r>
+              <a:rPr lang="en-US" sz="800" kern="0" spc="200" dirty="0">
                 <a:solidFill>
                   <a:srgbClr val="6B7785"/>
                 </a:solidFill>
@@ -3201,7 +3082,7 @@
           <a:bodyPr wrap="square" lIns="0" tIns="0" rIns="0" bIns="0" rtlCol="0" anchor="ctr"/>
           <a:lstStyle/>
           <a:p>
-            <a:pPr algn="r" indent="0" marL="0">
+            <a:pPr marL="0" indent="0" algn="r">
               <a:buNone/>
             </a:pPr>
             <a:r>
@@ -3235,6 +3116,7 @@
         <a:solidFill>
           <a:srgbClr val="F0F2F4"/>
         </a:solidFill>
+        <a:effectLst/>
       </p:bgPr>
     </p:bg>
     <p:spTree>
@@ -3270,6 +3152,13 @@
           </a:solidFill>
           <a:ln/>
         </p:spPr>
+        <p:txBody>
+          <a:bodyPr/>
+          <a:lstStyle/>
+          <a:p>
+            <a:endParaRPr lang="en-US"/>
+          </a:p>
+        </p:txBody>
       </p:sp>
       <p:sp>
         <p:nvSpPr>
@@ -3292,11 +3181,11 @@
           <a:bodyPr wrap="square" lIns="0" tIns="0" rIns="0" bIns="0" rtlCol="0" anchor="ctr"/>
           <a:lstStyle/>
           <a:p>
-            <a:pPr indent="0" marL="0">
-              <a:buNone/>
-            </a:pPr>
-            <a:r>
-              <a:rPr lang="en-US" sz="1100" b="1" spc="400" kern="0" dirty="0">
+            <a:pPr marL="0" indent="0">
+              <a:buNone/>
+            </a:pPr>
+            <a:r>
+              <a:rPr lang="en-US" sz="1100" b="1" kern="0" spc="400" dirty="0">
                 <a:solidFill>
                   <a:srgbClr val="E3A033"/>
                 </a:solidFill>
@@ -3331,7 +3220,7 @@
           <a:bodyPr wrap="square" lIns="0" tIns="0" rIns="0" bIns="0" rtlCol="0" anchor="ctr"/>
           <a:lstStyle/>
           <a:p>
-            <a:pPr indent="0" marL="0">
+            <a:pPr marL="0" indent="0">
               <a:buNone/>
             </a:pPr>
             <a:r>
@@ -3370,7 +3259,7 @@
           <a:bodyPr wrap="square" lIns="0" tIns="0" rIns="0" bIns="0" rtlCol="0" anchor="ctr"/>
           <a:lstStyle/>
           <a:p>
-            <a:pPr indent="0" marL="0">
+            <a:pPr marL="0" indent="0">
               <a:buNone/>
             </a:pPr>
             <a:r>
@@ -3412,13 +3301,20 @@
             <a:prstDash val="solid"/>
           </a:ln>
           <a:effectLst>
-            <a:outerShdw sx="100000" sy="100000" kx="0" ky="0" algn="bl" rotWithShape="0" blurRad="50800" dist="19050" dir="8100000">
+            <a:outerShdw blurRad="50800" dist="19050" dir="8100000" algn="bl" rotWithShape="0">
               <a:srgbClr val="2A3742">
                 <a:alpha val="8000"/>
               </a:srgbClr>
             </a:outerShdw>
           </a:effectLst>
         </p:spPr>
+        <p:txBody>
+          <a:bodyPr/>
+          <a:lstStyle/>
+          <a:p>
+            <a:endParaRPr lang="en-US"/>
+          </a:p>
+        </p:txBody>
       </p:sp>
       <p:sp>
         <p:nvSpPr>
@@ -3439,6 +3335,13 @@
           </a:solidFill>
           <a:ln/>
         </p:spPr>
+        <p:txBody>
+          <a:bodyPr/>
+          <a:lstStyle/>
+          <a:p>
+            <a:endParaRPr lang="en-US"/>
+          </a:p>
+        </p:txBody>
       </p:sp>
       <p:sp>
         <p:nvSpPr>
@@ -3459,17 +3362,24 @@
           </a:solidFill>
           <a:ln/>
         </p:spPr>
+        <p:txBody>
+          <a:bodyPr/>
+          <a:lstStyle/>
+          <a:p>
+            <a:endParaRPr lang="en-US"/>
+          </a:p>
+        </p:txBody>
       </p:sp>
       <p:pic>
         <p:nvPicPr>
-          <p:cNvPr id="9" name="Image 0" descr="preencoded.png">    </p:cNvPr>
+          <p:cNvPr id="9" name="Image 0" descr="preencoded.png"/>
           <p:cNvPicPr>
             <a:picLocks noChangeAspect="1"/>
           </p:cNvPicPr>
           <p:nvPr/>
         </p:nvPicPr>
         <p:blipFill>
-          <a:blip r:embed="rId1"/>
+          <a:blip r:embed="rId3"/>
           <a:stretch>
             <a:fillRect/>
           </a:stretch>
@@ -3505,7 +3415,7 @@
           <a:bodyPr wrap="square" lIns="0" tIns="0" rIns="0" bIns="0" rtlCol="0" anchor="ctr"/>
           <a:lstStyle/>
           <a:p>
-            <a:pPr indent="0" marL="0">
+            <a:pPr marL="0" indent="0">
               <a:buNone/>
             </a:pPr>
             <a:r>
@@ -3544,7 +3454,7 @@
           <a:bodyPr wrap="square" lIns="0" tIns="0" rIns="0" bIns="0" rtlCol="0" anchor="ctr"/>
           <a:lstStyle/>
           <a:p>
-            <a:pPr indent="0" marL="0">
+            <a:pPr marL="0" indent="0">
               <a:buNone/>
             </a:pPr>
             <a:r>
@@ -3583,7 +3493,7 @@
           <a:bodyPr wrap="square" lIns="0" tIns="0" rIns="0" bIns="0" rtlCol="0" anchor="ctr"/>
           <a:lstStyle/>
           <a:p>
-            <a:pPr algn="ctr" indent="0" marL="0">
+            <a:pPr marL="0" indent="0" algn="ctr">
               <a:buNone/>
             </a:pPr>
             <a:r>
@@ -3625,13 +3535,20 @@
             <a:prstDash val="solid"/>
           </a:ln>
           <a:effectLst>
-            <a:outerShdw sx="100000" sy="100000" kx="0" ky="0" algn="bl" rotWithShape="0" blurRad="50800" dist="19050" dir="8100000">
+            <a:outerShdw blurRad="50800" dist="19050" dir="8100000" algn="bl" rotWithShape="0">
               <a:srgbClr val="2A3742">
                 <a:alpha val="8000"/>
               </a:srgbClr>
             </a:outerShdw>
           </a:effectLst>
         </p:spPr>
+        <p:txBody>
+          <a:bodyPr/>
+          <a:lstStyle/>
+          <a:p>
+            <a:endParaRPr lang="en-US"/>
+          </a:p>
+        </p:txBody>
       </p:sp>
       <p:sp>
         <p:nvSpPr>
@@ -3652,6 +3569,13 @@
           </a:solidFill>
           <a:ln/>
         </p:spPr>
+        <p:txBody>
+          <a:bodyPr/>
+          <a:lstStyle/>
+          <a:p>
+            <a:endParaRPr lang="en-US"/>
+          </a:p>
+        </p:txBody>
       </p:sp>
       <p:sp>
         <p:nvSpPr>
@@ -3672,17 +3596,24 @@
           </a:solidFill>
           <a:ln/>
         </p:spPr>
+        <p:txBody>
+          <a:bodyPr/>
+          <a:lstStyle/>
+          <a:p>
+            <a:endParaRPr lang="en-US"/>
+          </a:p>
+        </p:txBody>
       </p:sp>
       <p:pic>
         <p:nvPicPr>
-          <p:cNvPr id="16" name="Image 1" descr="preencoded.png">    </p:cNvPr>
+          <p:cNvPr id="16" name="Image 1" descr="preencoded.png"/>
           <p:cNvPicPr>
             <a:picLocks noChangeAspect="1"/>
           </p:cNvPicPr>
           <p:nvPr/>
         </p:nvPicPr>
         <p:blipFill>
-          <a:blip r:embed="rId2"/>
+          <a:blip r:embed="rId4"/>
           <a:stretch>
             <a:fillRect/>
           </a:stretch>
@@ -3718,7 +3649,7 @@
           <a:bodyPr wrap="square" lIns="0" tIns="0" rIns="0" bIns="0" rtlCol="0" anchor="ctr"/>
           <a:lstStyle/>
           <a:p>
-            <a:pPr indent="0" marL="0">
+            <a:pPr marL="0" indent="0">
               <a:buNone/>
             </a:pPr>
             <a:r>
@@ -3757,7 +3688,7 @@
           <a:bodyPr wrap="square" lIns="0" tIns="0" rIns="0" bIns="0" rtlCol="0" anchor="ctr"/>
           <a:lstStyle/>
           <a:p>
-            <a:pPr indent="0" marL="0">
+            <a:pPr marL="0" indent="0">
               <a:buNone/>
             </a:pPr>
             <a:r>
@@ -3796,7 +3727,7 @@
           <a:bodyPr wrap="square" lIns="0" tIns="0" rIns="0" bIns="0" rtlCol="0" anchor="ctr"/>
           <a:lstStyle/>
           <a:p>
-            <a:pPr algn="ctr" indent="0" marL="0">
+            <a:pPr marL="0" indent="0" algn="ctr">
               <a:buNone/>
             </a:pPr>
             <a:r>
@@ -3833,13 +3764,20 @@
           </a:solidFill>
           <a:ln/>
           <a:effectLst>
-            <a:outerShdw sx="100000" sy="100000" kx="0" ky="0" algn="bl" rotWithShape="0" blurRad="63500" dist="25400" dir="8100000">
+            <a:outerShdw blurRad="63500" dist="25400" dir="8100000" algn="bl" rotWithShape="0">
               <a:srgbClr val="2A3742">
                 <a:alpha val="10000"/>
               </a:srgbClr>
             </a:outerShdw>
           </a:effectLst>
         </p:spPr>
+        <p:txBody>
+          <a:bodyPr/>
+          <a:lstStyle/>
+          <a:p>
+            <a:endParaRPr lang="en-US"/>
+          </a:p>
+        </p:txBody>
       </p:sp>
       <p:sp>
         <p:nvSpPr>
@@ -3849,7 +3787,7 @@
         </p:nvSpPr>
         <p:spPr>
           <a:xfrm>
-            <a:off x="6309360" y="2267712"/>
+            <a:off x="6309360" y="2233208"/>
             <a:ext cx="2103120" cy="228600"/>
           </a:xfrm>
           <a:prstGeom prst="rect">
@@ -3862,11 +3800,11 @@
           <a:bodyPr wrap="square" lIns="0" tIns="0" rIns="0" bIns="0" rtlCol="0" anchor="ctr"/>
           <a:lstStyle/>
           <a:p>
-            <a:pPr algn="ctr" indent="0" marL="0">
-              <a:buNone/>
-            </a:pPr>
-            <a:r>
-              <a:rPr lang="en-US" sz="900" b="1" spc="150" kern="0" dirty="0">
+            <a:pPr marL="0" indent="0" algn="ctr">
+              <a:buNone/>
+            </a:pPr>
+            <a:r>
+              <a:rPr lang="en-US" sz="900" b="1" kern="0" spc="150" dirty="0">
                 <a:solidFill>
                   <a:srgbClr val="DDE8C9"/>
                 </a:solidFill>
@@ -3888,7 +3826,7 @@
         </p:nvSpPr>
         <p:spPr>
           <a:xfrm>
-            <a:off x="6309360" y="2560320"/>
+            <a:off x="6309360" y="2465430"/>
             <a:ext cx="2103120" cy="548640"/>
           </a:xfrm>
           <a:prstGeom prst="rect">
@@ -3901,7 +3839,7 @@
           <a:bodyPr wrap="square" lIns="0" tIns="0" rIns="0" bIns="0" rtlCol="0" anchor="ctr"/>
           <a:lstStyle/>
           <a:p>
-            <a:pPr algn="ctr" indent="0" marL="0">
+            <a:pPr marL="0" indent="0" algn="ctr">
               <a:buNone/>
             </a:pPr>
             <a:r>
@@ -3940,7 +3878,7 @@
           <a:bodyPr wrap="square" lIns="0" tIns="0" rIns="0" bIns="0" rtlCol="0" anchor="ctr"/>
           <a:lstStyle/>
           <a:p>
-            <a:pPr algn="ctr" indent="0" marL="0">
+            <a:pPr marL="0" indent="0" algn="ctr">
               <a:buNone/>
             </a:pPr>
             <a:r>
@@ -3977,13 +3915,20 @@
           </a:solidFill>
           <a:ln/>
           <a:effectLst>
-            <a:outerShdw sx="100000" sy="100000" kx="0" ky="0" algn="bl" rotWithShape="0" blurRad="63500" dist="25400" dir="8100000">
+            <a:outerShdw blurRad="63500" dist="25400" dir="8100000" algn="bl" rotWithShape="0">
               <a:srgbClr val="2A3742">
                 <a:alpha val="10000"/>
               </a:srgbClr>
             </a:outerShdw>
           </a:effectLst>
         </p:spPr>
+        <p:txBody>
+          <a:bodyPr/>
+          <a:lstStyle/>
+          <a:p>
+            <a:endParaRPr lang="en-US"/>
+          </a:p>
+        </p:txBody>
       </p:sp>
       <p:sp>
         <p:nvSpPr>
@@ -4006,11 +3951,11 @@
           <a:bodyPr wrap="square" lIns="0" tIns="0" rIns="0" bIns="0" rtlCol="0" anchor="ctr"/>
           <a:lstStyle/>
           <a:p>
-            <a:pPr algn="ctr" indent="0" marL="0">
-              <a:buNone/>
-            </a:pPr>
-            <a:r>
-              <a:rPr lang="en-US" sz="900" b="1" spc="150" kern="0" dirty="0">
+            <a:pPr marL="0" indent="0" algn="ctr">
+              <a:buNone/>
+            </a:pPr>
+            <a:r>
+              <a:rPr lang="en-US" sz="900" b="1" kern="0" spc="150" dirty="0">
                 <a:solidFill>
                   <a:srgbClr val="E3A033"/>
                 </a:solidFill>
@@ -4045,7 +3990,7 @@
           <a:bodyPr wrap="square" lIns="0" tIns="0" rIns="0" bIns="0" rtlCol="0" anchor="ctr"/>
           <a:lstStyle/>
           <a:p>
-            <a:pPr algn="ctr" indent="0" marL="0">
+            <a:pPr marL="0" indent="0" algn="ctr">
               <a:buNone/>
             </a:pPr>
             <a:r>
@@ -4084,7 +4029,7 @@
           <a:bodyPr wrap="square" lIns="0" tIns="0" rIns="0" bIns="0" rtlCol="0" anchor="ctr"/>
           <a:lstStyle/>
           <a:p>
-            <a:pPr algn="ctr" indent="0" marL="0">
+            <a:pPr marL="0" indent="0" algn="ctr">
               <a:buNone/>
             </a:pPr>
             <a:r>
@@ -4126,13 +4071,20 @@
             <a:prstDash val="solid"/>
           </a:ln>
           <a:effectLst>
-            <a:outerShdw sx="100000" sy="100000" kx="0" ky="0" algn="bl" rotWithShape="0" blurRad="50800" dist="19050" dir="8100000">
+            <a:outerShdw blurRad="50800" dist="19050" dir="8100000" algn="bl" rotWithShape="0">
               <a:srgbClr val="2A3742">
                 <a:alpha val="8000"/>
               </a:srgbClr>
             </a:outerShdw>
           </a:effectLst>
         </p:spPr>
+        <p:txBody>
+          <a:bodyPr/>
+          <a:lstStyle/>
+          <a:p>
+            <a:endParaRPr lang="en-US"/>
+          </a:p>
+        </p:txBody>
       </p:sp>
       <p:sp>
         <p:nvSpPr>
@@ -4153,6 +4105,13 @@
           </a:solidFill>
           <a:ln/>
         </p:spPr>
+        <p:txBody>
+          <a:bodyPr/>
+          <a:lstStyle/>
+          <a:p>
+            <a:endParaRPr lang="en-US"/>
+          </a:p>
+        </p:txBody>
       </p:sp>
       <p:sp>
         <p:nvSpPr>
@@ -4175,11 +4134,11 @@
           <a:bodyPr wrap="square" lIns="0" tIns="0" rIns="0" bIns="0" rtlCol="0" anchor="ctr"/>
           <a:lstStyle/>
           <a:p>
-            <a:pPr indent="0" marL="0">
-              <a:buNone/>
-            </a:pPr>
-            <a:r>
-              <a:rPr lang="en-US" sz="1100" b="1" spc="150" kern="0" dirty="0">
+            <a:pPr marL="0" indent="0">
+              <a:buNone/>
+            </a:pPr>
+            <a:r>
+              <a:rPr lang="en-US" sz="1100" b="1" kern="0" spc="150" dirty="0">
                 <a:solidFill>
                   <a:srgbClr val="E3A033"/>
                 </a:solidFill>
@@ -4214,7 +4173,7 @@
           <a:bodyPr wrap="square" lIns="0" tIns="0" rIns="0" bIns="0" rtlCol="0" anchor="t"/>
           <a:lstStyle/>
           <a:p>
-            <a:pPr indent="0" marL="0">
+            <a:pPr marL="0" indent="0">
               <a:lnSpc>
                 <a:spcPct val="115000"/>
               </a:lnSpc>
@@ -4231,12 +4190,6 @@
               </a:rPr>
               <a:t>The monthly pool is a combination</a:t>
             </a:r>
-            <a:pPr indent="0" marL="0">
-              <a:lnSpc>
-                <a:spcPct val="115000"/>
-              </a:lnSpc>
-              <a:buNone/>
-            </a:pPr>
             <a:r>
               <a:rPr lang="en-US" sz="1450" dirty="0">
                 <a:solidFill>
@@ -4276,13 +4229,20 @@
             <a:prstDash val="solid"/>
           </a:ln>
           <a:effectLst>
-            <a:outerShdw sx="100000" sy="100000" kx="0" ky="0" algn="bl" rotWithShape="0" blurRad="50800" dist="19050" dir="8100000">
+            <a:outerShdw blurRad="50800" dist="19050" dir="8100000" algn="bl" rotWithShape="0">
               <a:srgbClr val="2A3742">
                 <a:alpha val="8000"/>
               </a:srgbClr>
             </a:outerShdw>
           </a:effectLst>
         </p:spPr>
+        <p:txBody>
+          <a:bodyPr/>
+          <a:lstStyle/>
+          <a:p>
+            <a:endParaRPr lang="en-US"/>
+          </a:p>
+        </p:txBody>
       </p:sp>
       <p:sp>
         <p:nvSpPr>
@@ -4303,6 +4263,13 @@
           </a:solidFill>
           <a:ln/>
         </p:spPr>
+        <p:txBody>
+          <a:bodyPr/>
+          <a:lstStyle/>
+          <a:p>
+            <a:endParaRPr lang="en-US"/>
+          </a:p>
+        </p:txBody>
       </p:sp>
       <p:sp>
         <p:nvSpPr>
@@ -4323,10 +4290,17 @@
           </a:solidFill>
           <a:ln/>
         </p:spPr>
+        <p:txBody>
+          <a:bodyPr/>
+          <a:lstStyle/>
+          <a:p>
+            <a:endParaRPr lang="en-US"/>
+          </a:p>
+        </p:txBody>
       </p:sp>
       <p:pic>
         <p:nvPicPr>
-          <p:cNvPr id="35" name="Image 2" descr="preencoded.png">    </p:cNvPr>
+          <p:cNvPr id="35" name="Image 2" descr="preencoded.png"/>
           <p:cNvPicPr>
             <a:picLocks noChangeAspect="1"/>
           </p:cNvPicPr>
@@ -4369,11 +4343,11 @@
           <a:bodyPr wrap="square" lIns="0" tIns="0" rIns="0" bIns="0" rtlCol="0" anchor="ctr"/>
           <a:lstStyle/>
           <a:p>
-            <a:pPr indent="0" marL="0">
-              <a:buNone/>
-            </a:pPr>
-            <a:r>
-              <a:rPr lang="en-US" sz="1100" b="1" spc="150" kern="0" dirty="0">
+            <a:pPr marL="0" indent="0">
+              <a:buNone/>
+            </a:pPr>
+            <a:r>
+              <a:rPr lang="en-US" sz="1100" b="1" kern="0" spc="150" dirty="0">
                 <a:solidFill>
                   <a:srgbClr val="6B7785"/>
                 </a:solidFill>
@@ -4408,7 +4382,7 @@
           <a:bodyPr wrap="square" lIns="0" tIns="0" rIns="0" bIns="0" rtlCol="0" anchor="t"/>
           <a:lstStyle/>
           <a:p>
-            <a:pPr indent="0" marL="0">
+            <a:pPr marL="0" indent="0">
               <a:lnSpc>
                 <a:spcPct val="115000"/>
               </a:lnSpc>
@@ -4425,12 +4399,6 @@
               </a:rPr>
               <a:t>Generates both import files each month. </a:t>
             </a:r>
-            <a:pPr indent="0" marL="0">
-              <a:lnSpc>
-                <a:spcPct val="115000"/>
-              </a:lnSpc>
-              <a:buNone/>
-            </a:pPr>
             <a:r>
               <a:rPr lang="en-US" sz="1400" dirty="0">
                 <a:solidFill>
@@ -4467,11 +4435,11 @@
           <a:bodyPr wrap="square" lIns="0" tIns="0" rIns="0" bIns="0" rtlCol="0" anchor="ctr"/>
           <a:lstStyle/>
           <a:p>
-            <a:pPr indent="0" marL="0">
-              <a:buNone/>
-            </a:pPr>
-            <a:r>
-              <a:rPr lang="en-US" sz="800" spc="200" kern="0" dirty="0">
+            <a:pPr marL="0" indent="0">
+              <a:buNone/>
+            </a:pPr>
+            <a:r>
+              <a:rPr lang="en-US" sz="800" kern="0" spc="200" dirty="0">
                 <a:solidFill>
                   <a:srgbClr val="6B7785"/>
                 </a:solidFill>
@@ -4506,7 +4474,7 @@
           <a:bodyPr wrap="square" lIns="0" tIns="0" rIns="0" bIns="0" rtlCol="0" anchor="ctr"/>
           <a:lstStyle/>
           <a:p>
-            <a:pPr algn="r" indent="0" marL="0">
+            <a:pPr marL="0" indent="0" algn="r">
               <a:buNone/>
             </a:pPr>
             <a:r>
@@ -4540,6 +4508,7 @@
         <a:solidFill>
           <a:srgbClr val="F0F2F4"/>
         </a:solidFill>
+        <a:effectLst/>
       </p:bgPr>
     </p:bg>
     <p:spTree>
@@ -4575,6 +4544,13 @@
           </a:solidFill>
           <a:ln/>
         </p:spPr>
+        <p:txBody>
+          <a:bodyPr/>
+          <a:lstStyle/>
+          <a:p>
+            <a:endParaRPr lang="en-US"/>
+          </a:p>
+        </p:txBody>
       </p:sp>
       <p:sp>
         <p:nvSpPr>
@@ -4597,11 +4573,11 @@
           <a:bodyPr wrap="square" lIns="0" tIns="0" rIns="0" bIns="0" rtlCol="0" anchor="ctr"/>
           <a:lstStyle/>
           <a:p>
-            <a:pPr indent="0" marL="0">
-              <a:buNone/>
-            </a:pPr>
-            <a:r>
-              <a:rPr lang="en-US" sz="1100" b="1" spc="400" kern="0" dirty="0">
+            <a:pPr marL="0" indent="0">
+              <a:buNone/>
+            </a:pPr>
+            <a:r>
+              <a:rPr lang="en-US" sz="1100" b="1" kern="0" spc="400" dirty="0">
                 <a:solidFill>
                   <a:srgbClr val="E3A033"/>
                 </a:solidFill>
@@ -4636,7 +4612,7 @@
           <a:bodyPr wrap="square" lIns="0" tIns="0" rIns="0" bIns="0" rtlCol="0" anchor="ctr"/>
           <a:lstStyle/>
           <a:p>
-            <a:pPr indent="0" marL="0">
+            <a:pPr marL="0" indent="0">
               <a:buNone/>
             </a:pPr>
             <a:r>
@@ -4675,7 +4651,7 @@
           <a:bodyPr wrap="square" lIns="0" tIns="0" rIns="0" bIns="0" rtlCol="0" anchor="ctr"/>
           <a:lstStyle/>
           <a:p>
-            <a:pPr indent="0" marL="0">
+            <a:pPr marL="0" indent="0">
               <a:buNone/>
             </a:pPr>
             <a:r>
@@ -4717,13 +4693,20 @@
             <a:prstDash val="solid"/>
           </a:ln>
           <a:effectLst>
-            <a:outerShdw sx="100000" sy="100000" kx="0" ky="0" algn="bl" rotWithShape="0" blurRad="50800" dist="19050" dir="8100000">
+            <a:outerShdw blurRad="50800" dist="19050" dir="8100000" algn="bl" rotWithShape="0">
               <a:srgbClr val="2A3742">
                 <a:alpha val="8000"/>
               </a:srgbClr>
             </a:outerShdw>
           </a:effectLst>
         </p:spPr>
+        <p:txBody>
+          <a:bodyPr/>
+          <a:lstStyle/>
+          <a:p>
+            <a:endParaRPr lang="en-US"/>
+          </a:p>
+        </p:txBody>
       </p:sp>
       <p:sp>
         <p:nvSpPr>
@@ -4744,6 +4727,13 @@
           </a:solidFill>
           <a:ln/>
         </p:spPr>
+        <p:txBody>
+          <a:bodyPr/>
+          <a:lstStyle/>
+          <a:p>
+            <a:endParaRPr lang="en-US"/>
+          </a:p>
+        </p:txBody>
       </p:sp>
       <p:sp>
         <p:nvSpPr>
@@ -4764,6 +4754,13 @@
           </a:solidFill>
           <a:ln/>
         </p:spPr>
+        <p:txBody>
+          <a:bodyPr/>
+          <a:lstStyle/>
+          <a:p>
+            <a:endParaRPr lang="en-US"/>
+          </a:p>
+        </p:txBody>
       </p:sp>
       <p:sp>
         <p:nvSpPr>
@@ -4786,7 +4783,7 @@
           <a:bodyPr wrap="square" lIns="0" tIns="0" rIns="0" bIns="0" rtlCol="0" anchor="ctr"/>
           <a:lstStyle/>
           <a:p>
-            <a:pPr algn="ctr" indent="0" marL="0">
+            <a:pPr marL="0" indent="0" algn="ctr">
               <a:buNone/>
             </a:pPr>
             <a:r>
@@ -4825,7 +4822,7 @@
           <a:bodyPr wrap="square" lIns="0" tIns="0" rIns="0" bIns="0" rtlCol="0" anchor="ctr"/>
           <a:lstStyle/>
           <a:p>
-            <a:pPr indent="0" marL="0">
+            <a:pPr marL="0" indent="0">
               <a:buNone/>
             </a:pPr>
             <a:r>
@@ -4864,7 +4861,7 @@
           <a:bodyPr wrap="square" lIns="0" tIns="0" rIns="0" bIns="0" rtlCol="0" anchor="t"/>
           <a:lstStyle/>
           <a:p>
-            <a:pPr indent="0" marL="0">
+            <a:pPr marL="0" indent="0">
               <a:lnSpc>
                 <a:spcPct val="110000"/>
               </a:lnSpc>
@@ -4909,13 +4906,20 @@
             <a:prstDash val="solid"/>
           </a:ln>
           <a:effectLst>
-            <a:outerShdw sx="100000" sy="100000" kx="0" ky="0" algn="bl" rotWithShape="0" blurRad="50800" dist="19050" dir="8100000">
+            <a:outerShdw blurRad="50800" dist="19050" dir="8100000" algn="bl" rotWithShape="0">
               <a:srgbClr val="2A3742">
                 <a:alpha val="8000"/>
               </a:srgbClr>
             </a:outerShdw>
           </a:effectLst>
         </p:spPr>
+        <p:txBody>
+          <a:bodyPr/>
+          <a:lstStyle/>
+          <a:p>
+            <a:endParaRPr lang="en-US"/>
+          </a:p>
+        </p:txBody>
       </p:sp>
       <p:sp>
         <p:nvSpPr>
@@ -4936,6 +4940,13 @@
           </a:solidFill>
           <a:ln/>
         </p:spPr>
+        <p:txBody>
+          <a:bodyPr/>
+          <a:lstStyle/>
+          <a:p>
+            <a:endParaRPr lang="en-US"/>
+          </a:p>
+        </p:txBody>
       </p:sp>
       <p:sp>
         <p:nvSpPr>
@@ -4956,6 +4967,13 @@
           </a:solidFill>
           <a:ln/>
         </p:spPr>
+        <p:txBody>
+          <a:bodyPr/>
+          <a:lstStyle/>
+          <a:p>
+            <a:endParaRPr lang="en-US"/>
+          </a:p>
+        </p:txBody>
       </p:sp>
       <p:sp>
         <p:nvSpPr>
@@ -4978,7 +4996,7 @@
           <a:bodyPr wrap="square" lIns="0" tIns="0" rIns="0" bIns="0" rtlCol="0" anchor="ctr"/>
           <a:lstStyle/>
           <a:p>
-            <a:pPr algn="ctr" indent="0" marL="0">
+            <a:pPr marL="0" indent="0" algn="ctr">
               <a:buNone/>
             </a:pPr>
             <a:r>
@@ -5017,7 +5035,7 @@
           <a:bodyPr wrap="square" lIns="0" tIns="0" rIns="0" bIns="0" rtlCol="0" anchor="ctr"/>
           <a:lstStyle/>
           <a:p>
-            <a:pPr indent="0" marL="0">
+            <a:pPr marL="0" indent="0">
               <a:buNone/>
             </a:pPr>
             <a:r>
@@ -5056,7 +5074,7 @@
           <a:bodyPr wrap="square" lIns="0" tIns="0" rIns="0" bIns="0" rtlCol="0" anchor="t"/>
           <a:lstStyle/>
           <a:p>
-            <a:pPr indent="0" marL="0">
+            <a:pPr marL="0" indent="0">
               <a:lnSpc>
                 <a:spcPct val="110000"/>
               </a:lnSpc>
@@ -5101,13 +5119,20 @@
             <a:prstDash val="solid"/>
           </a:ln>
           <a:effectLst>
-            <a:outerShdw sx="100000" sy="100000" kx="0" ky="0" algn="bl" rotWithShape="0" blurRad="50800" dist="19050" dir="8100000">
+            <a:outerShdw blurRad="50800" dist="19050" dir="8100000" algn="bl" rotWithShape="0">
               <a:srgbClr val="2A3742">
                 <a:alpha val="8000"/>
               </a:srgbClr>
             </a:outerShdw>
           </a:effectLst>
         </p:spPr>
+        <p:txBody>
+          <a:bodyPr/>
+          <a:lstStyle/>
+          <a:p>
+            <a:endParaRPr lang="en-US"/>
+          </a:p>
+        </p:txBody>
       </p:sp>
       <p:sp>
         <p:nvSpPr>
@@ -5128,6 +5153,13 @@
           </a:solidFill>
           <a:ln/>
         </p:spPr>
+        <p:txBody>
+          <a:bodyPr/>
+          <a:lstStyle/>
+          <a:p>
+            <a:endParaRPr lang="en-US"/>
+          </a:p>
+        </p:txBody>
       </p:sp>
       <p:sp>
         <p:nvSpPr>
@@ -5148,6 +5180,13 @@
           </a:solidFill>
           <a:ln/>
         </p:spPr>
+        <p:txBody>
+          <a:bodyPr/>
+          <a:lstStyle/>
+          <a:p>
+            <a:endParaRPr lang="en-US"/>
+          </a:p>
+        </p:txBody>
       </p:sp>
       <p:sp>
         <p:nvSpPr>
@@ -5170,7 +5209,7 @@
           <a:bodyPr wrap="square" lIns="0" tIns="0" rIns="0" bIns="0" rtlCol="0" anchor="ctr"/>
           <a:lstStyle/>
           <a:p>
-            <a:pPr algn="ctr" indent="0" marL="0">
+            <a:pPr marL="0" indent="0" algn="ctr">
               <a:buNone/>
             </a:pPr>
             <a:r>
@@ -5209,7 +5248,7 @@
           <a:bodyPr wrap="square" lIns="0" tIns="0" rIns="0" bIns="0" rtlCol="0" anchor="ctr"/>
           <a:lstStyle/>
           <a:p>
-            <a:pPr indent="0" marL="0">
+            <a:pPr marL="0" indent="0">
               <a:buNone/>
             </a:pPr>
             <a:r>
@@ -5248,7 +5287,7 @@
           <a:bodyPr wrap="square" lIns="0" tIns="0" rIns="0" bIns="0" rtlCol="0" anchor="t"/>
           <a:lstStyle/>
           <a:p>
-            <a:pPr indent="0" marL="0">
+            <a:pPr marL="0" indent="0">
               <a:lnSpc>
                 <a:spcPct val="110000"/>
               </a:lnSpc>
@@ -5293,13 +5332,20 @@
             <a:prstDash val="solid"/>
           </a:ln>
           <a:effectLst>
-            <a:outerShdw sx="100000" sy="100000" kx="0" ky="0" algn="bl" rotWithShape="0" blurRad="50800" dist="19050" dir="8100000">
+            <a:outerShdw blurRad="50800" dist="19050" dir="8100000" algn="bl" rotWithShape="0">
               <a:srgbClr val="2A3742">
                 <a:alpha val="8000"/>
               </a:srgbClr>
             </a:outerShdw>
           </a:effectLst>
         </p:spPr>
+        <p:txBody>
+          <a:bodyPr/>
+          <a:lstStyle/>
+          <a:p>
+            <a:endParaRPr lang="en-US"/>
+          </a:p>
+        </p:txBody>
       </p:sp>
       <p:sp>
         <p:nvSpPr>
@@ -5320,6 +5366,13 @@
           </a:solidFill>
           <a:ln/>
         </p:spPr>
+        <p:txBody>
+          <a:bodyPr/>
+          <a:lstStyle/>
+          <a:p>
+            <a:endParaRPr lang="en-US"/>
+          </a:p>
+        </p:txBody>
       </p:sp>
       <p:sp>
         <p:nvSpPr>
@@ -5340,6 +5393,13 @@
           </a:solidFill>
           <a:ln/>
         </p:spPr>
+        <p:txBody>
+          <a:bodyPr/>
+          <a:lstStyle/>
+          <a:p>
+            <a:endParaRPr lang="en-US"/>
+          </a:p>
+        </p:txBody>
       </p:sp>
       <p:sp>
         <p:nvSpPr>
@@ -5362,7 +5422,7 @@
           <a:bodyPr wrap="square" lIns="0" tIns="0" rIns="0" bIns="0" rtlCol="0" anchor="ctr"/>
           <a:lstStyle/>
           <a:p>
-            <a:pPr algn="ctr" indent="0" marL="0">
+            <a:pPr marL="0" indent="0" algn="ctr">
               <a:buNone/>
             </a:pPr>
             <a:r>
@@ -5401,7 +5461,7 @@
           <a:bodyPr wrap="square" lIns="0" tIns="0" rIns="0" bIns="0" rtlCol="0" anchor="ctr"/>
           <a:lstStyle/>
           <a:p>
-            <a:pPr indent="0" marL="0">
+            <a:pPr marL="0" indent="0">
               <a:buNone/>
             </a:pPr>
             <a:r>
@@ -5440,7 +5500,7 @@
           <a:bodyPr wrap="square" lIns="0" tIns="0" rIns="0" bIns="0" rtlCol="0" anchor="t"/>
           <a:lstStyle/>
           <a:p>
-            <a:pPr indent="0" marL="0">
+            <a:pPr marL="0" indent="0">
               <a:lnSpc>
                 <a:spcPct val="110000"/>
               </a:lnSpc>
@@ -5482,6 +5542,13 @@
           </a:solidFill>
           <a:ln/>
         </p:spPr>
+        <p:txBody>
+          <a:bodyPr/>
+          <a:lstStyle/>
+          <a:p>
+            <a:endParaRPr lang="en-US"/>
+          </a:p>
+        </p:txBody>
       </p:sp>
       <p:sp>
         <p:nvSpPr>
@@ -5491,7 +5558,7 @@
         </p:nvSpPr>
         <p:spPr>
           <a:xfrm>
-            <a:off x="896112" y="5413248"/>
+            <a:off x="896112" y="5361492"/>
             <a:ext cx="457200" cy="457200"/>
           </a:xfrm>
           <a:prstGeom prst="ellipse">
@@ -5502,24 +5569,31 @@
           </a:solidFill>
           <a:ln/>
         </p:spPr>
+        <p:txBody>
+          <a:bodyPr/>
+          <a:lstStyle/>
+          <a:p>
+            <a:endParaRPr lang="en-US"/>
+          </a:p>
+        </p:txBody>
       </p:sp>
       <p:pic>
         <p:nvPicPr>
-          <p:cNvPr id="32" name="Image 0" descr="preencoded.png">    </p:cNvPr>
+          <p:cNvPr id="32" name="Image 0" descr="preencoded.png"/>
           <p:cNvPicPr>
             <a:picLocks noChangeAspect="1"/>
           </p:cNvPicPr>
           <p:nvPr/>
         </p:nvPicPr>
         <p:blipFill>
-          <a:blip r:embed="rId1"/>
+          <a:blip r:embed="rId3"/>
           <a:stretch>
             <a:fillRect/>
           </a:stretch>
         </p:blipFill>
         <p:spPr>
           <a:xfrm>
-            <a:off x="996696" y="5513832"/>
+            <a:off x="996696" y="5470702"/>
             <a:ext cx="256032" cy="256032"/>
           </a:xfrm>
           <a:prstGeom prst="rect">
@@ -5548,7 +5622,7 @@
           <a:bodyPr wrap="square" lIns="0" tIns="0" rIns="0" bIns="0" rtlCol="0" anchor="ctr"/>
           <a:lstStyle/>
           <a:p>
-            <a:pPr indent="0" marL="0">
+            <a:pPr marL="0" indent="0">
               <a:buNone/>
             </a:pPr>
             <a:r>
@@ -5562,9 +5636,6 @@
               </a:rPr>
               <a:t>Inside QBO:  </a:t>
             </a:r>
-            <a:pPr indent="0" marL="0">
-              <a:buNone/>
-            </a:pPr>
             <a:r>
               <a:rPr lang="en-US" sz="1250" dirty="0">
                 <a:solidFill>
@@ -5601,11 +5672,11 @@
           <a:bodyPr wrap="square" lIns="0" tIns="0" rIns="0" bIns="0" rtlCol="0" anchor="ctr"/>
           <a:lstStyle/>
           <a:p>
-            <a:pPr indent="0" marL="0">
-              <a:buNone/>
-            </a:pPr>
-            <a:r>
-              <a:rPr lang="en-US" sz="800" spc="200" kern="0" dirty="0">
+            <a:pPr marL="0" indent="0">
+              <a:buNone/>
+            </a:pPr>
+            <a:r>
+              <a:rPr lang="en-US" sz="800" kern="0" spc="200" dirty="0">
                 <a:solidFill>
                   <a:srgbClr val="6B7785"/>
                 </a:solidFill>
@@ -5640,7 +5711,7 @@
           <a:bodyPr wrap="square" lIns="0" tIns="0" rIns="0" bIns="0" rtlCol="0" anchor="ctr"/>
           <a:lstStyle/>
           <a:p>
-            <a:pPr algn="r" indent="0" marL="0">
+            <a:pPr marL="0" indent="0" algn="r">
               <a:buNone/>
             </a:pPr>
             <a:r>
@@ -5674,6 +5745,7 @@
         <a:solidFill>
           <a:srgbClr val="F0F2F4"/>
         </a:solidFill>
+        <a:effectLst/>
       </p:bgPr>
     </p:bg>
     <p:spTree>
@@ -5709,6 +5781,13 @@
           </a:solidFill>
           <a:ln/>
         </p:spPr>
+        <p:txBody>
+          <a:bodyPr/>
+          <a:lstStyle/>
+          <a:p>
+            <a:endParaRPr lang="en-US"/>
+          </a:p>
+        </p:txBody>
       </p:sp>
       <p:sp>
         <p:nvSpPr>
@@ -5731,11 +5810,11 @@
           <a:bodyPr wrap="square" lIns="0" tIns="0" rIns="0" bIns="0" rtlCol="0" anchor="ctr"/>
           <a:lstStyle/>
           <a:p>
-            <a:pPr indent="0" marL="0">
-              <a:buNone/>
-            </a:pPr>
-            <a:r>
-              <a:rPr lang="en-US" sz="1100" b="1" spc="400" kern="0" dirty="0">
+            <a:pPr marL="0" indent="0">
+              <a:buNone/>
+            </a:pPr>
+            <a:r>
+              <a:rPr lang="en-US" sz="1100" b="1" kern="0" spc="400" dirty="0">
                 <a:solidFill>
                   <a:srgbClr val="E3A033"/>
                 </a:solidFill>
@@ -5770,7 +5849,7 @@
           <a:bodyPr wrap="square" lIns="0" tIns="0" rIns="0" bIns="0" rtlCol="0" anchor="ctr"/>
           <a:lstStyle/>
           <a:p>
-            <a:pPr indent="0" marL="0">
+            <a:pPr marL="0" indent="0">
               <a:buNone/>
             </a:pPr>
             <a:r>
@@ -5809,7 +5888,7 @@
           <a:bodyPr wrap="square" lIns="0" tIns="0" rIns="0" bIns="0" rtlCol="0" anchor="ctr"/>
           <a:lstStyle/>
           <a:p>
-            <a:pPr indent="0" marL="0">
+            <a:pPr marL="0" indent="0">
               <a:buNone/>
             </a:pPr>
             <a:r>
@@ -5851,13 +5930,20 @@
             <a:prstDash val="solid"/>
           </a:ln>
           <a:effectLst>
-            <a:outerShdw sx="100000" sy="100000" kx="0" ky="0" algn="bl" rotWithShape="0" blurRad="50800" dist="19050" dir="8100000">
+            <a:outerShdw blurRad="50800" dist="19050" dir="8100000" algn="bl" rotWithShape="0">
               <a:srgbClr val="2A3742">
                 <a:alpha val="8000"/>
               </a:srgbClr>
             </a:outerShdw>
           </a:effectLst>
         </p:spPr>
+        <p:txBody>
+          <a:bodyPr/>
+          <a:lstStyle/>
+          <a:p>
+            <a:endParaRPr lang="en-US"/>
+          </a:p>
+        </p:txBody>
       </p:sp>
       <p:sp>
         <p:nvSpPr>
@@ -5878,6 +5964,13 @@
           </a:solidFill>
           <a:ln/>
         </p:spPr>
+        <p:txBody>
+          <a:bodyPr/>
+          <a:lstStyle/>
+          <a:p>
+            <a:endParaRPr lang="en-US"/>
+          </a:p>
+        </p:txBody>
       </p:sp>
       <p:sp>
         <p:nvSpPr>
@@ -5898,17 +5991,24 @@
           </a:solidFill>
           <a:ln/>
         </p:spPr>
+        <p:txBody>
+          <a:bodyPr/>
+          <a:lstStyle/>
+          <a:p>
+            <a:endParaRPr lang="en-US"/>
+          </a:p>
+        </p:txBody>
       </p:sp>
       <p:pic>
         <p:nvPicPr>
-          <p:cNvPr id="9" name="Image 0" descr="preencoded.png">    </p:cNvPr>
+          <p:cNvPr id="9" name="Image 0" descr="preencoded.png"/>
           <p:cNvPicPr>
             <a:picLocks noChangeAspect="1"/>
           </p:cNvPicPr>
           <p:nvPr/>
         </p:nvPicPr>
         <p:blipFill>
-          <a:blip r:embed="rId1"/>
+          <a:blip r:embed="rId3"/>
           <a:stretch>
             <a:fillRect/>
           </a:stretch>
@@ -5944,7 +6044,7 @@
           <a:bodyPr wrap="square" lIns="0" tIns="0" rIns="0" bIns="0" rtlCol="0" anchor="ctr"/>
           <a:lstStyle/>
           <a:p>
-            <a:pPr indent="0" marL="0">
+            <a:pPr marL="0" indent="0">
               <a:buNone/>
             </a:pPr>
             <a:r>
@@ -5983,7 +6083,7 @@
           <a:bodyPr wrap="square" lIns="0" tIns="0" rIns="0" bIns="0" rtlCol="0" anchor="t"/>
           <a:lstStyle/>
           <a:p>
-            <a:pPr indent="0" marL="0">
+            <a:pPr marL="0" indent="0">
               <a:buNone/>
             </a:pPr>
             <a:r>
@@ -6023,6 +6123,13 @@
             <a:prstDash val="solid"/>
           </a:ln>
         </p:spPr>
+        <p:txBody>
+          <a:bodyPr/>
+          <a:lstStyle/>
+          <a:p>
+            <a:endParaRPr lang="en-US"/>
+          </a:p>
+        </p:txBody>
       </p:sp>
       <p:sp>
         <p:nvSpPr>
@@ -6045,11 +6152,11 @@
           <a:bodyPr wrap="square" lIns="0" tIns="0" rIns="0" bIns="0" rtlCol="0" anchor="ctr"/>
           <a:lstStyle/>
           <a:p>
-            <a:pPr indent="0" marL="0">
-              <a:buNone/>
-            </a:pPr>
-            <a:r>
-              <a:rPr lang="en-US" sz="950" b="1" spc="100" kern="0" dirty="0">
+            <a:pPr marL="0" indent="0">
+              <a:buNone/>
+            </a:pPr>
+            <a:r>
+              <a:rPr lang="en-US" sz="950" b="1" kern="0" spc="100" dirty="0">
                 <a:solidFill>
                   <a:srgbClr val="469B68"/>
                 </a:solidFill>
@@ -6084,7 +6191,7 @@
           <a:bodyPr wrap="square" lIns="0" tIns="0" rIns="0" bIns="0" rtlCol="0" anchor="t"/>
           <a:lstStyle/>
           <a:p>
-            <a:pPr indent="0" marL="0">
+            <a:pPr marL="0" indent="0">
               <a:lnSpc>
                 <a:spcPct val="108000"/>
               </a:lnSpc>
@@ -6129,13 +6236,20 @@
             <a:prstDash val="solid"/>
           </a:ln>
           <a:effectLst>
-            <a:outerShdw sx="100000" sy="100000" kx="0" ky="0" algn="bl" rotWithShape="0" blurRad="50800" dist="19050" dir="8100000">
+            <a:outerShdw blurRad="50800" dist="19050" dir="8100000" algn="bl" rotWithShape="0">
               <a:srgbClr val="2A3742">
                 <a:alpha val="8000"/>
               </a:srgbClr>
             </a:outerShdw>
           </a:effectLst>
         </p:spPr>
+        <p:txBody>
+          <a:bodyPr/>
+          <a:lstStyle/>
+          <a:p>
+            <a:endParaRPr lang="en-US"/>
+          </a:p>
+        </p:txBody>
       </p:sp>
       <p:sp>
         <p:nvSpPr>
@@ -6156,6 +6270,13 @@
           </a:solidFill>
           <a:ln/>
         </p:spPr>
+        <p:txBody>
+          <a:bodyPr/>
+          <a:lstStyle/>
+          <a:p>
+            <a:endParaRPr lang="en-US"/>
+          </a:p>
+        </p:txBody>
       </p:sp>
       <p:sp>
         <p:nvSpPr>
@@ -6176,24 +6297,31 @@
           </a:solidFill>
           <a:ln/>
         </p:spPr>
+        <p:txBody>
+          <a:bodyPr/>
+          <a:lstStyle/>
+          <a:p>
+            <a:endParaRPr lang="en-US"/>
+          </a:p>
+        </p:txBody>
       </p:sp>
       <p:pic>
         <p:nvPicPr>
-          <p:cNvPr id="18" name="Image 1" descr="preencoded.png">    </p:cNvPr>
+          <p:cNvPr id="18" name="Image 1" descr="preencoded.png"/>
           <p:cNvPicPr>
             <a:picLocks noChangeAspect="1"/>
           </p:cNvPicPr>
           <p:nvPr/>
         </p:nvPicPr>
         <p:blipFill>
-          <a:blip r:embed="rId2"/>
+          <a:blip r:embed="rId4"/>
           <a:stretch>
             <a:fillRect/>
           </a:stretch>
         </p:blipFill>
         <p:spPr>
           <a:xfrm>
-            <a:off x="1078992" y="3959352"/>
+            <a:off x="1078992" y="3942100"/>
             <a:ext cx="365760" cy="365760"/>
           </a:xfrm>
           <a:prstGeom prst="rect">
@@ -6222,7 +6350,7 @@
           <a:bodyPr wrap="square" lIns="0" tIns="0" rIns="0" bIns="0" rtlCol="0" anchor="ctr"/>
           <a:lstStyle/>
           <a:p>
-            <a:pPr indent="0" marL="0">
+            <a:pPr marL="0" indent="0">
               <a:buNone/>
             </a:pPr>
             <a:r>
@@ -6261,7 +6389,7 @@
           <a:bodyPr wrap="square" lIns="0" tIns="0" rIns="0" bIns="0" rtlCol="0" anchor="t"/>
           <a:lstStyle/>
           <a:p>
-            <a:pPr indent="0" marL="0">
+            <a:pPr marL="0" indent="0">
               <a:buNone/>
             </a:pPr>
             <a:r>
@@ -6301,6 +6429,13 @@
             <a:prstDash val="solid"/>
           </a:ln>
         </p:spPr>
+        <p:txBody>
+          <a:bodyPr/>
+          <a:lstStyle/>
+          <a:p>
+            <a:endParaRPr lang="en-US"/>
+          </a:p>
+        </p:txBody>
       </p:sp>
       <p:sp>
         <p:nvSpPr>
@@ -6323,11 +6458,11 @@
           <a:bodyPr wrap="square" lIns="0" tIns="0" rIns="0" bIns="0" rtlCol="0" anchor="ctr"/>
           <a:lstStyle/>
           <a:p>
-            <a:pPr indent="0" marL="0">
-              <a:buNone/>
-            </a:pPr>
-            <a:r>
-              <a:rPr lang="en-US" sz="950" b="1" spc="100" kern="0" dirty="0">
+            <a:pPr marL="0" indent="0">
+              <a:buNone/>
+            </a:pPr>
+            <a:r>
+              <a:rPr lang="en-US" sz="950" b="1" kern="0" spc="100" dirty="0">
                 <a:solidFill>
                   <a:srgbClr val="E3A033"/>
                 </a:solidFill>
@@ -6362,7 +6497,7 @@
           <a:bodyPr wrap="square" lIns="0" tIns="0" rIns="0" bIns="0" rtlCol="0" anchor="t"/>
           <a:lstStyle/>
           <a:p>
-            <a:pPr indent="0" marL="0">
+            <a:pPr marL="0" indent="0">
               <a:lnSpc>
                 <a:spcPct val="108000"/>
               </a:lnSpc>
@@ -6407,13 +6542,20 @@
             <a:prstDash val="solid"/>
           </a:ln>
           <a:effectLst>
-            <a:outerShdw sx="100000" sy="100000" kx="0" ky="0" algn="bl" rotWithShape="0" blurRad="50800" dist="19050" dir="8100000">
+            <a:outerShdw blurRad="50800" dist="19050" dir="8100000" algn="bl" rotWithShape="0">
               <a:srgbClr val="2A3742">
                 <a:alpha val="8000"/>
               </a:srgbClr>
             </a:outerShdw>
           </a:effectLst>
         </p:spPr>
+        <p:txBody>
+          <a:bodyPr/>
+          <a:lstStyle/>
+          <a:p>
+            <a:endParaRPr lang="en-US"/>
+          </a:p>
+        </p:txBody>
       </p:sp>
       <p:sp>
         <p:nvSpPr>
@@ -6434,6 +6576,13 @@
           </a:solidFill>
           <a:ln/>
         </p:spPr>
+        <p:txBody>
+          <a:bodyPr/>
+          <a:lstStyle/>
+          <a:p>
+            <a:endParaRPr lang="en-US"/>
+          </a:p>
+        </p:txBody>
       </p:sp>
       <p:sp>
         <p:nvSpPr>
@@ -6454,17 +6603,24 @@
           </a:solidFill>
           <a:ln/>
         </p:spPr>
+        <p:txBody>
+          <a:bodyPr/>
+          <a:lstStyle/>
+          <a:p>
+            <a:endParaRPr lang="en-US"/>
+          </a:p>
+        </p:txBody>
       </p:sp>
       <p:pic>
         <p:nvPicPr>
-          <p:cNvPr id="27" name="Image 2" descr="preencoded.png">    </p:cNvPr>
+          <p:cNvPr id="27" name="Image 2" descr="preencoded.png"/>
           <p:cNvPicPr>
             <a:picLocks noChangeAspect="1"/>
           </p:cNvPicPr>
           <p:nvPr/>
         </p:nvPicPr>
         <p:blipFill>
-          <a:blip r:embed="rId3"/>
+          <a:blip r:embed="rId5"/>
           <a:stretch>
             <a:fillRect/>
           </a:stretch>
@@ -6500,7 +6656,7 @@
           <a:bodyPr wrap="square" lIns="0" tIns="0" rIns="0" bIns="0" rtlCol="0" anchor="ctr"/>
           <a:lstStyle/>
           <a:p>
-            <a:pPr indent="0" marL="0">
+            <a:pPr marL="0" indent="0">
               <a:buNone/>
             </a:pPr>
             <a:r>
@@ -6539,7 +6695,7 @@
           <a:bodyPr wrap="square" lIns="0" tIns="0" rIns="0" bIns="0" rtlCol="0" anchor="t"/>
           <a:lstStyle/>
           <a:p>
-            <a:pPr indent="0" marL="0">
+            <a:pPr marL="0" indent="0">
               <a:buNone/>
             </a:pPr>
             <a:r>
@@ -6579,6 +6735,13 @@
             <a:prstDash val="solid"/>
           </a:ln>
         </p:spPr>
+        <p:txBody>
+          <a:bodyPr/>
+          <a:lstStyle/>
+          <a:p>
+            <a:endParaRPr lang="en-US"/>
+          </a:p>
+        </p:txBody>
       </p:sp>
       <p:sp>
         <p:nvSpPr>
@@ -6601,11 +6764,11 @@
           <a:bodyPr wrap="square" lIns="0" tIns="0" rIns="0" bIns="0" rtlCol="0" anchor="ctr"/>
           <a:lstStyle/>
           <a:p>
-            <a:pPr indent="0" marL="0">
-              <a:buNone/>
-            </a:pPr>
-            <a:r>
-              <a:rPr lang="en-US" sz="950" b="1" spc="100" kern="0" dirty="0">
+            <a:pPr marL="0" indent="0">
+              <a:buNone/>
+            </a:pPr>
+            <a:r>
+              <a:rPr lang="en-US" sz="950" b="1" kern="0" spc="100" dirty="0">
                 <a:solidFill>
                   <a:srgbClr val="3A6A9A"/>
                 </a:solidFill>
@@ -6640,7 +6803,7 @@
           <a:bodyPr wrap="square" lIns="0" tIns="0" rIns="0" bIns="0" rtlCol="0" anchor="t"/>
           <a:lstStyle/>
           <a:p>
-            <a:pPr indent="0" marL="0">
+            <a:pPr marL="0" indent="0">
               <a:lnSpc>
                 <a:spcPct val="108000"/>
               </a:lnSpc>
@@ -6682,11 +6845,11 @@
           <a:bodyPr wrap="square" lIns="0" tIns="0" rIns="0" bIns="0" rtlCol="0" anchor="ctr"/>
           <a:lstStyle/>
           <a:p>
-            <a:pPr indent="0" marL="0">
-              <a:buNone/>
-            </a:pPr>
-            <a:r>
-              <a:rPr lang="en-US" sz="800" spc="200" kern="0" dirty="0">
+            <a:pPr marL="0" indent="0">
+              <a:buNone/>
+            </a:pPr>
+            <a:r>
+              <a:rPr lang="en-US" sz="800" kern="0" spc="200" dirty="0">
                 <a:solidFill>
                   <a:srgbClr val="6B7785"/>
                 </a:solidFill>
@@ -6721,7 +6884,7 @@
           <a:bodyPr wrap="square" lIns="0" tIns="0" rIns="0" bIns="0" rtlCol="0" anchor="ctr"/>
           <a:lstStyle/>
           <a:p>
-            <a:pPr algn="r" indent="0" marL="0">
+            <a:pPr marL="0" indent="0" algn="r">
               <a:buNone/>
             </a:pPr>
             <a:r>
@@ -6755,6 +6918,7 @@
         <a:solidFill>
           <a:srgbClr val="F0F2F4"/>
         </a:solidFill>
+        <a:effectLst/>
       </p:bgPr>
     </p:bg>
     <p:spTree>
@@ -6790,6 +6954,13 @@
           </a:solidFill>
           <a:ln/>
         </p:spPr>
+        <p:txBody>
+          <a:bodyPr/>
+          <a:lstStyle/>
+          <a:p>
+            <a:endParaRPr lang="en-US"/>
+          </a:p>
+        </p:txBody>
       </p:sp>
       <p:sp>
         <p:nvSpPr>
@@ -6812,11 +6983,11 @@
           <a:bodyPr wrap="square" lIns="0" tIns="0" rIns="0" bIns="0" rtlCol="0" anchor="ctr"/>
           <a:lstStyle/>
           <a:p>
-            <a:pPr indent="0" marL="0">
-              <a:buNone/>
-            </a:pPr>
-            <a:r>
-              <a:rPr lang="en-US" sz="1100" b="1" spc="400" kern="0" dirty="0">
+            <a:pPr marL="0" indent="0">
+              <a:buNone/>
+            </a:pPr>
+            <a:r>
+              <a:rPr lang="en-US" sz="1100" b="1" kern="0" spc="400" dirty="0">
                 <a:solidFill>
                   <a:srgbClr val="E3A033"/>
                 </a:solidFill>
@@ -6851,7 +7022,7 @@
           <a:bodyPr wrap="square" lIns="0" tIns="0" rIns="0" bIns="0" rtlCol="0" anchor="ctr"/>
           <a:lstStyle/>
           <a:p>
-            <a:pPr indent="0" marL="0">
+            <a:pPr marL="0" indent="0">
               <a:buNone/>
             </a:pPr>
             <a:r>
@@ -6890,7 +7061,7 @@
           <a:bodyPr wrap="square" lIns="0" tIns="0" rIns="0" bIns="0" rtlCol="0" anchor="ctr"/>
           <a:lstStyle/>
           <a:p>
-            <a:pPr indent="0" marL="0">
+            <a:pPr marL="0" indent="0">
               <a:buNone/>
             </a:pPr>
             <a:r>
@@ -6932,13 +7103,20 @@
             <a:prstDash val="solid"/>
           </a:ln>
           <a:effectLst>
-            <a:outerShdw sx="100000" sy="100000" kx="0" ky="0" algn="bl" rotWithShape="0" blurRad="50800" dist="19050" dir="8100000">
+            <a:outerShdw blurRad="50800" dist="19050" dir="8100000" algn="bl" rotWithShape="0">
               <a:srgbClr val="2A3742">
                 <a:alpha val="8000"/>
               </a:srgbClr>
             </a:outerShdw>
           </a:effectLst>
         </p:spPr>
+        <p:txBody>
+          <a:bodyPr/>
+          <a:lstStyle/>
+          <a:p>
+            <a:endParaRPr lang="en-US"/>
+          </a:p>
+        </p:txBody>
       </p:sp>
       <p:sp>
         <p:nvSpPr>
@@ -6959,6 +7137,13 @@
           </a:solidFill>
           <a:ln/>
         </p:spPr>
+        <p:txBody>
+          <a:bodyPr/>
+          <a:lstStyle/>
+          <a:p>
+            <a:endParaRPr lang="en-US"/>
+          </a:p>
+        </p:txBody>
       </p:sp>
       <p:sp>
         <p:nvSpPr>
@@ -6979,218 +7164,17 @@
           </a:solidFill>
           <a:ln/>
         </p:spPr>
+        <p:txBody>
+          <a:bodyPr/>
+          <a:lstStyle/>
+          <a:p>
+            <a:endParaRPr lang="en-US"/>
+          </a:p>
+        </p:txBody>
       </p:sp>
       <p:pic>
         <p:nvPicPr>
-          <p:cNvPr id="9" name="Image 0" descr="preencoded.png">    </p:cNvPr>
-          <p:cNvPicPr>
-            <a:picLocks noChangeAspect="1"/>
-          </p:cNvPicPr>
-          <p:nvPr/>
-        </p:nvPicPr>
-        <p:blipFill>
-          <a:blip r:embed="rId1"/>
-          <a:stretch>
-            <a:fillRect/>
-          </a:stretch>
-        </p:blipFill>
-        <p:spPr>
-          <a:xfrm>
-            <a:off x="1078992" y="2404872"/>
-            <a:ext cx="384048" cy="384048"/>
-          </a:xfrm>
-          <a:prstGeom prst="rect">
-            <a:avLst/>
-          </a:prstGeom>
-        </p:spPr>
-      </p:pic>
-      <p:sp>
-        <p:nvSpPr>
-          <p:cNvPr id="10" name="Text 7"/>
-          <p:cNvSpPr/>
-          <p:nvPr/>
-        </p:nvSpPr>
-        <p:spPr>
-          <a:xfrm>
-            <a:off x="1783080" y="2286000"/>
-            <a:ext cx="4023360" cy="256032"/>
-          </a:xfrm>
-          <a:prstGeom prst="rect">
-            <a:avLst/>
-          </a:prstGeom>
-          <a:noFill/>
-          <a:ln/>
-        </p:spPr>
-        <p:txBody>
-          <a:bodyPr wrap="square" lIns="0" tIns="0" rIns="0" bIns="0" rtlCol="0" anchor="ctr"/>
-          <a:lstStyle/>
-          <a:p>
-            <a:pPr indent="0" marL="0">
-              <a:buNone/>
-            </a:pPr>
-            <a:r>
-              <a:rPr lang="en-US" sz="1000" b="1" spc="200" kern="0" dirty="0">
-                <a:solidFill>
-                  <a:srgbClr val="6B7785"/>
-                </a:solidFill>
-                <a:latin typeface="IBM Plex Mono" pitchFamily="34" charset="0"/>
-                <a:ea typeface="IBM Plex Mono" pitchFamily="34" charset="-122"/>
-                <a:cs typeface="IBM Plex Mono" pitchFamily="34" charset="-120"/>
-              </a:rPr>
-              <a:t>WRINKLE 1</a:t>
-            </a:r>
-            <a:endParaRPr lang="en-US" sz="1000" dirty="0"/>
-          </a:p>
-        </p:txBody>
-      </p:sp>
-      <p:sp>
-        <p:nvSpPr>
-          <p:cNvPr id="11" name="Text 8"/>
-          <p:cNvSpPr/>
-          <p:nvPr/>
-        </p:nvSpPr>
-        <p:spPr>
-          <a:xfrm>
-            <a:off x="1783080" y="2542032"/>
-            <a:ext cx="4023360" cy="365760"/>
-          </a:xfrm>
-          <a:prstGeom prst="rect">
-            <a:avLst/>
-          </a:prstGeom>
-          <a:noFill/>
-          <a:ln/>
-        </p:spPr>
-        <p:txBody>
-          <a:bodyPr wrap="square" lIns="0" tIns="0" rIns="0" bIns="0" rtlCol="0" anchor="ctr"/>
-          <a:lstStyle/>
-          <a:p>
-            <a:pPr indent="0" marL="0">
-              <a:buNone/>
-            </a:pPr>
-            <a:r>
-              <a:rPr lang="en-US" sz="2200" b="1" dirty="0">
-                <a:solidFill>
-                  <a:srgbClr val="2A3742"/>
-                </a:solidFill>
-                <a:latin typeface="Fraunces 72pt" pitchFamily="34" charset="0"/>
-                <a:ea typeface="Fraunces 72pt" pitchFamily="34" charset="-122"/>
-                <a:cs typeface="Fraunces 72pt" pitchFamily="34" charset="-120"/>
-              </a:rPr>
-              <a:t>Multi-clinic groups</a:t>
-            </a:r>
-            <a:endParaRPr lang="en-US" sz="2200" dirty="0"/>
-          </a:p>
-        </p:txBody>
-      </p:sp>
-      <p:sp>
-        <p:nvSpPr>
-          <p:cNvPr id="12" name="Shape 9"/>
-          <p:cNvSpPr/>
-          <p:nvPr/>
-        </p:nvSpPr>
-        <p:spPr>
-          <a:xfrm>
-            <a:off x="914400" y="3154680"/>
-            <a:ext cx="457200" cy="457200"/>
-          </a:xfrm>
-          <a:prstGeom prst="ellipse">
-            <a:avLst/>
-          </a:prstGeom>
-          <a:solidFill>
-            <a:srgbClr val="F0F2F4"/>
-          </a:solidFill>
-          <a:ln/>
-        </p:spPr>
-      </p:sp>
-      <p:pic>
-        <p:nvPicPr>
-          <p:cNvPr id="13" name="Image 1" descr="preencoded.png">    </p:cNvPr>
-          <p:cNvPicPr>
-            <a:picLocks noChangeAspect="1"/>
-          </p:cNvPicPr>
-          <p:nvPr/>
-        </p:nvPicPr>
-        <p:blipFill>
-          <a:blip r:embed="rId2"/>
-          <a:stretch>
-            <a:fillRect/>
-          </a:stretch>
-        </p:blipFill>
-        <p:spPr>
-          <a:xfrm>
-            <a:off x="1014984" y="3255264"/>
-            <a:ext cx="256032" cy="256032"/>
-          </a:xfrm>
-          <a:prstGeom prst="rect">
-            <a:avLst/>
-          </a:prstGeom>
-        </p:spPr>
-      </p:pic>
-      <p:sp>
-        <p:nvSpPr>
-          <p:cNvPr id="14" name="Text 10"/>
-          <p:cNvSpPr/>
-          <p:nvPr/>
-        </p:nvSpPr>
-        <p:spPr>
-          <a:xfrm>
-            <a:off x="1508760" y="3081528"/>
-            <a:ext cx="4297680" cy="777240"/>
-          </a:xfrm>
-          <a:prstGeom prst="rect">
-            <a:avLst/>
-          </a:prstGeom>
-          <a:noFill/>
-          <a:ln/>
-        </p:spPr>
-        <p:txBody>
-          <a:bodyPr wrap="square" lIns="0" tIns="0" rIns="0" bIns="0" rtlCol="0" anchor="ctr"/>
-          <a:lstStyle/>
-          <a:p>
-            <a:pPr indent="0" marL="0">
-              <a:lnSpc>
-                <a:spcPct val="108000"/>
-              </a:lnSpc>
-              <a:buNone/>
-            </a:pPr>
-            <a:r>
-              <a:rPr lang="en-US" sz="1350" dirty="0">
-                <a:solidFill>
-                  <a:srgbClr val="2A3742"/>
-                </a:solidFill>
-                <a:latin typeface="Hanken Grotesk" pitchFamily="34" charset="0"/>
-                <a:ea typeface="Hanken Grotesk" pitchFamily="34" charset="-122"/>
-                <a:cs typeface="Hanken Grotesk" pitchFamily="34" charset="-120"/>
-              </a:rPr>
-              <a:t>Some contracts cover several locations and reconcile as one pool.</a:t>
-            </a:r>
-            <a:endParaRPr lang="en-US" sz="1350" dirty="0"/>
-          </a:p>
-        </p:txBody>
-      </p:sp>
-      <p:sp>
-        <p:nvSpPr>
-          <p:cNvPr id="15" name="Shape 11"/>
-          <p:cNvSpPr/>
-          <p:nvPr/>
-        </p:nvSpPr>
-        <p:spPr>
-          <a:xfrm>
-            <a:off x="914400" y="3995928"/>
-            <a:ext cx="457200" cy="457200"/>
-          </a:xfrm>
-          <a:prstGeom prst="ellipse">
-            <a:avLst/>
-          </a:prstGeom>
-          <a:solidFill>
-            <a:srgbClr val="F0F2F4"/>
-          </a:solidFill>
-          <a:ln/>
-        </p:spPr>
-      </p:sp>
-      <p:pic>
-        <p:nvPicPr>
-          <p:cNvPr id="16" name="Image 2" descr="preencoded.png">    </p:cNvPr>
+          <p:cNvPr id="9" name="Image 0" descr="preencoded.png"/>
           <p:cNvPicPr>
             <a:picLocks noChangeAspect="1"/>
           </p:cNvPicPr>
@@ -7204,8 +7188,8 @@
         </p:blipFill>
         <p:spPr>
           <a:xfrm>
-            <a:off x="1014984" y="4096512"/>
-            <a:ext cx="256032" cy="256032"/>
+            <a:off x="1078992" y="2404872"/>
+            <a:ext cx="384048" cy="384048"/>
           </a:xfrm>
           <a:prstGeom prst="rect">
             <a:avLst/>
@@ -7214,14 +7198,14 @@
       </p:pic>
       <p:sp>
         <p:nvSpPr>
-          <p:cNvPr id="17" name="Text 12"/>
-          <p:cNvSpPr/>
-          <p:nvPr/>
-        </p:nvSpPr>
-        <p:spPr>
-          <a:xfrm>
-            <a:off x="1508760" y="3922776"/>
-            <a:ext cx="4297680" cy="777240"/>
+          <p:cNvPr id="10" name="Text 7"/>
+          <p:cNvSpPr/>
+          <p:nvPr/>
+        </p:nvSpPr>
+        <p:spPr>
+          <a:xfrm>
+            <a:off x="1783080" y="2286000"/>
+            <a:ext cx="4023360" cy="256032"/>
           </a:xfrm>
           <a:prstGeom prst="rect">
             <a:avLst/>
@@ -7233,36 +7217,72 @@
           <a:bodyPr wrap="square" lIns="0" tIns="0" rIns="0" bIns="0" rtlCol="0" anchor="ctr"/>
           <a:lstStyle/>
           <a:p>
-            <a:pPr indent="0" marL="0">
-              <a:lnSpc>
-                <a:spcPct val="108000"/>
-              </a:lnSpc>
-              <a:buNone/>
-            </a:pPr>
-            <a:r>
-              <a:rPr lang="en-US" sz="1350" dirty="0">
+            <a:pPr marL="0" indent="0">
+              <a:buNone/>
+            </a:pPr>
+            <a:r>
+              <a:rPr lang="en-US" sz="1000" b="1" kern="0" spc="200" dirty="0">
+                <a:solidFill>
+                  <a:srgbClr val="6B7785"/>
+                </a:solidFill>
+                <a:latin typeface="IBM Plex Mono" pitchFamily="34" charset="0"/>
+                <a:ea typeface="IBM Plex Mono" pitchFamily="34" charset="-122"/>
+                <a:cs typeface="IBM Plex Mono" pitchFamily="34" charset="-120"/>
+              </a:rPr>
+              <a:t>WRINKLE 1</a:t>
+            </a:r>
+            <a:endParaRPr lang="en-US" sz="1000" dirty="0"/>
+          </a:p>
+        </p:txBody>
+      </p:sp>
+      <p:sp>
+        <p:nvSpPr>
+          <p:cNvPr id="11" name="Text 8"/>
+          <p:cNvSpPr/>
+          <p:nvPr/>
+        </p:nvSpPr>
+        <p:spPr>
+          <a:xfrm>
+            <a:off x="1783080" y="2542032"/>
+            <a:ext cx="4023360" cy="365760"/>
+          </a:xfrm>
+          <a:prstGeom prst="rect">
+            <a:avLst/>
+          </a:prstGeom>
+          <a:noFill/>
+          <a:ln/>
+        </p:spPr>
+        <p:txBody>
+          <a:bodyPr wrap="square" lIns="0" tIns="0" rIns="0" bIns="0" rtlCol="0" anchor="ctr"/>
+          <a:lstStyle/>
+          <a:p>
+            <a:pPr marL="0" indent="0">
+              <a:buNone/>
+            </a:pPr>
+            <a:r>
+              <a:rPr lang="en-US" sz="2200" b="1" dirty="0">
                 <a:solidFill>
                   <a:srgbClr val="2A3742"/>
                 </a:solidFill>
-                <a:latin typeface="Hanken Grotesk" pitchFamily="34" charset="0"/>
-                <a:ea typeface="Hanken Grotesk" pitchFamily="34" charset="-122"/>
-                <a:cs typeface="Hanken Grotesk" pitchFamily="34" charset="-120"/>
-              </a:rPr>
-              <a:t>Funds move between locations to balance the group (e.g. ~$978 from Condado to Gardenville).</a:t>
-            </a:r>
-            <a:endParaRPr lang="en-US" sz="1350" dirty="0"/>
-          </a:p>
-        </p:txBody>
-      </p:sp>
-      <p:sp>
-        <p:nvSpPr>
-          <p:cNvPr id="18" name="Shape 13"/>
-          <p:cNvSpPr/>
-          <p:nvPr/>
-        </p:nvSpPr>
-        <p:spPr>
-          <a:xfrm>
-            <a:off x="914400" y="4837176"/>
+                <a:latin typeface="Fraunces 72pt" pitchFamily="34" charset="0"/>
+                <a:ea typeface="Fraunces 72pt" pitchFamily="34" charset="-122"/>
+                <a:cs typeface="Fraunces 72pt" pitchFamily="34" charset="-120"/>
+              </a:rPr>
+              <a:t>Multi-clinic groups</a:t>
+            </a:r>
+            <a:endParaRPr lang="en-US" sz="2200" dirty="0"/>
+          </a:p>
+        </p:txBody>
+      </p:sp>
+      <p:sp>
+        <p:nvSpPr>
+          <p:cNvPr id="12" name="Shape 9"/>
+          <p:cNvSpPr/>
+          <p:nvPr/>
+        </p:nvSpPr>
+        <p:spPr>
+          <a:xfrm>
+            <a:off x="914400" y="3154680"/>
             <a:ext cx="457200" cy="457200"/>
           </a:xfrm>
           <a:prstGeom prst="ellipse">
@@ -7273,10 +7293,17 @@
           </a:solidFill>
           <a:ln/>
         </p:spPr>
+        <p:txBody>
+          <a:bodyPr/>
+          <a:lstStyle/>
+          <a:p>
+            <a:endParaRPr lang="en-US"/>
+          </a:p>
+        </p:txBody>
       </p:sp>
       <p:pic>
         <p:nvPicPr>
-          <p:cNvPr id="19" name="Image 3" descr="preencoded.png">    </p:cNvPr>
+          <p:cNvPr id="13" name="Image 1" descr="preencoded.png"/>
           <p:cNvPicPr>
             <a:picLocks noChangeAspect="1"/>
           </p:cNvPicPr>
@@ -7290,6 +7317,192 @@
         </p:blipFill>
         <p:spPr>
           <a:xfrm>
+            <a:off x="1014984" y="3255264"/>
+            <a:ext cx="256032" cy="256032"/>
+          </a:xfrm>
+          <a:prstGeom prst="rect">
+            <a:avLst/>
+          </a:prstGeom>
+        </p:spPr>
+      </p:pic>
+      <p:sp>
+        <p:nvSpPr>
+          <p:cNvPr id="14" name="Text 10"/>
+          <p:cNvSpPr/>
+          <p:nvPr/>
+        </p:nvSpPr>
+        <p:spPr>
+          <a:xfrm>
+            <a:off x="1508760" y="3081528"/>
+            <a:ext cx="4297680" cy="777240"/>
+          </a:xfrm>
+          <a:prstGeom prst="rect">
+            <a:avLst/>
+          </a:prstGeom>
+          <a:noFill/>
+          <a:ln/>
+        </p:spPr>
+        <p:txBody>
+          <a:bodyPr wrap="square" lIns="0" tIns="0" rIns="0" bIns="0" rtlCol="0" anchor="ctr"/>
+          <a:lstStyle/>
+          <a:p>
+            <a:pPr marL="0" indent="0">
+              <a:lnSpc>
+                <a:spcPct val="108000"/>
+              </a:lnSpc>
+              <a:buNone/>
+            </a:pPr>
+            <a:r>
+              <a:rPr lang="en-US" sz="1350" dirty="0">
+                <a:solidFill>
+                  <a:srgbClr val="2A3742"/>
+                </a:solidFill>
+                <a:latin typeface="Hanken Grotesk" pitchFamily="34" charset="0"/>
+                <a:ea typeface="Hanken Grotesk" pitchFamily="34" charset="-122"/>
+                <a:cs typeface="Hanken Grotesk" pitchFamily="34" charset="-120"/>
+              </a:rPr>
+              <a:t>Some contracts cover several locations and reconcile as one pool.</a:t>
+            </a:r>
+            <a:endParaRPr lang="en-US" sz="1350" dirty="0"/>
+          </a:p>
+        </p:txBody>
+      </p:sp>
+      <p:sp>
+        <p:nvSpPr>
+          <p:cNvPr id="15" name="Shape 11"/>
+          <p:cNvSpPr/>
+          <p:nvPr/>
+        </p:nvSpPr>
+        <p:spPr>
+          <a:xfrm>
+            <a:off x="914400" y="3995928"/>
+            <a:ext cx="457200" cy="457200"/>
+          </a:xfrm>
+          <a:prstGeom prst="ellipse">
+            <a:avLst/>
+          </a:prstGeom>
+          <a:solidFill>
+            <a:srgbClr val="F0F2F4"/>
+          </a:solidFill>
+          <a:ln/>
+        </p:spPr>
+        <p:txBody>
+          <a:bodyPr/>
+          <a:lstStyle/>
+          <a:p>
+            <a:endParaRPr lang="en-US"/>
+          </a:p>
+        </p:txBody>
+      </p:sp>
+      <p:pic>
+        <p:nvPicPr>
+          <p:cNvPr id="16" name="Image 2" descr="preencoded.png"/>
+          <p:cNvPicPr>
+            <a:picLocks noChangeAspect="1"/>
+          </p:cNvPicPr>
+          <p:nvPr/>
+        </p:nvPicPr>
+        <p:blipFill>
+          <a:blip r:embed="rId5"/>
+          <a:stretch>
+            <a:fillRect/>
+          </a:stretch>
+        </p:blipFill>
+        <p:spPr>
+          <a:xfrm>
+            <a:off x="1014984" y="4096512"/>
+            <a:ext cx="256032" cy="256032"/>
+          </a:xfrm>
+          <a:prstGeom prst="rect">
+            <a:avLst/>
+          </a:prstGeom>
+        </p:spPr>
+      </p:pic>
+      <p:sp>
+        <p:nvSpPr>
+          <p:cNvPr id="17" name="Text 12"/>
+          <p:cNvSpPr/>
+          <p:nvPr/>
+        </p:nvSpPr>
+        <p:spPr>
+          <a:xfrm>
+            <a:off x="1508760" y="3922776"/>
+            <a:ext cx="4297680" cy="777240"/>
+          </a:xfrm>
+          <a:prstGeom prst="rect">
+            <a:avLst/>
+          </a:prstGeom>
+          <a:noFill/>
+          <a:ln/>
+        </p:spPr>
+        <p:txBody>
+          <a:bodyPr wrap="square" lIns="0" tIns="0" rIns="0" bIns="0" rtlCol="0" anchor="ctr"/>
+          <a:lstStyle/>
+          <a:p>
+            <a:pPr marL="0" indent="0">
+              <a:lnSpc>
+                <a:spcPct val="108000"/>
+              </a:lnSpc>
+              <a:buNone/>
+            </a:pPr>
+            <a:r>
+              <a:rPr lang="en-US" sz="1350" dirty="0">
+                <a:solidFill>
+                  <a:srgbClr val="2A3742"/>
+                </a:solidFill>
+                <a:latin typeface="Hanken Grotesk" pitchFamily="34" charset="0"/>
+                <a:ea typeface="Hanken Grotesk" pitchFamily="34" charset="-122"/>
+                <a:cs typeface="Hanken Grotesk" pitchFamily="34" charset="-120"/>
+              </a:rPr>
+              <a:t>Funds move between locations to balance the group (e.g. ~$978 from Condado to Gardenville).</a:t>
+            </a:r>
+            <a:endParaRPr lang="en-US" sz="1350" dirty="0"/>
+          </a:p>
+        </p:txBody>
+      </p:sp>
+      <p:sp>
+        <p:nvSpPr>
+          <p:cNvPr id="18" name="Shape 13"/>
+          <p:cNvSpPr/>
+          <p:nvPr/>
+        </p:nvSpPr>
+        <p:spPr>
+          <a:xfrm>
+            <a:off x="914400" y="4837176"/>
+            <a:ext cx="457200" cy="457200"/>
+          </a:xfrm>
+          <a:prstGeom prst="ellipse">
+            <a:avLst/>
+          </a:prstGeom>
+          <a:solidFill>
+            <a:srgbClr val="F0F2F4"/>
+          </a:solidFill>
+          <a:ln/>
+        </p:spPr>
+        <p:txBody>
+          <a:bodyPr/>
+          <a:lstStyle/>
+          <a:p>
+            <a:endParaRPr lang="en-US"/>
+          </a:p>
+        </p:txBody>
+      </p:sp>
+      <p:pic>
+        <p:nvPicPr>
+          <p:cNvPr id="19" name="Image 3" descr="preencoded.png"/>
+          <p:cNvPicPr>
+            <a:picLocks noChangeAspect="1"/>
+          </p:cNvPicPr>
+          <p:nvPr/>
+        </p:nvPicPr>
+        <p:blipFill>
+          <a:blip r:embed="rId6"/>
+          <a:stretch>
+            <a:fillRect/>
+          </a:stretch>
+        </p:blipFill>
+        <p:spPr>
+          <a:xfrm>
             <a:off x="1014984" y="4937760"/>
             <a:ext cx="256032" cy="256032"/>
           </a:xfrm>
@@ -7319,7 +7532,7 @@
           <a:bodyPr wrap="square" lIns="0" tIns="0" rIns="0" bIns="0" rtlCol="0" anchor="ctr"/>
           <a:lstStyle/>
           <a:p>
-            <a:pPr indent="0" marL="0">
+            <a:pPr marL="0" indent="0">
               <a:lnSpc>
                 <a:spcPct val="108000"/>
               </a:lnSpc>
@@ -7364,13 +7577,20 @@
             <a:prstDash val="solid"/>
           </a:ln>
           <a:effectLst>
-            <a:outerShdw sx="100000" sy="100000" kx="0" ky="0" algn="bl" rotWithShape="0" blurRad="50800" dist="19050" dir="8100000">
+            <a:outerShdw blurRad="50800" dist="19050" dir="8100000" algn="bl" rotWithShape="0">
               <a:srgbClr val="2A3742">
                 <a:alpha val="8000"/>
               </a:srgbClr>
             </a:outerShdw>
           </a:effectLst>
         </p:spPr>
+        <p:txBody>
+          <a:bodyPr/>
+          <a:lstStyle/>
+          <a:p>
+            <a:endParaRPr lang="en-US"/>
+          </a:p>
+        </p:txBody>
       </p:sp>
       <p:sp>
         <p:nvSpPr>
@@ -7391,6 +7611,13 @@
           </a:solidFill>
           <a:ln/>
         </p:spPr>
+        <p:txBody>
+          <a:bodyPr/>
+          <a:lstStyle/>
+          <a:p>
+            <a:endParaRPr lang="en-US"/>
+          </a:p>
+        </p:txBody>
       </p:sp>
       <p:sp>
         <p:nvSpPr>
@@ -7411,17 +7638,24 @@
           </a:solidFill>
           <a:ln/>
         </p:spPr>
+        <p:txBody>
+          <a:bodyPr/>
+          <a:lstStyle/>
+          <a:p>
+            <a:endParaRPr lang="en-US"/>
+          </a:p>
+        </p:txBody>
       </p:sp>
       <p:pic>
         <p:nvPicPr>
-          <p:cNvPr id="24" name="Image 4" descr="preencoded.png">    </p:cNvPr>
+          <p:cNvPr id="24" name="Image 4" descr="preencoded.png"/>
           <p:cNvPicPr>
             <a:picLocks noChangeAspect="1"/>
           </p:cNvPicPr>
           <p:nvPr/>
         </p:nvPicPr>
         <p:blipFill>
-          <a:blip r:embed="rId5"/>
+          <a:blip r:embed="rId7"/>
           <a:stretch>
             <a:fillRect/>
           </a:stretch>
@@ -7457,11 +7691,11 @@
           <a:bodyPr wrap="square" lIns="0" tIns="0" rIns="0" bIns="0" rtlCol="0" anchor="ctr"/>
           <a:lstStyle/>
           <a:p>
-            <a:pPr indent="0" marL="0">
-              <a:buNone/>
-            </a:pPr>
-            <a:r>
-              <a:rPr lang="en-US" sz="1000" b="1" spc="200" kern="0" dirty="0">
+            <a:pPr marL="0" indent="0">
+              <a:buNone/>
+            </a:pPr>
+            <a:r>
+              <a:rPr lang="en-US" sz="1000" b="1" kern="0" spc="200" dirty="0">
                 <a:solidFill>
                   <a:srgbClr val="6B7785"/>
                 </a:solidFill>
@@ -7496,7 +7730,7 @@
           <a:bodyPr wrap="square" lIns="0" tIns="0" rIns="0" bIns="0" rtlCol="0" anchor="ctr"/>
           <a:lstStyle/>
           <a:p>
-            <a:pPr indent="0" marL="0">
+            <a:pPr marL="0" indent="0">
               <a:buNone/>
             </a:pPr>
             <a:r>
@@ -7535,7 +7769,7 @@
           <a:bodyPr wrap="square" lIns="0" tIns="0" rIns="0" bIns="0" rtlCol="0" anchor="t"/>
           <a:lstStyle/>
           <a:p>
-            <a:pPr indent="0" marL="0">
+            <a:pPr marL="0" indent="0">
               <a:lnSpc>
                 <a:spcPct val="110000"/>
               </a:lnSpc>
@@ -7577,11 +7811,11 @@
           <a:bodyPr wrap="square" lIns="0" tIns="0" rIns="0" bIns="0" rtlCol="0" anchor="ctr"/>
           <a:lstStyle/>
           <a:p>
-            <a:pPr indent="0" marL="0">
-              <a:buNone/>
-            </a:pPr>
-            <a:r>
-              <a:rPr lang="en-US" sz="750" b="1" spc="100" kern="0" dirty="0">
+            <a:pPr marL="0" indent="0">
+              <a:buNone/>
+            </a:pPr>
+            <a:r>
+              <a:rPr lang="en-US" sz="750" b="1" kern="0" spc="100" dirty="0">
                 <a:solidFill>
                   <a:srgbClr val="6B7785"/>
                 </a:solidFill>
@@ -7616,7 +7850,7 @@
           <a:bodyPr wrap="square" lIns="0" tIns="0" rIns="0" bIns="0" rtlCol="0" anchor="ctr"/>
           <a:lstStyle/>
           <a:p>
-            <a:pPr indent="0" marL="0">
+            <a:pPr marL="0" indent="0">
               <a:buNone/>
             </a:pPr>
             <a:r>
@@ -7658,6 +7892,13 @@
             <a:prstDash val="solid"/>
           </a:ln>
         </p:spPr>
+        <p:txBody>
+          <a:bodyPr/>
+          <a:lstStyle/>
+          <a:p>
+            <a:endParaRPr lang="en-US"/>
+          </a:p>
+        </p:txBody>
       </p:sp>
       <p:sp>
         <p:nvSpPr>
@@ -7680,7 +7921,7 @@
           <a:bodyPr wrap="square" lIns="0" tIns="0" rIns="0" bIns="0" rtlCol="0" anchor="ctr"/>
           <a:lstStyle/>
           <a:p>
-            <a:pPr algn="ctr" indent="0" marL="0">
+            <a:pPr marL="0" indent="0" algn="ctr">
               <a:buNone/>
             </a:pPr>
             <a:r>
@@ -7722,6 +7963,13 @@
             <a:prstDash val="solid"/>
           </a:ln>
         </p:spPr>
+        <p:txBody>
+          <a:bodyPr/>
+          <a:lstStyle/>
+          <a:p>
+            <a:endParaRPr lang="en-US"/>
+          </a:p>
+        </p:txBody>
       </p:sp>
       <p:sp>
         <p:nvSpPr>
@@ -7744,7 +7992,7 @@
           <a:bodyPr wrap="square" lIns="0" tIns="0" rIns="0" bIns="0" rtlCol="0" anchor="ctr"/>
           <a:lstStyle/>
           <a:p>
-            <a:pPr algn="ctr" indent="0" marL="0">
+            <a:pPr marL="0" indent="0" algn="ctr">
               <a:buNone/>
             </a:pPr>
             <a:r>
@@ -7786,6 +8034,13 @@
             <a:prstDash val="solid"/>
           </a:ln>
         </p:spPr>
+        <p:txBody>
+          <a:bodyPr/>
+          <a:lstStyle/>
+          <a:p>
+            <a:endParaRPr lang="en-US"/>
+          </a:p>
+        </p:txBody>
       </p:sp>
       <p:sp>
         <p:nvSpPr>
@@ -7808,7 +8063,7 @@
           <a:bodyPr wrap="square" lIns="0" tIns="0" rIns="0" bIns="0" rtlCol="0" anchor="ctr"/>
           <a:lstStyle/>
           <a:p>
-            <a:pPr algn="ctr" indent="0" marL="0">
+            <a:pPr marL="0" indent="0" algn="ctr">
               <a:buNone/>
             </a:pPr>
             <a:r>
@@ -7847,7 +8102,7 @@
           <a:bodyPr wrap="square" lIns="0" tIns="0" rIns="0" bIns="0" rtlCol="0" anchor="ctr"/>
           <a:lstStyle/>
           <a:p>
-            <a:pPr algn="ctr" indent="0" marL="0">
+            <a:pPr marL="0" indent="0" algn="ctr">
               <a:buNone/>
             </a:pPr>
             <a:r>
@@ -7886,7 +8141,7 @@
           <a:bodyPr wrap="square" lIns="0" tIns="0" rIns="0" bIns="0" rtlCol="0" anchor="ctr"/>
           <a:lstStyle/>
           <a:p>
-            <a:pPr indent="0" marL="0">
+            <a:pPr marL="0" indent="0">
               <a:buNone/>
             </a:pPr>
             <a:r>
@@ -7928,6 +8183,13 @@
             <a:prstDash val="solid"/>
           </a:ln>
         </p:spPr>
+        <p:txBody>
+          <a:bodyPr/>
+          <a:lstStyle/>
+          <a:p>
+            <a:endParaRPr lang="en-US"/>
+          </a:p>
+        </p:txBody>
       </p:sp>
       <p:sp>
         <p:nvSpPr>
@@ -7950,7 +8212,7 @@
           <a:bodyPr wrap="square" lIns="0" tIns="0" rIns="0" bIns="0" rtlCol="0" anchor="ctr"/>
           <a:lstStyle/>
           <a:p>
-            <a:pPr algn="ctr" indent="0" marL="0">
+            <a:pPr marL="0" indent="0" algn="ctr">
               <a:buNone/>
             </a:pPr>
             <a:r>
@@ -7992,6 +8254,13 @@
             <a:prstDash val="solid"/>
           </a:ln>
         </p:spPr>
+        <p:txBody>
+          <a:bodyPr/>
+          <a:lstStyle/>
+          <a:p>
+            <a:endParaRPr lang="en-US"/>
+          </a:p>
+        </p:txBody>
       </p:sp>
       <p:sp>
         <p:nvSpPr>
@@ -8014,7 +8283,7 @@
           <a:bodyPr wrap="square" lIns="0" tIns="0" rIns="0" bIns="0" rtlCol="0" anchor="ctr"/>
           <a:lstStyle/>
           <a:p>
-            <a:pPr algn="ctr" indent="0" marL="0">
+            <a:pPr marL="0" indent="0" algn="ctr">
               <a:buNone/>
             </a:pPr>
             <a:r>
@@ -8056,6 +8325,13 @@
             <a:prstDash val="solid"/>
           </a:ln>
         </p:spPr>
+        <p:txBody>
+          <a:bodyPr/>
+          <a:lstStyle/>
+          <a:p>
+            <a:endParaRPr lang="en-US"/>
+          </a:p>
+        </p:txBody>
       </p:sp>
       <p:sp>
         <p:nvSpPr>
@@ -8078,7 +8354,7 @@
           <a:bodyPr wrap="square" lIns="0" tIns="0" rIns="0" bIns="0" rtlCol="0" anchor="ctr"/>
           <a:lstStyle/>
           <a:p>
-            <a:pPr algn="ctr" indent="0" marL="0">
+            <a:pPr marL="0" indent="0" algn="ctr">
               <a:buNone/>
             </a:pPr>
             <a:r>
@@ -8117,7 +8393,7 @@
           <a:bodyPr wrap="square" lIns="0" tIns="0" rIns="0" bIns="0" rtlCol="0" anchor="ctr"/>
           <a:lstStyle/>
           <a:p>
-            <a:pPr algn="ctr" indent="0" marL="0">
+            <a:pPr marL="0" indent="0" algn="ctr">
               <a:buNone/>
             </a:pPr>
             <a:r>
@@ -8156,7 +8432,7 @@
           <a:bodyPr wrap="square" lIns="0" tIns="0" rIns="0" bIns="0" rtlCol="0" anchor="ctr"/>
           <a:lstStyle/>
           <a:p>
-            <a:pPr indent="0" marL="0">
+            <a:pPr marL="0" indent="0">
               <a:buNone/>
             </a:pPr>
             <a:r>
@@ -8198,6 +8474,13 @@
             <a:prstDash val="solid"/>
           </a:ln>
         </p:spPr>
+        <p:txBody>
+          <a:bodyPr/>
+          <a:lstStyle/>
+          <a:p>
+            <a:endParaRPr lang="en-US"/>
+          </a:p>
+        </p:txBody>
       </p:sp>
       <p:sp>
         <p:nvSpPr>
@@ -8220,7 +8503,7 @@
           <a:bodyPr wrap="square" lIns="0" tIns="0" rIns="0" bIns="0" rtlCol="0" anchor="ctr"/>
           <a:lstStyle/>
           <a:p>
-            <a:pPr algn="ctr" indent="0" marL="0">
+            <a:pPr marL="0" indent="0" algn="ctr">
               <a:buNone/>
             </a:pPr>
             <a:r>
@@ -8262,6 +8545,13 @@
             <a:prstDash val="solid"/>
           </a:ln>
         </p:spPr>
+        <p:txBody>
+          <a:bodyPr/>
+          <a:lstStyle/>
+          <a:p>
+            <a:endParaRPr lang="en-US"/>
+          </a:p>
+        </p:txBody>
       </p:sp>
       <p:sp>
         <p:nvSpPr>
@@ -8284,7 +8574,7 @@
           <a:bodyPr wrap="square" lIns="0" tIns="0" rIns="0" bIns="0" rtlCol="0" anchor="ctr"/>
           <a:lstStyle/>
           <a:p>
-            <a:pPr algn="ctr" indent="0" marL="0">
+            <a:pPr marL="0" indent="0" algn="ctr">
               <a:buNone/>
             </a:pPr>
             <a:r>
@@ -8326,6 +8616,13 @@
             <a:prstDash val="solid"/>
           </a:ln>
         </p:spPr>
+        <p:txBody>
+          <a:bodyPr/>
+          <a:lstStyle/>
+          <a:p>
+            <a:endParaRPr lang="en-US"/>
+          </a:p>
+        </p:txBody>
       </p:sp>
       <p:sp>
         <p:nvSpPr>
@@ -8348,7 +8645,7 @@
           <a:bodyPr wrap="square" lIns="0" tIns="0" rIns="0" bIns="0" rtlCol="0" anchor="ctr"/>
           <a:lstStyle/>
           <a:p>
-            <a:pPr algn="ctr" indent="0" marL="0">
+            <a:pPr marL="0" indent="0" algn="ctr">
               <a:buNone/>
             </a:pPr>
             <a:r>
@@ -8387,7 +8684,7 @@
           <a:bodyPr wrap="square" lIns="0" tIns="0" rIns="0" bIns="0" rtlCol="0" anchor="ctr"/>
           <a:lstStyle/>
           <a:p>
-            <a:pPr algn="ctr" indent="0" marL="0">
+            <a:pPr marL="0" indent="0" algn="ctr">
               <a:buNone/>
             </a:pPr>
             <a:r>
@@ -8413,7 +8710,7 @@
         </p:nvSpPr>
         <p:spPr>
           <a:xfrm>
-            <a:off x="6519672" y="5486400"/>
+            <a:off x="6519672" y="5426018"/>
             <a:ext cx="4846320" cy="256032"/>
           </a:xfrm>
           <a:prstGeom prst="rect">
@@ -8426,7 +8723,7 @@
           <a:bodyPr wrap="square" lIns="0" tIns="0" rIns="0" bIns="0" rtlCol="0" anchor="ctr"/>
           <a:lstStyle/>
           <a:p>
-            <a:pPr indent="0" marL="0">
+            <a:pPr marL="0" indent="0">
               <a:buNone/>
             </a:pPr>
             <a:r>
@@ -8465,11 +8762,11 @@
           <a:bodyPr wrap="square" lIns="0" tIns="0" rIns="0" bIns="0" rtlCol="0" anchor="ctr"/>
           <a:lstStyle/>
           <a:p>
-            <a:pPr indent="0" marL="0">
-              <a:buNone/>
-            </a:pPr>
-            <a:r>
-              <a:rPr lang="en-US" sz="800" spc="200" kern="0" dirty="0">
+            <a:pPr marL="0" indent="0">
+              <a:buNone/>
+            </a:pPr>
+            <a:r>
+              <a:rPr lang="en-US" sz="800" kern="0" spc="200" dirty="0">
                 <a:solidFill>
                   <a:srgbClr val="6B7785"/>
                 </a:solidFill>
@@ -8504,7 +8801,7 @@
           <a:bodyPr wrap="square" lIns="0" tIns="0" rIns="0" bIns="0" rtlCol="0" anchor="ctr"/>
           <a:lstStyle/>
           <a:p>
-            <a:pPr algn="r" indent="0" marL="0">
+            <a:pPr marL="0" indent="0" algn="r">
               <a:buNone/>
             </a:pPr>
             <a:r>
@@ -8538,6 +8835,7 @@
         <a:solidFill>
           <a:srgbClr val="F0F2F4"/>
         </a:solidFill>
+        <a:effectLst/>
       </p:bgPr>
     </p:bg>
     <p:spTree>
@@ -8573,6 +8871,13 @@
           </a:solidFill>
           <a:ln/>
         </p:spPr>
+        <p:txBody>
+          <a:bodyPr/>
+          <a:lstStyle/>
+          <a:p>
+            <a:endParaRPr lang="en-US"/>
+          </a:p>
+        </p:txBody>
       </p:sp>
       <p:sp>
         <p:nvSpPr>
@@ -8595,11 +8900,11 @@
           <a:bodyPr wrap="square" lIns="0" tIns="0" rIns="0" bIns="0" rtlCol="0" anchor="ctr"/>
           <a:lstStyle/>
           <a:p>
-            <a:pPr indent="0" marL="0">
-              <a:buNone/>
-            </a:pPr>
-            <a:r>
-              <a:rPr lang="en-US" sz="1100" b="1" spc="400" kern="0" dirty="0">
+            <a:pPr marL="0" indent="0">
+              <a:buNone/>
+            </a:pPr>
+            <a:r>
+              <a:rPr lang="en-US" sz="1100" b="1" kern="0" spc="400" dirty="0">
                 <a:solidFill>
                   <a:srgbClr val="E3A033"/>
                 </a:solidFill>
@@ -8634,7 +8939,7 @@
           <a:bodyPr wrap="square" lIns="0" tIns="0" rIns="0" bIns="0" rtlCol="0" anchor="ctr"/>
           <a:lstStyle/>
           <a:p>
-            <a:pPr indent="0" marL="0">
+            <a:pPr marL="0" indent="0">
               <a:buNone/>
             </a:pPr>
             <a:r>
@@ -8673,7 +8978,7 @@
           <a:bodyPr wrap="square" lIns="0" tIns="0" rIns="0" bIns="0" rtlCol="0" anchor="ctr"/>
           <a:lstStyle/>
           <a:p>
-            <a:pPr indent="0" marL="0">
+            <a:pPr marL="0" indent="0">
               <a:buNone/>
             </a:pPr>
             <a:r>
@@ -8715,13 +9020,20 @@
             <a:prstDash val="solid"/>
           </a:ln>
           <a:effectLst>
-            <a:outerShdw sx="100000" sy="100000" kx="0" ky="0" algn="bl" rotWithShape="0" blurRad="50800" dist="19050" dir="8100000">
+            <a:outerShdw blurRad="50800" dist="19050" dir="8100000" algn="bl" rotWithShape="0">
               <a:srgbClr val="2A3742">
                 <a:alpha val="8000"/>
               </a:srgbClr>
             </a:outerShdw>
           </a:effectLst>
         </p:spPr>
+        <p:txBody>
+          <a:bodyPr/>
+          <a:lstStyle/>
+          <a:p>
+            <a:endParaRPr lang="en-US"/>
+          </a:p>
+        </p:txBody>
       </p:sp>
       <p:sp>
         <p:nvSpPr>
@@ -8742,6 +9054,13 @@
           </a:solidFill>
           <a:ln/>
         </p:spPr>
+        <p:txBody>
+          <a:bodyPr/>
+          <a:lstStyle/>
+          <a:p>
+            <a:endParaRPr lang="en-US"/>
+          </a:p>
+        </p:txBody>
       </p:sp>
       <p:sp>
         <p:nvSpPr>
@@ -8764,11 +9083,11 @@
           <a:bodyPr wrap="square" lIns="0" tIns="0" rIns="0" bIns="0" rtlCol="0" anchor="ctr"/>
           <a:lstStyle/>
           <a:p>
-            <a:pPr indent="0" marL="0">
-              <a:buNone/>
-            </a:pPr>
-            <a:r>
-              <a:rPr lang="en-US" sz="1050" b="1" spc="200" kern="0" dirty="0">
+            <a:pPr marL="0" indent="0">
+              <a:buNone/>
+            </a:pPr>
+            <a:r>
+              <a:rPr lang="en-US" sz="1050" b="1" kern="0" spc="200" dirty="0">
                 <a:solidFill>
                   <a:srgbClr val="E3A033"/>
                 </a:solidFill>
@@ -8803,7 +9122,7 @@
           <a:bodyPr wrap="square" lIns="0" tIns="0" rIns="0" bIns="0" rtlCol="0" anchor="t"/>
           <a:lstStyle/>
           <a:p>
-            <a:pPr indent="0" marL="0">
+            <a:pPr marL="0" indent="0">
               <a:buNone/>
             </a:pPr>
             <a:r>
@@ -8842,7 +9161,7 @@
           <a:bodyPr wrap="square" lIns="0" tIns="0" rIns="0" bIns="0" rtlCol="0" anchor="t"/>
           <a:lstStyle/>
           <a:p>
-            <a:pPr indent="0" marL="0">
+            <a:pPr marL="0" indent="0">
               <a:lnSpc>
                 <a:spcPct val="100000"/>
               </a:lnSpc>
@@ -8885,6 +9204,13 @@
             <a:prstDash val="solid"/>
           </a:ln>
         </p:spPr>
+        <p:txBody>
+          <a:bodyPr/>
+          <a:lstStyle/>
+          <a:p>
+            <a:endParaRPr lang="en-US"/>
+          </a:p>
+        </p:txBody>
       </p:sp>
       <p:sp>
         <p:nvSpPr>
@@ -8907,7 +9233,7 @@
           <a:bodyPr wrap="square" lIns="0" tIns="0" rIns="0" bIns="0" rtlCol="0" anchor="t"/>
           <a:lstStyle/>
           <a:p>
-            <a:pPr indent="0" marL="0">
+            <a:pPr marL="0" indent="0">
               <a:buNone/>
             </a:pPr>
             <a:r>
@@ -8946,7 +9272,7 @@
           <a:bodyPr wrap="square" lIns="0" tIns="0" rIns="0" bIns="0" rtlCol="0" anchor="t"/>
           <a:lstStyle/>
           <a:p>
-            <a:pPr indent="0" marL="0">
+            <a:pPr marL="0" indent="0">
               <a:lnSpc>
                 <a:spcPct val="100000"/>
               </a:lnSpc>
@@ -8989,6 +9315,13 @@
             <a:prstDash val="solid"/>
           </a:ln>
         </p:spPr>
+        <p:txBody>
+          <a:bodyPr/>
+          <a:lstStyle/>
+          <a:p>
+            <a:endParaRPr lang="en-US"/>
+          </a:p>
+        </p:txBody>
       </p:sp>
       <p:sp>
         <p:nvSpPr>
@@ -9011,7 +9344,7 @@
           <a:bodyPr wrap="square" lIns="0" tIns="0" rIns="0" bIns="0" rtlCol="0" anchor="t"/>
           <a:lstStyle/>
           <a:p>
-            <a:pPr indent="0" marL="0">
+            <a:pPr marL="0" indent="0">
               <a:buNone/>
             </a:pPr>
             <a:r>
@@ -9050,7 +9383,7 @@
           <a:bodyPr wrap="square" lIns="0" tIns="0" rIns="0" bIns="0" rtlCol="0" anchor="t"/>
           <a:lstStyle/>
           <a:p>
-            <a:pPr indent="0" marL="0">
+            <a:pPr marL="0" indent="0">
               <a:lnSpc>
                 <a:spcPct val="100000"/>
               </a:lnSpc>
@@ -9093,6 +9426,13 @@
             <a:prstDash val="solid"/>
           </a:ln>
         </p:spPr>
+        <p:txBody>
+          <a:bodyPr/>
+          <a:lstStyle/>
+          <a:p>
+            <a:endParaRPr lang="en-US"/>
+          </a:p>
+        </p:txBody>
       </p:sp>
       <p:sp>
         <p:nvSpPr>
@@ -9115,7 +9455,7 @@
           <a:bodyPr wrap="square" lIns="0" tIns="0" rIns="0" bIns="0" rtlCol="0" anchor="t"/>
           <a:lstStyle/>
           <a:p>
-            <a:pPr indent="0" marL="0">
+            <a:pPr marL="0" indent="0">
               <a:buNone/>
             </a:pPr>
             <a:r>
@@ -9154,7 +9494,7 @@
           <a:bodyPr wrap="square" lIns="0" tIns="0" rIns="0" bIns="0" rtlCol="0" anchor="t"/>
           <a:lstStyle/>
           <a:p>
-            <a:pPr indent="0" marL="0">
+            <a:pPr marL="0" indent="0">
               <a:lnSpc>
                 <a:spcPct val="100000"/>
               </a:lnSpc>
@@ -9197,6 +9537,13 @@
             <a:prstDash val="solid"/>
           </a:ln>
         </p:spPr>
+        <p:txBody>
+          <a:bodyPr/>
+          <a:lstStyle/>
+          <a:p>
+            <a:endParaRPr lang="en-US"/>
+          </a:p>
+        </p:txBody>
       </p:sp>
       <p:sp>
         <p:nvSpPr>
@@ -9219,7 +9566,7 @@
           <a:bodyPr wrap="square" lIns="0" tIns="0" rIns="0" bIns="0" rtlCol="0" anchor="t"/>
           <a:lstStyle/>
           <a:p>
-            <a:pPr indent="0" marL="0">
+            <a:pPr marL="0" indent="0">
               <a:buNone/>
             </a:pPr>
             <a:r>
@@ -9258,7 +9605,7 @@
           <a:bodyPr wrap="square" lIns="0" tIns="0" rIns="0" bIns="0" rtlCol="0" anchor="t"/>
           <a:lstStyle/>
           <a:p>
-            <a:pPr indent="0" marL="0">
+            <a:pPr marL="0" indent="0">
               <a:lnSpc>
                 <a:spcPct val="100000"/>
               </a:lnSpc>
@@ -9301,6 +9648,13 @@
             <a:prstDash val="solid"/>
           </a:ln>
         </p:spPr>
+        <p:txBody>
+          <a:bodyPr/>
+          <a:lstStyle/>
+          <a:p>
+            <a:endParaRPr lang="en-US"/>
+          </a:p>
+        </p:txBody>
       </p:sp>
       <p:sp>
         <p:nvSpPr>
@@ -9323,7 +9677,7 @@
           <a:bodyPr wrap="square" lIns="0" tIns="0" rIns="0" bIns="0" rtlCol="0" anchor="t"/>
           <a:lstStyle/>
           <a:p>
-            <a:pPr indent="0" marL="0">
+            <a:pPr marL="0" indent="0">
               <a:buNone/>
             </a:pPr>
             <a:r>
@@ -9362,7 +9716,7 @@
           <a:bodyPr wrap="square" lIns="0" tIns="0" rIns="0" bIns="0" rtlCol="0" anchor="t"/>
           <a:lstStyle/>
           <a:p>
-            <a:pPr indent="0" marL="0">
+            <a:pPr marL="0" indent="0">
               <a:lnSpc>
                 <a:spcPct val="100000"/>
               </a:lnSpc>
@@ -9407,13 +9761,20 @@
             <a:prstDash val="solid"/>
           </a:ln>
           <a:effectLst>
-            <a:outerShdw sx="100000" sy="100000" kx="0" ky="0" algn="bl" rotWithShape="0" blurRad="50800" dist="19050" dir="8100000">
+            <a:outerShdw blurRad="50800" dist="19050" dir="8100000" algn="bl" rotWithShape="0">
               <a:srgbClr val="2A3742">
                 <a:alpha val="8000"/>
               </a:srgbClr>
             </a:outerShdw>
           </a:effectLst>
         </p:spPr>
+        <p:txBody>
+          <a:bodyPr/>
+          <a:lstStyle/>
+          <a:p>
+            <a:endParaRPr lang="en-US"/>
+          </a:p>
+        </p:txBody>
       </p:sp>
       <p:sp>
         <p:nvSpPr>
@@ -9434,6 +9795,13 @@
           </a:solidFill>
           <a:ln/>
         </p:spPr>
+        <p:txBody>
+          <a:bodyPr/>
+          <a:lstStyle/>
+          <a:p>
+            <a:endParaRPr lang="en-US"/>
+          </a:p>
+        </p:txBody>
       </p:sp>
       <p:sp>
         <p:nvSpPr>
@@ -9456,11 +9824,11 @@
           <a:bodyPr wrap="square" lIns="0" tIns="0" rIns="0" bIns="0" rtlCol="0" anchor="ctr"/>
           <a:lstStyle/>
           <a:p>
-            <a:pPr indent="0" marL="0">
-              <a:buNone/>
-            </a:pPr>
-            <a:r>
-              <a:rPr lang="en-US" sz="1050" b="1" spc="200" kern="0" dirty="0">
+            <a:pPr marL="0" indent="0">
+              <a:buNone/>
+            </a:pPr>
+            <a:r>
+              <a:rPr lang="en-US" sz="1050" b="1" kern="0" spc="200" dirty="0">
                 <a:solidFill>
                   <a:srgbClr val="E3A033"/>
                 </a:solidFill>
@@ -9495,7 +9863,7 @@
           <a:bodyPr wrap="square" lIns="0" tIns="0" rIns="0" bIns="0" rtlCol="0" anchor="ctr"/>
           <a:lstStyle/>
           <a:p>
-            <a:pPr algn="r" indent="0" marL="0">
+            <a:pPr marL="0" indent="0" algn="r">
               <a:buNone/>
             </a:pPr>
             <a:r>
@@ -9532,306 +9900,17 @@
           </a:solidFill>
           <a:ln/>
         </p:spPr>
+        <p:txBody>
+          <a:bodyPr/>
+          <a:lstStyle/>
+          <a:p>
+            <a:endParaRPr lang="en-US"/>
+          </a:p>
+        </p:txBody>
       </p:sp>
       <p:pic>
         <p:nvPicPr>
-          <p:cNvPr id="31" name="Image 0" descr="preencoded.png">    </p:cNvPr>
-          <p:cNvPicPr>
-            <a:picLocks noChangeAspect="1"/>
-          </p:cNvPicPr>
-          <p:nvPr/>
-        </p:nvPicPr>
-        <p:blipFill>
-          <a:blip r:embed="rId1"/>
-          <a:stretch>
-            <a:fillRect/>
-          </a:stretch>
-        </p:blipFill>
-        <p:spPr>
-          <a:xfrm>
-            <a:off x="6528816" y="2752344"/>
-            <a:ext cx="274320" cy="274320"/>
-          </a:xfrm>
-          <a:prstGeom prst="rect">
-            <a:avLst/>
-          </a:prstGeom>
-        </p:spPr>
-      </p:pic>
-      <p:sp>
-        <p:nvSpPr>
-          <p:cNvPr id="32" name="Text 29"/>
-          <p:cNvSpPr/>
-          <p:nvPr/>
-        </p:nvSpPr>
-        <p:spPr>
-          <a:xfrm>
-            <a:off x="7022592" y="2596896"/>
-            <a:ext cx="4297680" cy="292608"/>
-          </a:xfrm>
-          <a:prstGeom prst="rect">
-            <a:avLst/>
-          </a:prstGeom>
-          <a:noFill/>
-          <a:ln/>
-        </p:spPr>
-        <p:txBody>
-          <a:bodyPr wrap="square" lIns="0" tIns="0" rIns="0" bIns="0" rtlCol="0" anchor="ctr"/>
-          <a:lstStyle/>
-          <a:p>
-            <a:pPr indent="0" marL="0">
-              <a:buNone/>
-            </a:pPr>
-            <a:r>
-              <a:rPr lang="en-US" sz="1500" b="1" dirty="0">
-                <a:solidFill>
-                  <a:srgbClr val="2A3742"/>
-                </a:solidFill>
-                <a:latin typeface="Fraunces 72pt" pitchFamily="34" charset="0"/>
-                <a:ea typeface="Fraunces 72pt" pitchFamily="34" charset="-122"/>
-                <a:cs typeface="Fraunces 72pt" pitchFamily="34" charset="-120"/>
-              </a:rPr>
-              <a:t>Payment import</a:t>
-            </a:r>
-            <a:endParaRPr lang="en-US" sz="1500" dirty="0"/>
-          </a:p>
-        </p:txBody>
-      </p:sp>
-      <p:sp>
-        <p:nvSpPr>
-          <p:cNvPr id="33" name="Text 30"/>
-          <p:cNvSpPr/>
-          <p:nvPr/>
-        </p:nvSpPr>
-        <p:spPr>
-          <a:xfrm>
-            <a:off x="7022592" y="2907792"/>
-            <a:ext cx="4297680" cy="365760"/>
-          </a:xfrm>
-          <a:prstGeom prst="rect">
-            <a:avLst/>
-          </a:prstGeom>
-          <a:noFill/>
-          <a:ln/>
-        </p:spPr>
-        <p:txBody>
-          <a:bodyPr wrap="square" lIns="0" tIns="0" rIns="0" bIns="0" rtlCol="0" anchor="t"/>
-          <a:lstStyle/>
-          <a:p>
-            <a:pPr indent="0" marL="0">
-              <a:lnSpc>
-                <a:spcPct val="100000"/>
-              </a:lnSpc>
-              <a:buNone/>
-            </a:pPr>
-            <a:r>
-              <a:rPr lang="en-US" sz="1150" dirty="0">
-                <a:solidFill>
-                  <a:srgbClr val="6B7785"/>
-                </a:solidFill>
-                <a:latin typeface="Hanken Grotesk" pitchFamily="34" charset="0"/>
-                <a:ea typeface="Hanken Grotesk" pitchFamily="34" charset="-122"/>
-                <a:cs typeface="Hanken Grotesk" pitchFamily="34" charset="-120"/>
-              </a:rPr>
-              <a:t>Monthly finance-company payments (unapplied)</a:t>
-            </a:r>
-            <a:endParaRPr lang="en-US" sz="1150" dirty="0"/>
-          </a:p>
-        </p:txBody>
-      </p:sp>
-      <p:sp>
-        <p:nvSpPr>
-          <p:cNvPr id="34" name="Shape 31"/>
-          <p:cNvSpPr/>
-          <p:nvPr/>
-        </p:nvSpPr>
-        <p:spPr>
-          <a:xfrm>
-            <a:off x="6428232" y="3328416"/>
-            <a:ext cx="4846320" cy="0"/>
-          </a:xfrm>
-          <a:prstGeom prst="line">
-            <a:avLst/>
-          </a:prstGeom>
-          <a:noFill/>
-          <a:ln w="9525">
-            <a:solidFill>
-              <a:srgbClr val="E2E6EA"/>
-            </a:solidFill>
-            <a:prstDash val="solid"/>
-          </a:ln>
-        </p:spPr>
-      </p:sp>
-      <p:sp>
-        <p:nvSpPr>
-          <p:cNvPr id="35" name="Shape 32"/>
-          <p:cNvSpPr/>
-          <p:nvPr/>
-        </p:nvSpPr>
-        <p:spPr>
-          <a:xfrm>
-            <a:off x="6428232" y="3401568"/>
-            <a:ext cx="475488" cy="475488"/>
-          </a:xfrm>
-          <a:prstGeom prst="ellipse">
-            <a:avLst/>
-          </a:prstGeom>
-          <a:solidFill>
-            <a:srgbClr val="E2F0E8"/>
-          </a:solidFill>
-          <a:ln/>
-        </p:spPr>
-      </p:sp>
-      <p:pic>
-        <p:nvPicPr>
-          <p:cNvPr id="36" name="Image 1" descr="preencoded.png">    </p:cNvPr>
-          <p:cNvPicPr>
-            <a:picLocks noChangeAspect="1"/>
-          </p:cNvPicPr>
-          <p:nvPr/>
-        </p:nvPicPr>
-        <p:blipFill>
-          <a:blip r:embed="rId2"/>
-          <a:stretch>
-            <a:fillRect/>
-          </a:stretch>
-        </p:blipFill>
-        <p:spPr>
-          <a:xfrm>
-            <a:off x="6528816" y="3502152"/>
-            <a:ext cx="274320" cy="274320"/>
-          </a:xfrm>
-          <a:prstGeom prst="rect">
-            <a:avLst/>
-          </a:prstGeom>
-        </p:spPr>
-      </p:pic>
-      <p:sp>
-        <p:nvSpPr>
-          <p:cNvPr id="37" name="Text 33"/>
-          <p:cNvSpPr/>
-          <p:nvPr/>
-        </p:nvSpPr>
-        <p:spPr>
-          <a:xfrm>
-            <a:off x="7022592" y="3346704"/>
-            <a:ext cx="4297680" cy="292608"/>
-          </a:xfrm>
-          <a:prstGeom prst="rect">
-            <a:avLst/>
-          </a:prstGeom>
-          <a:noFill/>
-          <a:ln/>
-        </p:spPr>
-        <p:txBody>
-          <a:bodyPr wrap="square" lIns="0" tIns="0" rIns="0" bIns="0" rtlCol="0" anchor="ctr"/>
-          <a:lstStyle/>
-          <a:p>
-            <a:pPr indent="0" marL="0">
-              <a:buNone/>
-            </a:pPr>
-            <a:r>
-              <a:rPr lang="en-US" sz="1500" b="1" dirty="0">
-                <a:solidFill>
-                  <a:srgbClr val="2A3742"/>
-                </a:solidFill>
-                <a:latin typeface="Fraunces 72pt" pitchFamily="34" charset="0"/>
-                <a:ea typeface="Fraunces 72pt" pitchFamily="34" charset="-122"/>
-                <a:cs typeface="Fraunces 72pt" pitchFamily="34" charset="-120"/>
-              </a:rPr>
-              <a:t>Credit-memo import</a:t>
-            </a:r>
-            <a:endParaRPr lang="en-US" sz="1500" dirty="0"/>
-          </a:p>
-        </p:txBody>
-      </p:sp>
-      <p:sp>
-        <p:nvSpPr>
-          <p:cNvPr id="38" name="Text 34"/>
-          <p:cNvSpPr/>
-          <p:nvPr/>
-        </p:nvSpPr>
-        <p:spPr>
-          <a:xfrm>
-            <a:off x="7022592" y="3657600"/>
-            <a:ext cx="4297680" cy="365760"/>
-          </a:xfrm>
-          <a:prstGeom prst="rect">
-            <a:avLst/>
-          </a:prstGeom>
-          <a:noFill/>
-          <a:ln/>
-        </p:spPr>
-        <p:txBody>
-          <a:bodyPr wrap="square" lIns="0" tIns="0" rIns="0" bIns="0" rtlCol="0" anchor="t"/>
-          <a:lstStyle/>
-          <a:p>
-            <a:pPr indent="0" marL="0">
-              <a:lnSpc>
-                <a:spcPct val="100000"/>
-              </a:lnSpc>
-              <a:buNone/>
-            </a:pPr>
-            <a:r>
-              <a:rPr lang="en-US" sz="1150" dirty="0">
-                <a:solidFill>
-                  <a:srgbClr val="6B7785"/>
-                </a:solidFill>
-                <a:latin typeface="Hanken Grotesk" pitchFamily="34" charset="0"/>
-                <a:ea typeface="Hanken Grotesk" pitchFamily="34" charset="-122"/>
-                <a:cs typeface="Hanken Grotesk" pitchFamily="34" charset="-120"/>
-              </a:rPr>
-              <a:t>Monthly Flex credits for each clinic</a:t>
-            </a:r>
-            <a:endParaRPr lang="en-US" sz="1150" dirty="0"/>
-          </a:p>
-        </p:txBody>
-      </p:sp>
-      <p:sp>
-        <p:nvSpPr>
-          <p:cNvPr id="39" name="Shape 35"/>
-          <p:cNvSpPr/>
-          <p:nvPr/>
-        </p:nvSpPr>
-        <p:spPr>
-          <a:xfrm>
-            <a:off x="6428232" y="4078224"/>
-            <a:ext cx="4846320" cy="0"/>
-          </a:xfrm>
-          <a:prstGeom prst="line">
-            <a:avLst/>
-          </a:prstGeom>
-          <a:noFill/>
-          <a:ln w="9525">
-            <a:solidFill>
-              <a:srgbClr val="E2E6EA"/>
-            </a:solidFill>
-            <a:prstDash val="solid"/>
-          </a:ln>
-        </p:spPr>
-      </p:sp>
-      <p:sp>
-        <p:nvSpPr>
-          <p:cNvPr id="40" name="Shape 36"/>
-          <p:cNvSpPr/>
-          <p:nvPr/>
-        </p:nvSpPr>
-        <p:spPr>
-          <a:xfrm>
-            <a:off x="6428232" y="4151376"/>
-            <a:ext cx="475488" cy="475488"/>
-          </a:xfrm>
-          <a:prstGeom prst="ellipse">
-            <a:avLst/>
-          </a:prstGeom>
-          <a:solidFill>
-            <a:srgbClr val="E2F0E8"/>
-          </a:solidFill>
-          <a:ln/>
-        </p:spPr>
-      </p:sp>
-      <p:pic>
-        <p:nvPicPr>
-          <p:cNvPr id="41" name="Image 2" descr="preencoded.png">    </p:cNvPr>
+          <p:cNvPr id="31" name="Image 0" descr="preencoded.png"/>
           <p:cNvPicPr>
             <a:picLocks noChangeAspect="1"/>
           </p:cNvPicPr>
@@ -9845,7 +9924,7 @@
         </p:blipFill>
         <p:spPr>
           <a:xfrm>
-            <a:off x="6528816" y="4251960"/>
+            <a:off x="6528816" y="2752344"/>
             <a:ext cx="274320" cy="274320"/>
           </a:xfrm>
           <a:prstGeom prst="rect">
@@ -9855,13 +9934,13 @@
       </p:pic>
       <p:sp>
         <p:nvSpPr>
-          <p:cNvPr id="42" name="Text 37"/>
-          <p:cNvSpPr/>
-          <p:nvPr/>
-        </p:nvSpPr>
-        <p:spPr>
-          <a:xfrm>
-            <a:off x="7022592" y="4096512"/>
+          <p:cNvPr id="32" name="Text 29"/>
+          <p:cNvSpPr/>
+          <p:nvPr/>
+        </p:nvSpPr>
+        <p:spPr>
+          <a:xfrm>
+            <a:off x="7022592" y="2596896"/>
             <a:ext cx="4297680" cy="292608"/>
           </a:xfrm>
           <a:prstGeom prst="rect">
@@ -9874,7 +9953,7 @@
           <a:bodyPr wrap="square" lIns="0" tIns="0" rIns="0" bIns="0" rtlCol="0" anchor="ctr"/>
           <a:lstStyle/>
           <a:p>
-            <a:pPr indent="0" marL="0">
+            <a:pPr marL="0" indent="0">
               <a:buNone/>
             </a:pPr>
             <a:r>
@@ -9886,7 +9965,7 @@
                 <a:ea typeface="Fraunces 72pt" pitchFamily="34" charset="-122"/>
                 <a:cs typeface="Fraunces 72pt" pitchFamily="34" charset="-120"/>
               </a:rPr>
-              <a:t>Overage invoice</a:t>
+              <a:t>Payment import</a:t>
             </a:r>
             <a:endParaRPr lang="en-US" sz="1500" dirty="0"/>
           </a:p>
@@ -9894,13 +9973,13 @@
       </p:sp>
       <p:sp>
         <p:nvSpPr>
-          <p:cNvPr id="43" name="Text 38"/>
-          <p:cNvSpPr/>
-          <p:nvPr/>
-        </p:nvSpPr>
-        <p:spPr>
-          <a:xfrm>
-            <a:off x="7022592" y="4407408"/>
+          <p:cNvPr id="33" name="Text 30"/>
+          <p:cNvSpPr/>
+          <p:nvPr/>
+        </p:nvSpPr>
+        <p:spPr>
+          <a:xfrm>
+            <a:off x="7022592" y="2907792"/>
             <a:ext cx="4297680" cy="365760"/>
           </a:xfrm>
           <a:prstGeom prst="rect">
@@ -9913,7 +9992,7 @@
           <a:bodyPr wrap="square" lIns="0" tIns="0" rIns="0" bIns="0" rtlCol="0" anchor="t"/>
           <a:lstStyle/>
           <a:p>
-            <a:pPr indent="0" marL="0">
+            <a:pPr marL="0" indent="0">
               <a:lnSpc>
                 <a:spcPct val="100000"/>
               </a:lnSpc>
@@ -9928,7 +10007,7 @@
                 <a:ea typeface="Hanken Grotesk" pitchFamily="34" charset="-122"/>
                 <a:cs typeface="Hanken Grotesk" pitchFamily="34" charset="-120"/>
               </a:rPr>
-              <a:t>Quarter-end bill when usage beats the pool</a:t>
+              <a:t>Monthly finance-company payments (unapplied)</a:t>
             </a:r>
             <a:endParaRPr lang="en-US" sz="1150" dirty="0"/>
           </a:p>
@@ -9936,13 +10015,13 @@
       </p:sp>
       <p:sp>
         <p:nvSpPr>
-          <p:cNvPr id="44" name="Shape 39"/>
-          <p:cNvSpPr/>
-          <p:nvPr/>
-        </p:nvSpPr>
-        <p:spPr>
-          <a:xfrm>
-            <a:off x="6428232" y="4828032"/>
+          <p:cNvPr id="34" name="Shape 31"/>
+          <p:cNvSpPr/>
+          <p:nvPr/>
+        </p:nvSpPr>
+        <p:spPr>
+          <a:xfrm>
+            <a:off x="6428232" y="3328416"/>
             <a:ext cx="4846320" cy="0"/>
           </a:xfrm>
           <a:prstGeom prst="line">
@@ -9956,16 +10035,23 @@
             <a:prstDash val="solid"/>
           </a:ln>
         </p:spPr>
-      </p:sp>
-      <p:sp>
-        <p:nvSpPr>
-          <p:cNvPr id="45" name="Shape 40"/>
-          <p:cNvSpPr/>
-          <p:nvPr/>
-        </p:nvSpPr>
-        <p:spPr>
-          <a:xfrm>
-            <a:off x="6428232" y="4901184"/>
+        <p:txBody>
+          <a:bodyPr/>
+          <a:lstStyle/>
+          <a:p>
+            <a:endParaRPr lang="en-US"/>
+          </a:p>
+        </p:txBody>
+      </p:sp>
+      <p:sp>
+        <p:nvSpPr>
+          <p:cNvPr id="35" name="Shape 32"/>
+          <p:cNvSpPr/>
+          <p:nvPr/>
+        </p:nvSpPr>
+        <p:spPr>
+          <a:xfrm>
+            <a:off x="6428232" y="3401568"/>
             <a:ext cx="475488" cy="475488"/>
           </a:xfrm>
           <a:prstGeom prst="ellipse">
@@ -9976,10 +10062,17 @@
           </a:solidFill>
           <a:ln/>
         </p:spPr>
+        <p:txBody>
+          <a:bodyPr/>
+          <a:lstStyle/>
+          <a:p>
+            <a:endParaRPr lang="en-US"/>
+          </a:p>
+        </p:txBody>
       </p:sp>
       <p:pic>
         <p:nvPicPr>
-          <p:cNvPr id="46" name="Image 3" descr="preencoded.png">    </p:cNvPr>
+          <p:cNvPr id="36" name="Image 1" descr="preencoded.png"/>
           <p:cNvPicPr>
             <a:picLocks noChangeAspect="1"/>
           </p:cNvPicPr>
@@ -9993,7 +10086,7 @@
         </p:blipFill>
         <p:spPr>
           <a:xfrm>
-            <a:off x="6528816" y="5001768"/>
+            <a:off x="6528816" y="3502152"/>
             <a:ext cx="274320" cy="274320"/>
           </a:xfrm>
           <a:prstGeom prst="rect">
@@ -10003,13 +10096,13 @@
       </p:pic>
       <p:sp>
         <p:nvSpPr>
-          <p:cNvPr id="47" name="Text 41"/>
-          <p:cNvSpPr/>
-          <p:nvPr/>
-        </p:nvSpPr>
-        <p:spPr>
-          <a:xfrm>
-            <a:off x="7022592" y="4846320"/>
+          <p:cNvPr id="37" name="Text 33"/>
+          <p:cNvSpPr/>
+          <p:nvPr/>
+        </p:nvSpPr>
+        <p:spPr>
+          <a:xfrm>
+            <a:off x="7022592" y="3346704"/>
             <a:ext cx="4297680" cy="292608"/>
           </a:xfrm>
           <a:prstGeom prst="rect">
@@ -10022,7 +10115,7 @@
           <a:bodyPr wrap="square" lIns="0" tIns="0" rIns="0" bIns="0" rtlCol="0" anchor="ctr"/>
           <a:lstStyle/>
           <a:p>
-            <a:pPr indent="0" marL="0">
+            <a:pPr marL="0" indent="0">
               <a:buNone/>
             </a:pPr>
             <a:r>
@@ -10034,7 +10127,7 @@
                 <a:ea typeface="Fraunces 72pt" pitchFamily="34" charset="-122"/>
                 <a:cs typeface="Fraunces 72pt" pitchFamily="34" charset="-120"/>
               </a:rPr>
-              <a:t>Recapture invoice</a:t>
+              <a:t>Credit-memo import</a:t>
             </a:r>
             <a:endParaRPr lang="en-US" sz="1500" dirty="0"/>
           </a:p>
@@ -10042,13 +10135,13 @@
       </p:sp>
       <p:sp>
         <p:nvSpPr>
-          <p:cNvPr id="48" name="Text 42"/>
-          <p:cNvSpPr/>
-          <p:nvPr/>
-        </p:nvSpPr>
-        <p:spPr>
-          <a:xfrm>
-            <a:off x="7022592" y="5157216"/>
+          <p:cNvPr id="38" name="Text 34"/>
+          <p:cNvSpPr/>
+          <p:nvPr/>
+        </p:nvSpPr>
+        <p:spPr>
+          <a:xfrm>
+            <a:off x="7022592" y="3657600"/>
             <a:ext cx="4297680" cy="365760"/>
           </a:xfrm>
           <a:prstGeom prst="rect">
@@ -10061,7 +10154,7 @@
           <a:bodyPr wrap="square" lIns="0" tIns="0" rIns="0" bIns="0" rtlCol="0" anchor="t"/>
           <a:lstStyle/>
           <a:p>
-            <a:pPr indent="0" marL="0">
+            <a:pPr marL="0" indent="0">
               <a:lnSpc>
                 <a:spcPct val="100000"/>
               </a:lnSpc>
@@ -10076,6 +10169,330 @@
                 <a:ea typeface="Hanken Grotesk" pitchFamily="34" charset="-122"/>
                 <a:cs typeface="Hanken Grotesk" pitchFamily="34" charset="-120"/>
               </a:rPr>
+              <a:t>Monthly Flex credits for each clinic</a:t>
+            </a:r>
+            <a:endParaRPr lang="en-US" sz="1150" dirty="0"/>
+          </a:p>
+        </p:txBody>
+      </p:sp>
+      <p:sp>
+        <p:nvSpPr>
+          <p:cNvPr id="39" name="Shape 35"/>
+          <p:cNvSpPr/>
+          <p:nvPr/>
+        </p:nvSpPr>
+        <p:spPr>
+          <a:xfrm>
+            <a:off x="6428232" y="4078224"/>
+            <a:ext cx="4846320" cy="0"/>
+          </a:xfrm>
+          <a:prstGeom prst="line">
+            <a:avLst/>
+          </a:prstGeom>
+          <a:noFill/>
+          <a:ln w="9525">
+            <a:solidFill>
+              <a:srgbClr val="E2E6EA"/>
+            </a:solidFill>
+            <a:prstDash val="solid"/>
+          </a:ln>
+        </p:spPr>
+        <p:txBody>
+          <a:bodyPr/>
+          <a:lstStyle/>
+          <a:p>
+            <a:endParaRPr lang="en-US"/>
+          </a:p>
+        </p:txBody>
+      </p:sp>
+      <p:sp>
+        <p:nvSpPr>
+          <p:cNvPr id="40" name="Shape 36"/>
+          <p:cNvSpPr/>
+          <p:nvPr/>
+        </p:nvSpPr>
+        <p:spPr>
+          <a:xfrm>
+            <a:off x="6428232" y="4151376"/>
+            <a:ext cx="475488" cy="475488"/>
+          </a:xfrm>
+          <a:prstGeom prst="ellipse">
+            <a:avLst/>
+          </a:prstGeom>
+          <a:solidFill>
+            <a:srgbClr val="E2F0E8"/>
+          </a:solidFill>
+          <a:ln/>
+        </p:spPr>
+        <p:txBody>
+          <a:bodyPr/>
+          <a:lstStyle/>
+          <a:p>
+            <a:endParaRPr lang="en-US"/>
+          </a:p>
+        </p:txBody>
+      </p:sp>
+      <p:pic>
+        <p:nvPicPr>
+          <p:cNvPr id="41" name="Image 2" descr="preencoded.png"/>
+          <p:cNvPicPr>
+            <a:picLocks noChangeAspect="1"/>
+          </p:cNvPicPr>
+          <p:nvPr/>
+        </p:nvPicPr>
+        <p:blipFill>
+          <a:blip r:embed="rId5"/>
+          <a:stretch>
+            <a:fillRect/>
+          </a:stretch>
+        </p:blipFill>
+        <p:spPr>
+          <a:xfrm>
+            <a:off x="6528816" y="4251960"/>
+            <a:ext cx="274320" cy="274320"/>
+          </a:xfrm>
+          <a:prstGeom prst="rect">
+            <a:avLst/>
+          </a:prstGeom>
+        </p:spPr>
+      </p:pic>
+      <p:sp>
+        <p:nvSpPr>
+          <p:cNvPr id="42" name="Text 37"/>
+          <p:cNvSpPr/>
+          <p:nvPr/>
+        </p:nvSpPr>
+        <p:spPr>
+          <a:xfrm>
+            <a:off x="7022592" y="4096512"/>
+            <a:ext cx="4297680" cy="292608"/>
+          </a:xfrm>
+          <a:prstGeom prst="rect">
+            <a:avLst/>
+          </a:prstGeom>
+          <a:noFill/>
+          <a:ln/>
+        </p:spPr>
+        <p:txBody>
+          <a:bodyPr wrap="square" lIns="0" tIns="0" rIns="0" bIns="0" rtlCol="0" anchor="ctr"/>
+          <a:lstStyle/>
+          <a:p>
+            <a:pPr marL="0" indent="0">
+              <a:buNone/>
+            </a:pPr>
+            <a:r>
+              <a:rPr lang="en-US" sz="1500" b="1" dirty="0">
+                <a:solidFill>
+                  <a:srgbClr val="2A3742"/>
+                </a:solidFill>
+                <a:latin typeface="Fraunces 72pt" pitchFamily="34" charset="0"/>
+                <a:ea typeface="Fraunces 72pt" pitchFamily="34" charset="-122"/>
+                <a:cs typeface="Fraunces 72pt" pitchFamily="34" charset="-120"/>
+              </a:rPr>
+              <a:t>Overage invoice</a:t>
+            </a:r>
+            <a:endParaRPr lang="en-US" sz="1500" dirty="0"/>
+          </a:p>
+        </p:txBody>
+      </p:sp>
+      <p:sp>
+        <p:nvSpPr>
+          <p:cNvPr id="43" name="Text 38"/>
+          <p:cNvSpPr/>
+          <p:nvPr/>
+        </p:nvSpPr>
+        <p:spPr>
+          <a:xfrm>
+            <a:off x="7022592" y="4407408"/>
+            <a:ext cx="4297680" cy="365760"/>
+          </a:xfrm>
+          <a:prstGeom prst="rect">
+            <a:avLst/>
+          </a:prstGeom>
+          <a:noFill/>
+          <a:ln/>
+        </p:spPr>
+        <p:txBody>
+          <a:bodyPr wrap="square" lIns="0" tIns="0" rIns="0" bIns="0" rtlCol="0" anchor="t"/>
+          <a:lstStyle/>
+          <a:p>
+            <a:pPr marL="0" indent="0">
+              <a:lnSpc>
+                <a:spcPct val="100000"/>
+              </a:lnSpc>
+              <a:buNone/>
+            </a:pPr>
+            <a:r>
+              <a:rPr lang="en-US" sz="1150" dirty="0">
+                <a:solidFill>
+                  <a:srgbClr val="6B7785"/>
+                </a:solidFill>
+                <a:latin typeface="Hanken Grotesk" pitchFamily="34" charset="0"/>
+                <a:ea typeface="Hanken Grotesk" pitchFamily="34" charset="-122"/>
+                <a:cs typeface="Hanken Grotesk" pitchFamily="34" charset="-120"/>
+              </a:rPr>
+              <a:t>Quarter-end bill when usage beats the pool</a:t>
+            </a:r>
+            <a:endParaRPr lang="en-US" sz="1150" dirty="0"/>
+          </a:p>
+        </p:txBody>
+      </p:sp>
+      <p:sp>
+        <p:nvSpPr>
+          <p:cNvPr id="44" name="Shape 39"/>
+          <p:cNvSpPr/>
+          <p:nvPr/>
+        </p:nvSpPr>
+        <p:spPr>
+          <a:xfrm>
+            <a:off x="6428232" y="4828032"/>
+            <a:ext cx="4846320" cy="0"/>
+          </a:xfrm>
+          <a:prstGeom prst="line">
+            <a:avLst/>
+          </a:prstGeom>
+          <a:noFill/>
+          <a:ln w="9525">
+            <a:solidFill>
+              <a:srgbClr val="E2E6EA"/>
+            </a:solidFill>
+            <a:prstDash val="solid"/>
+          </a:ln>
+        </p:spPr>
+        <p:txBody>
+          <a:bodyPr/>
+          <a:lstStyle/>
+          <a:p>
+            <a:endParaRPr lang="en-US"/>
+          </a:p>
+        </p:txBody>
+      </p:sp>
+      <p:sp>
+        <p:nvSpPr>
+          <p:cNvPr id="45" name="Shape 40"/>
+          <p:cNvSpPr/>
+          <p:nvPr/>
+        </p:nvSpPr>
+        <p:spPr>
+          <a:xfrm>
+            <a:off x="6428232" y="4901184"/>
+            <a:ext cx="475488" cy="475488"/>
+          </a:xfrm>
+          <a:prstGeom prst="ellipse">
+            <a:avLst/>
+          </a:prstGeom>
+          <a:solidFill>
+            <a:srgbClr val="E2F0E8"/>
+          </a:solidFill>
+          <a:ln/>
+        </p:spPr>
+        <p:txBody>
+          <a:bodyPr/>
+          <a:lstStyle/>
+          <a:p>
+            <a:endParaRPr lang="en-US"/>
+          </a:p>
+        </p:txBody>
+      </p:sp>
+      <p:pic>
+        <p:nvPicPr>
+          <p:cNvPr id="46" name="Image 3" descr="preencoded.png"/>
+          <p:cNvPicPr>
+            <a:picLocks noChangeAspect="1"/>
+          </p:cNvPicPr>
+          <p:nvPr/>
+        </p:nvPicPr>
+        <p:blipFill>
+          <a:blip r:embed="rId6"/>
+          <a:stretch>
+            <a:fillRect/>
+          </a:stretch>
+        </p:blipFill>
+        <p:spPr>
+          <a:xfrm>
+            <a:off x="6528816" y="5001768"/>
+            <a:ext cx="274320" cy="274320"/>
+          </a:xfrm>
+          <a:prstGeom prst="rect">
+            <a:avLst/>
+          </a:prstGeom>
+        </p:spPr>
+      </p:pic>
+      <p:sp>
+        <p:nvSpPr>
+          <p:cNvPr id="47" name="Text 41"/>
+          <p:cNvSpPr/>
+          <p:nvPr/>
+        </p:nvSpPr>
+        <p:spPr>
+          <a:xfrm>
+            <a:off x="7022592" y="4846320"/>
+            <a:ext cx="4297680" cy="292608"/>
+          </a:xfrm>
+          <a:prstGeom prst="rect">
+            <a:avLst/>
+          </a:prstGeom>
+          <a:noFill/>
+          <a:ln/>
+        </p:spPr>
+        <p:txBody>
+          <a:bodyPr wrap="square" lIns="0" tIns="0" rIns="0" bIns="0" rtlCol="0" anchor="ctr"/>
+          <a:lstStyle/>
+          <a:p>
+            <a:pPr marL="0" indent="0">
+              <a:buNone/>
+            </a:pPr>
+            <a:r>
+              <a:rPr lang="en-US" sz="1500" b="1" dirty="0">
+                <a:solidFill>
+                  <a:srgbClr val="2A3742"/>
+                </a:solidFill>
+                <a:latin typeface="Fraunces 72pt" pitchFamily="34" charset="0"/>
+                <a:ea typeface="Fraunces 72pt" pitchFamily="34" charset="-122"/>
+                <a:cs typeface="Fraunces 72pt" pitchFamily="34" charset="-120"/>
+              </a:rPr>
+              <a:t>Recapture invoice</a:t>
+            </a:r>
+            <a:endParaRPr lang="en-US" sz="1500" dirty="0"/>
+          </a:p>
+        </p:txBody>
+      </p:sp>
+      <p:sp>
+        <p:nvSpPr>
+          <p:cNvPr id="48" name="Text 42"/>
+          <p:cNvSpPr/>
+          <p:nvPr/>
+        </p:nvSpPr>
+        <p:spPr>
+          <a:xfrm>
+            <a:off x="7022592" y="5157216"/>
+            <a:ext cx="4297680" cy="365760"/>
+          </a:xfrm>
+          <a:prstGeom prst="rect">
+            <a:avLst/>
+          </a:prstGeom>
+          <a:noFill/>
+          <a:ln/>
+        </p:spPr>
+        <p:txBody>
+          <a:bodyPr wrap="square" lIns="0" tIns="0" rIns="0" bIns="0" rtlCol="0" anchor="t"/>
+          <a:lstStyle/>
+          <a:p>
+            <a:pPr marL="0" indent="0">
+              <a:lnSpc>
+                <a:spcPct val="100000"/>
+              </a:lnSpc>
+              <a:buNone/>
+            </a:pPr>
+            <a:r>
+              <a:rPr lang="en-US" sz="1150" dirty="0">
+                <a:solidFill>
+                  <a:srgbClr val="6B7785"/>
+                </a:solidFill>
+                <a:latin typeface="Hanken Grotesk" pitchFamily="34" charset="0"/>
+                <a:ea typeface="Hanken Grotesk" pitchFamily="34" charset="-122"/>
+                <a:cs typeface="Hanken Grotesk" pitchFamily="34" charset="-120"/>
+              </a:rPr>
               <a:t>Quarter-end internal booking of unused pool</a:t>
             </a:r>
             <a:endParaRPr lang="en-US" sz="1150" dirty="0"/>
@@ -10103,11 +10520,11 @@
           <a:bodyPr wrap="square" lIns="0" tIns="0" rIns="0" bIns="0" rtlCol="0" anchor="ctr"/>
           <a:lstStyle/>
           <a:p>
-            <a:pPr indent="0" marL="0">
-              <a:buNone/>
-            </a:pPr>
-            <a:r>
-              <a:rPr lang="en-US" sz="800" spc="200" kern="0" dirty="0">
+            <a:pPr marL="0" indent="0">
+              <a:buNone/>
+            </a:pPr>
+            <a:r>
+              <a:rPr lang="en-US" sz="800" kern="0" spc="200" dirty="0">
                 <a:solidFill>
                   <a:srgbClr val="6B7785"/>
                 </a:solidFill>
@@ -10142,7 +10559,7 @@
           <a:bodyPr wrap="square" lIns="0" tIns="0" rIns="0" bIns="0" rtlCol="0" anchor="ctr"/>
           <a:lstStyle/>
           <a:p>
-            <a:pPr algn="r" indent="0" marL="0">
+            <a:pPr marL="0" indent="0" algn="r">
               <a:buNone/>
             </a:pPr>
             <a:r>
@@ -10461,4 +10878,319 @@
     </a:ext>
   </a:extLst>
 </a:theme>
+</file>
+
+<file path=ppt/theme/theme2.xml><?xml version="1.0" encoding="utf-8"?>
+<a:theme xmlns:a="http://schemas.openxmlformats.org/drawingml/2006/main" name="Office Theme">
+  <a:themeElements>
+    <a:clrScheme name="Office">
+      <a:dk1>
+        <a:sysClr val="windowText" lastClr="000000"/>
+      </a:dk1>
+      <a:lt1>
+        <a:sysClr val="window" lastClr="FFFFFF"/>
+      </a:lt1>
+      <a:dk2>
+        <a:srgbClr val="0E2841"/>
+      </a:dk2>
+      <a:lt2>
+        <a:srgbClr val="E8E8E8"/>
+      </a:lt2>
+      <a:accent1>
+        <a:srgbClr val="156082"/>
+      </a:accent1>
+      <a:accent2>
+        <a:srgbClr val="E97132"/>
+      </a:accent2>
+      <a:accent3>
+        <a:srgbClr val="196B24"/>
+      </a:accent3>
+      <a:accent4>
+        <a:srgbClr val="0F9ED5"/>
+      </a:accent4>
+      <a:accent5>
+        <a:srgbClr val="A02B93"/>
+      </a:accent5>
+      <a:accent6>
+        <a:srgbClr val="4EA72E"/>
+      </a:accent6>
+      <a:hlink>
+        <a:srgbClr val="467886"/>
+      </a:hlink>
+      <a:folHlink>
+        <a:srgbClr val="96607D"/>
+      </a:folHlink>
+    </a:clrScheme>
+    <a:fontScheme name="Office">
+      <a:majorFont>
+        <a:latin typeface="Aptos Display" panose="02110004020202020204"/>
+        <a:ea typeface=""/>
+        <a:cs typeface=""/>
+        <a:font script="Jpan" typeface="游ゴシック Light"/>
+        <a:font script="Hang" typeface="맑은 고딕"/>
+        <a:font script="Hans" typeface="等线 Light"/>
+        <a:font script="Hant" typeface="新細明體"/>
+        <a:font script="Arab" typeface="Times New Roman"/>
+        <a:font script="Hebr" typeface="Times New Roman"/>
+        <a:font script="Thai" typeface="Angsana New"/>
+        <a:font script="Ethi" typeface="Nyala"/>
+        <a:font script="Beng" typeface="Vrinda"/>
+        <a:font script="Gujr" typeface="Shruti"/>
+        <a:font script="Khmr" typeface="MoolBoran"/>
+        <a:font script="Knda" typeface="Tunga"/>
+        <a:font script="Guru" typeface="Raavi"/>
+        <a:font script="Cans" typeface="Euphemia"/>
+        <a:font script="Cher" typeface="Plantagenet Cherokee"/>
+        <a:font script="Yiii" typeface="Microsoft Yi Baiti"/>
+        <a:font script="Tibt" typeface="Microsoft Himalaya"/>
+        <a:font script="Thaa" typeface="MV Boli"/>
+        <a:font script="Deva" typeface="Mangal"/>
+        <a:font script="Telu" typeface="Gautami"/>
+        <a:font script="Taml" typeface="Latha"/>
+        <a:font script="Syrc" typeface="Estrangelo Edessa"/>
+        <a:font script="Orya" typeface="Kalinga"/>
+        <a:font script="Mlym" typeface="Kartika"/>
+        <a:font script="Laoo" typeface="DokChampa"/>
+        <a:font script="Sinh" typeface="Iskoola Pota"/>
+        <a:font script="Mong" typeface="Mongolian Baiti"/>
+        <a:font script="Viet" typeface="Times New Roman"/>
+        <a:font script="Uigh" typeface="Microsoft Uighur"/>
+        <a:font script="Geor" typeface="Sylfaen"/>
+        <a:font script="Armn" typeface="Arial"/>
+        <a:font script="Bugi" typeface="Leelawadee UI"/>
+        <a:font script="Bopo" typeface="Microsoft JhengHei"/>
+        <a:font script="Java" typeface="Javanese Text"/>
+        <a:font script="Lisu" typeface="Segoe UI"/>
+        <a:font script="Mymr" typeface="Myanmar Text"/>
+        <a:font script="Nkoo" typeface="Ebrima"/>
+        <a:font script="Olck" typeface="Nirmala UI"/>
+        <a:font script="Osma" typeface="Ebrima"/>
+        <a:font script="Phag" typeface="Phagspa"/>
+        <a:font script="Syrn" typeface="Estrangelo Edessa"/>
+        <a:font script="Syrj" typeface="Estrangelo Edessa"/>
+        <a:font script="Syre" typeface="Estrangelo Edessa"/>
+        <a:font script="Sora" typeface="Nirmala UI"/>
+        <a:font script="Tale" typeface="Microsoft Tai Le"/>
+        <a:font script="Talu" typeface="Microsoft New Tai Lue"/>
+        <a:font script="Tfng" typeface="Ebrima"/>
+      </a:majorFont>
+      <a:minorFont>
+        <a:latin typeface="Aptos" panose="02110004020202020204"/>
+        <a:ea typeface=""/>
+        <a:cs typeface=""/>
+        <a:font script="Jpan" typeface="游ゴシック"/>
+        <a:font script="Hang" typeface="맑은 고딕"/>
+        <a:font script="Hans" typeface="等线"/>
+        <a:font script="Hant" typeface="新細明體"/>
+        <a:font script="Arab" typeface="Arial"/>
+        <a:font script="Hebr" typeface="Arial"/>
+        <a:font script="Thai" typeface="Cordia New"/>
+        <a:font script="Ethi" typeface="Nyala"/>
+        <a:font script="Beng" typeface="Vrinda"/>
+        <a:font script="Gujr" typeface="Shruti"/>
+        <a:font script="Khmr" typeface="DaunPenh"/>
+        <a:font script="Knda" typeface="Tunga"/>
+        <a:font script="Guru" typeface="Raavi"/>
+        <a:font script="Cans" typeface="Euphemia"/>
+        <a:font script="Cher" typeface="Plantagenet Cherokee"/>
+        <a:font script="Yiii" typeface="Microsoft Yi Baiti"/>
+        <a:font script="Tibt" typeface="Microsoft Himalaya"/>
+        <a:font script="Thaa" typeface="MV Boli"/>
+        <a:font script="Deva" typeface="Mangal"/>
+        <a:font script="Telu" typeface="Gautami"/>
+        <a:font script="Taml" typeface="Latha"/>
+        <a:font script="Syrc" typeface="Estrangelo Edessa"/>
+        <a:font script="Orya" typeface="Kalinga"/>
+        <a:font script="Mlym" typeface="Kartika"/>
+        <a:font script="Laoo" typeface="DokChampa"/>
+        <a:font script="Sinh" typeface="Iskoola Pota"/>
+        <a:font script="Mong" typeface="Mongolian Baiti"/>
+        <a:font script="Viet" typeface="Arial"/>
+        <a:font script="Uigh" typeface="Microsoft Uighur"/>
+        <a:font script="Geor" typeface="Sylfaen"/>
+        <a:font script="Armn" typeface="Arial"/>
+        <a:font script="Bugi" typeface="Leelawadee UI"/>
+        <a:font script="Bopo" typeface="Microsoft JhengHei"/>
+        <a:font script="Java" typeface="Javanese Text"/>
+        <a:font script="Lisu" typeface="Segoe UI"/>
+        <a:font script="Mymr" typeface="Myanmar Text"/>
+        <a:font script="Nkoo" typeface="Ebrima"/>
+        <a:font script="Olck" typeface="Nirmala UI"/>
+        <a:font script="Osma" typeface="Ebrima"/>
+        <a:font script="Phag" typeface="Phagspa"/>
+        <a:font script="Syrn" typeface="Estrangelo Edessa"/>
+        <a:font script="Syrj" typeface="Estrangelo Edessa"/>
+        <a:font script="Syre" typeface="Estrangelo Edessa"/>
+        <a:font script="Sora" typeface="Nirmala UI"/>
+        <a:font script="Tale" typeface="Microsoft Tai Le"/>
+        <a:font script="Talu" typeface="Microsoft New Tai Lue"/>
+        <a:font script="Tfng" typeface="Ebrima"/>
+      </a:minorFont>
+    </a:fontScheme>
+    <a:fmtScheme name="Office">
+      <a:fillStyleLst>
+        <a:solidFill>
+          <a:schemeClr val="phClr"/>
+        </a:solidFill>
+        <a:gradFill rotWithShape="1">
+          <a:gsLst>
+            <a:gs pos="0">
+              <a:schemeClr val="phClr">
+                <a:lumMod val="110000"/>
+                <a:satMod val="105000"/>
+                <a:tint val="67000"/>
+              </a:schemeClr>
+            </a:gs>
+            <a:gs pos="50000">
+              <a:schemeClr val="phClr">
+                <a:lumMod val="105000"/>
+                <a:satMod val="103000"/>
+                <a:tint val="73000"/>
+              </a:schemeClr>
+            </a:gs>
+            <a:gs pos="100000">
+              <a:schemeClr val="phClr">
+                <a:lumMod val="105000"/>
+                <a:satMod val="109000"/>
+                <a:tint val="81000"/>
+              </a:schemeClr>
+            </a:gs>
+          </a:gsLst>
+          <a:lin ang="5400000" scaled="0"/>
+        </a:gradFill>
+        <a:gradFill rotWithShape="1">
+          <a:gsLst>
+            <a:gs pos="0">
+              <a:schemeClr val="phClr">
+                <a:satMod val="103000"/>
+                <a:lumMod val="102000"/>
+                <a:tint val="94000"/>
+              </a:schemeClr>
+            </a:gs>
+            <a:gs pos="50000">
+              <a:schemeClr val="phClr">
+                <a:satMod val="110000"/>
+                <a:lumMod val="100000"/>
+                <a:shade val="100000"/>
+              </a:schemeClr>
+            </a:gs>
+            <a:gs pos="100000">
+              <a:schemeClr val="phClr">
+                <a:lumMod val="99000"/>
+                <a:satMod val="120000"/>
+                <a:shade val="78000"/>
+              </a:schemeClr>
+            </a:gs>
+          </a:gsLst>
+          <a:lin ang="5400000" scaled="0"/>
+        </a:gradFill>
+      </a:fillStyleLst>
+      <a:lnStyleLst>
+        <a:ln w="12700" cap="flat" cmpd="sng" algn="ctr">
+          <a:solidFill>
+            <a:schemeClr val="phClr"/>
+          </a:solidFill>
+          <a:prstDash val="solid"/>
+          <a:miter lim="800000"/>
+        </a:ln>
+        <a:ln w="19050" cap="flat" cmpd="sng" algn="ctr">
+          <a:solidFill>
+            <a:schemeClr val="phClr"/>
+          </a:solidFill>
+          <a:prstDash val="solid"/>
+          <a:miter lim="800000"/>
+        </a:ln>
+        <a:ln w="25400" cap="flat" cmpd="sng" algn="ctr">
+          <a:solidFill>
+            <a:schemeClr val="phClr"/>
+          </a:solidFill>
+          <a:prstDash val="solid"/>
+          <a:miter lim="800000"/>
+        </a:ln>
+      </a:lnStyleLst>
+      <a:effectStyleLst>
+        <a:effectStyle>
+          <a:effectLst/>
+        </a:effectStyle>
+        <a:effectStyle>
+          <a:effectLst/>
+        </a:effectStyle>
+        <a:effectStyle>
+          <a:effectLst>
+            <a:outerShdw blurRad="57150" dist="19050" dir="5400000" algn="ctr" rotWithShape="0">
+              <a:srgbClr val="000000">
+                <a:alpha val="63000"/>
+              </a:srgbClr>
+            </a:outerShdw>
+          </a:effectLst>
+        </a:effectStyle>
+      </a:effectStyleLst>
+      <a:bgFillStyleLst>
+        <a:solidFill>
+          <a:schemeClr val="phClr"/>
+        </a:solidFill>
+        <a:solidFill>
+          <a:schemeClr val="phClr">
+            <a:tint val="95000"/>
+            <a:satMod val="170000"/>
+          </a:schemeClr>
+        </a:solidFill>
+        <a:gradFill rotWithShape="1">
+          <a:gsLst>
+            <a:gs pos="0">
+              <a:schemeClr val="phClr">
+                <a:tint val="93000"/>
+                <a:satMod val="150000"/>
+                <a:shade val="98000"/>
+                <a:lumMod val="102000"/>
+              </a:schemeClr>
+            </a:gs>
+            <a:gs pos="50000">
+              <a:schemeClr val="phClr">
+                <a:tint val="98000"/>
+                <a:satMod val="130000"/>
+                <a:shade val="90000"/>
+                <a:lumMod val="103000"/>
+              </a:schemeClr>
+            </a:gs>
+            <a:gs pos="100000">
+              <a:schemeClr val="phClr">
+                <a:shade val="63000"/>
+                <a:satMod val="120000"/>
+              </a:schemeClr>
+            </a:gs>
+          </a:gsLst>
+          <a:lin ang="5400000" scaled="0"/>
+        </a:gradFill>
+      </a:bgFillStyleLst>
+    </a:fmtScheme>
+  </a:themeElements>
+  <a:objectDefaults>
+    <a:lnDef>
+      <a:spPr/>
+      <a:bodyPr/>
+      <a:lstStyle/>
+      <a:style>
+        <a:lnRef idx="2">
+          <a:schemeClr val="accent1"/>
+        </a:lnRef>
+        <a:fillRef idx="0">
+          <a:schemeClr val="accent1"/>
+        </a:fillRef>
+        <a:effectRef idx="1">
+          <a:schemeClr val="accent1"/>
+        </a:effectRef>
+        <a:fontRef idx="minor">
+          <a:schemeClr val="tx1"/>
+        </a:fontRef>
+      </a:style>
+    </a:lnDef>
+  </a:objectDefaults>
+  <a:extraClrSchemeLst/>
+  <a:extLst>
+    <a:ext uri="{05A4C25C-085E-4340-85A3-A5531E510DB2}">
+      <thm15:themeFamily xmlns:thm15="http://schemas.microsoft.com/office/thememl/2012/main" name="Office Theme" id="{2E142A2C-CD16-42D6-873A-C26D2A0506FA}" vid="{1BDDFF52-6CD6-40A5-AB3C-68EB2F1E4D0A}"/>
+    </a:ext>
+  </a:extLst>
+</a:theme>
 </file>